--- a/_posts/2019/动视引擎组件介绍.pptx
+++ b/_posts/2019/动视引擎组件介绍.pptx
@@ -5,7 +5,7 @@
     <p:sldMasterId id="2147483648" r:id="rId1"/>
   </p:sldMasterIdLst>
   <p:notesMasterIdLst>
-    <p:notesMasterId r:id="rId24"/>
+    <p:notesMasterId r:id="rId25"/>
   </p:notesMasterIdLst>
   <p:sldIdLst>
     <p:sldId id="256" r:id="rId2"/>
@@ -14,22 +14,23 @@
     <p:sldId id="259" r:id="rId5"/>
     <p:sldId id="272" r:id="rId6"/>
     <p:sldId id="273" r:id="rId7"/>
-    <p:sldId id="262" r:id="rId8"/>
-    <p:sldId id="263" r:id="rId9"/>
-    <p:sldId id="274" r:id="rId10"/>
-    <p:sldId id="275" r:id="rId11"/>
-    <p:sldId id="266" r:id="rId12"/>
-    <p:sldId id="276" r:id="rId13"/>
-    <p:sldId id="277" r:id="rId14"/>
-    <p:sldId id="278" r:id="rId15"/>
-    <p:sldId id="279" r:id="rId16"/>
-    <p:sldId id="280" r:id="rId17"/>
-    <p:sldId id="281" r:id="rId18"/>
-    <p:sldId id="282" r:id="rId19"/>
-    <p:sldId id="283" r:id="rId20"/>
-    <p:sldId id="284" r:id="rId21"/>
-    <p:sldId id="285" r:id="rId22"/>
-    <p:sldId id="271" r:id="rId23"/>
+    <p:sldId id="286" r:id="rId8"/>
+    <p:sldId id="262" r:id="rId9"/>
+    <p:sldId id="263" r:id="rId10"/>
+    <p:sldId id="274" r:id="rId11"/>
+    <p:sldId id="275" r:id="rId12"/>
+    <p:sldId id="266" r:id="rId13"/>
+    <p:sldId id="276" r:id="rId14"/>
+    <p:sldId id="277" r:id="rId15"/>
+    <p:sldId id="278" r:id="rId16"/>
+    <p:sldId id="279" r:id="rId17"/>
+    <p:sldId id="280" r:id="rId18"/>
+    <p:sldId id="281" r:id="rId19"/>
+    <p:sldId id="282" r:id="rId20"/>
+    <p:sldId id="283" r:id="rId21"/>
+    <p:sldId id="284" r:id="rId22"/>
+    <p:sldId id="285" r:id="rId23"/>
+    <p:sldId id="271" r:id="rId24"/>
   </p:sldIdLst>
   <p:sldSz cx="12192000" cy="6858000"/>
   <p:notesSz cx="6858000" cy="9144000"/>
@@ -230,7 +231,7 @@
           <a:p>
             <a:fld id="{02971CF0-CCE8-4D16-B012-63AC8318EBCE}" type="datetimeFigureOut">
               <a:rPr lang="zh-CN" altLang="en-US" smtClean="0"/>
-              <a:t>2019/10/18</a:t>
+              <a:t>2019/10/25</a:t>
             </a:fld>
             <a:endParaRPr lang="zh-CN" altLang="en-US"/>
           </a:p>
@@ -637,6 +638,29 @@
           <a:bodyPr/>
           <a:lstStyle/>
           <a:p>
+            <a:pPr marL="0" marR="0" lvl="0" indent="0" algn="l" defTabSz="914400" rtl="0" eaLnBrk="1" fontAlgn="auto" latinLnBrk="0" hangingPunct="1">
+              <a:lnSpc>
+                <a:spcPct val="100000"/>
+              </a:lnSpc>
+              <a:spcBef>
+                <a:spcPts val="0"/>
+              </a:spcBef>
+              <a:spcAft>
+                <a:spcPts val="0"/>
+              </a:spcAft>
+              <a:buClrTx/>
+              <a:buSzTx/>
+              <a:buFontTx/>
+              <a:buNone/>
+              <a:tabLst/>
+              <a:defRPr/>
+            </a:pPr>
+            <a:r>
+              <a:rPr lang="zh-CN" altLang="en-US" dirty="0" smtClean="0"/>
+              <a:t>图层分为要素图层和场景图层两类，这两类图层区别就在于是否跟业务有关，跟业务无关的是场景图层，跟业务有关的是要素图层，所以一个图层是要素图层还是场景图层其实是不是固定的，在不同业务场景下可以互换的</a:t>
+            </a:r>
+          </a:p>
+          <a:p>
             <a:endParaRPr lang="zh-CN" altLang="en-US" b="1" dirty="0"/>
           </a:p>
         </p:txBody>
@@ -668,7 +692,7 @@
     </p:spTree>
     <p:extLst>
       <p:ext uri="{BB962C8B-B14F-4D97-AF65-F5344CB8AC3E}">
-        <p14:creationId xmlns:p14="http://schemas.microsoft.com/office/powerpoint/2010/main" val="3118519711"/>
+        <p14:creationId xmlns:p14="http://schemas.microsoft.com/office/powerpoint/2010/main" val="1570061370"/>
       </p:ext>
     </p:extLst>
   </p:cSld>
@@ -727,7 +751,7 @@
           <a:bodyPr/>
           <a:lstStyle/>
           <a:p>
-            <a:endParaRPr lang="zh-CN" altLang="en-US" dirty="0"/>
+            <a:endParaRPr lang="zh-CN" altLang="en-US" b="1" dirty="0"/>
           </a:p>
         </p:txBody>
       </p:sp>
@@ -758,7 +782,7 @@
     </p:spTree>
     <p:extLst>
       <p:ext uri="{BB962C8B-B14F-4D97-AF65-F5344CB8AC3E}">
-        <p14:creationId xmlns:p14="http://schemas.microsoft.com/office/powerpoint/2010/main" val="1480961758"/>
+        <p14:creationId xmlns:p14="http://schemas.microsoft.com/office/powerpoint/2010/main" val="3118519711"/>
       </p:ext>
     </p:extLst>
   </p:cSld>
@@ -817,7 +841,7 @@
           <a:bodyPr/>
           <a:lstStyle/>
           <a:p>
-            <a:endParaRPr lang="zh-CN" altLang="en-US" b="1" dirty="0"/>
+            <a:endParaRPr lang="zh-CN" altLang="en-US" dirty="0"/>
           </a:p>
         </p:txBody>
       </p:sp>
@@ -848,7 +872,7 @@
     </p:spTree>
     <p:extLst>
       <p:ext uri="{BB962C8B-B14F-4D97-AF65-F5344CB8AC3E}">
-        <p14:creationId xmlns:p14="http://schemas.microsoft.com/office/powerpoint/2010/main" val="3976217290"/>
+        <p14:creationId xmlns:p14="http://schemas.microsoft.com/office/powerpoint/2010/main" val="1480961758"/>
       </p:ext>
     </p:extLst>
   </p:cSld>
@@ -907,130 +931,6 @@
           <a:bodyPr/>
           <a:lstStyle/>
           <a:p>
-            <a:r>
-              <a:rPr lang="en-US" altLang="zh-CN" b="1" dirty="0" smtClean="0"/>
-              <a:t>1</a:t>
-            </a:r>
-            <a:r>
-              <a:rPr lang="zh-CN" altLang="en-US" b="1" dirty="0" smtClean="0"/>
-              <a:t>、这里的</a:t>
-            </a:r>
-            <a:r>
-              <a:rPr lang="en-US" altLang="zh-CN" b="1" dirty="0" err="1" smtClean="0"/>
-              <a:t>src</a:t>
-            </a:r>
-            <a:r>
-              <a:rPr lang="zh-CN" altLang="en-US" b="1" dirty="0" smtClean="0"/>
-              <a:t>和</a:t>
-            </a:r>
-            <a:r>
-              <a:rPr lang="en-US" altLang="zh-CN" b="1" dirty="0" err="1" smtClean="0"/>
-              <a:t>unityLoader</a:t>
-            </a:r>
-            <a:r>
-              <a:rPr lang="zh-CN" altLang="en-US" b="1" dirty="0" smtClean="0"/>
-              <a:t>是引入三维引擎资源包的</a:t>
-            </a:r>
-            <a:r>
-              <a:rPr lang="en-US" altLang="zh-CN" b="1" dirty="0" err="1" smtClean="0"/>
-              <a:t>js</a:t>
-            </a:r>
-            <a:r>
-              <a:rPr lang="zh-CN" altLang="en-US" b="1" dirty="0" smtClean="0"/>
-              <a:t>和</a:t>
-            </a:r>
-            <a:r>
-              <a:rPr lang="en-US" altLang="zh-CN" b="1" dirty="0" err="1" smtClean="0"/>
-              <a:t>josn</a:t>
-            </a:r>
-            <a:r>
-              <a:rPr lang="zh-CN" altLang="en-US" b="1" dirty="0" smtClean="0"/>
-              <a:t>文件，之前版本这个资源包是放在业务组件前端静态文件管理，但考虑到这个资源包体积较大，并且随着项目需要拷贝，不利于统一更新，所以现在这个资源包统一放在动视引擎组件后端进行管理。后面有项目需要用到三维引擎就需要该项目后端写透传接口从动视引擎后端取到这两个文件传给业务前端进行加载。</a:t>
-            </a:r>
-            <a:endParaRPr lang="en-US" altLang="zh-CN" b="1" dirty="0" smtClean="0"/>
-          </a:p>
-          <a:p>
-            <a:r>
-              <a:rPr lang="en-US" altLang="zh-CN" b="1" dirty="0" smtClean="0"/>
-              <a:t>2</a:t>
-            </a:r>
-            <a:r>
-              <a:rPr lang="zh-CN" altLang="en-US" b="1" dirty="0" smtClean="0"/>
-              <a:t>、</a:t>
-            </a:r>
-            <a:r>
-              <a:rPr lang="en-US" altLang="zh-CN" b="1" dirty="0" smtClean="0"/>
-              <a:t>Width</a:t>
-            </a:r>
-            <a:r>
-              <a:rPr lang="zh-CN" altLang="en-US" b="1" dirty="0" smtClean="0"/>
-              <a:t>和</a:t>
-            </a:r>
-            <a:r>
-              <a:rPr lang="en-US" altLang="zh-CN" b="1" dirty="0" smtClean="0"/>
-              <a:t>height</a:t>
-            </a:r>
-            <a:r>
-              <a:rPr lang="zh-CN" altLang="en-US" b="1" dirty="0" smtClean="0"/>
-              <a:t>支持弹性布局，需要业务组件监听</a:t>
-            </a:r>
-            <a:r>
-              <a:rPr lang="en-US" altLang="zh-CN" b="1" dirty="0" smtClean="0"/>
-              <a:t>resize</a:t>
-            </a:r>
-            <a:r>
-              <a:rPr lang="zh-CN" altLang="en-US" b="1" dirty="0" smtClean="0"/>
-              <a:t>事件，动态计算出三维容器宽和高，传给</a:t>
-            </a:r>
-            <a:r>
-              <a:rPr lang="en-US" altLang="zh-CN" b="1" dirty="0" err="1" smtClean="0"/>
-              <a:t>dve-vue</a:t>
-            </a:r>
-            <a:r>
-              <a:rPr lang="zh-CN" altLang="en-US" b="1" dirty="0" smtClean="0"/>
-              <a:t>组件。</a:t>
-            </a:r>
-            <a:endParaRPr lang="en-US" altLang="zh-CN" b="1" dirty="0" smtClean="0"/>
-          </a:p>
-          <a:p>
-            <a:r>
-              <a:rPr lang="en-US" altLang="zh-CN" b="1" dirty="0" smtClean="0"/>
-              <a:t>3</a:t>
-            </a:r>
-            <a:r>
-              <a:rPr lang="zh-CN" altLang="en-US" b="1" dirty="0" smtClean="0"/>
-              <a:t>、</a:t>
-            </a:r>
-            <a:r>
-              <a:rPr lang="en-US" altLang="zh-CN" b="1" dirty="0" err="1" smtClean="0"/>
-              <a:t>dveId</a:t>
-            </a:r>
-            <a:r>
-              <a:rPr lang="zh-CN" altLang="en-US" b="1" dirty="0" smtClean="0"/>
-              <a:t>是画布</a:t>
-            </a:r>
-            <a:r>
-              <a:rPr lang="en-US" altLang="zh-CN" b="1" dirty="0" smtClean="0"/>
-              <a:t>id</a:t>
-            </a:r>
-          </a:p>
-          <a:p>
-            <a:r>
-              <a:rPr lang="en-US" altLang="zh-CN" b="1" dirty="0" smtClean="0"/>
-              <a:t>4</a:t>
-            </a:r>
-            <a:r>
-              <a:rPr lang="zh-CN" altLang="en-US" b="1" dirty="0" smtClean="0"/>
-              <a:t>、组件会抛出画布加载的进度，根据进度可以处理后面逻辑，</a:t>
-            </a:r>
-            <a:r>
-              <a:rPr lang="en-US" altLang="zh-CN" b="1" dirty="0" smtClean="0"/>
-              <a:t>1</a:t>
-            </a:r>
-            <a:r>
-              <a:rPr lang="zh-CN" altLang="en-US" b="1" dirty="0" smtClean="0"/>
-              <a:t>代表画布加载完毕</a:t>
-            </a:r>
             <a:endParaRPr lang="zh-CN" altLang="en-US" b="1" dirty="0"/>
           </a:p>
         </p:txBody>
@@ -1062,7 +962,7 @@
     </p:spTree>
     <p:extLst>
       <p:ext uri="{BB962C8B-B14F-4D97-AF65-F5344CB8AC3E}">
-        <p14:creationId xmlns:p14="http://schemas.microsoft.com/office/powerpoint/2010/main" val="3326565731"/>
+        <p14:creationId xmlns:p14="http://schemas.microsoft.com/office/powerpoint/2010/main" val="3976217290"/>
       </p:ext>
     </p:extLst>
   </p:cSld>
@@ -1127,51 +1027,39 @@
             </a:r>
             <a:r>
               <a:rPr lang="zh-CN" altLang="en-US" b="1" dirty="0" smtClean="0"/>
-              <a:t>、</a:t>
+              <a:t>、这里的</a:t>
             </a:r>
             <a:r>
               <a:rPr lang="en-US" altLang="zh-CN" b="1" dirty="0" err="1" smtClean="0"/>
-              <a:t>gameInstance</a:t>
+              <a:t>src</a:t>
             </a:r>
             <a:r>
               <a:rPr lang="zh-CN" altLang="en-US" b="1" dirty="0" smtClean="0"/>
-              <a:t>是和</a:t>
-            </a:r>
-            <a:r>
-              <a:rPr lang="en-US" altLang="zh-CN" b="1" dirty="0" smtClean="0"/>
-              <a:t>unity3D</a:t>
+              <a:t>和</a:t>
+            </a:r>
+            <a:r>
+              <a:rPr lang="en-US" altLang="zh-CN" b="1" dirty="0" err="1" smtClean="0"/>
+              <a:t>unityLoader</a:t>
             </a:r>
             <a:r>
               <a:rPr lang="zh-CN" altLang="en-US" b="1" dirty="0" smtClean="0"/>
-              <a:t>进行通信的实例，所有的直接通信接口都得通过这个实例，因为我们封装了</a:t>
+              <a:t>是引入三维引擎资源包的</a:t>
             </a:r>
             <a:r>
               <a:rPr lang="en-US" altLang="zh-CN" b="1" dirty="0" err="1" smtClean="0"/>
-              <a:t>dvejs</a:t>
+              <a:t>js</a:t>
             </a:r>
             <a:r>
               <a:rPr lang="zh-CN" altLang="en-US" b="1" dirty="0" smtClean="0"/>
-              <a:t>，直接通信都在</a:t>
+              <a:t>和</a:t>
             </a:r>
             <a:r>
               <a:rPr lang="en-US" altLang="zh-CN" b="1" dirty="0" err="1" smtClean="0"/>
-              <a:t>dvejs</a:t>
+              <a:t>josn</a:t>
             </a:r>
             <a:r>
               <a:rPr lang="zh-CN" altLang="en-US" b="1" dirty="0" smtClean="0"/>
-              <a:t>，业务组件只需要调</a:t>
-            </a:r>
-            <a:r>
-              <a:rPr lang="en-US" altLang="zh-CN" b="1" dirty="0" err="1" smtClean="0"/>
-              <a:t>dvejs</a:t>
-            </a:r>
-            <a:r>
-              <a:rPr lang="zh-CN" altLang="en-US" b="1" dirty="0" smtClean="0"/>
-              <a:t>接口就可以，这里需要把这个实例传给</a:t>
-            </a:r>
-            <a:r>
-              <a:rPr lang="en-US" altLang="zh-CN" b="1" dirty="0" err="1" smtClean="0"/>
-              <a:t>dvejs</a:t>
+              <a:t>文件，之前版本这个资源包是放在业务组件前端静态文件管理，但考虑到这个资源包体积较大，并且随着项目需要拷贝，不利于统一更新，所以现在这个资源包统一放在动视引擎组件后端进行管理。后面有项目需要用到三维引擎就需要该项目后端写透传接口从动视引擎后端取到这两个文件传给业务前端进行加载。</a:t>
             </a:r>
             <a:endParaRPr lang="en-US" altLang="zh-CN" b="1" dirty="0" smtClean="0"/>
           </a:p>
@@ -1182,19 +1070,39 @@
             </a:r>
             <a:r>
               <a:rPr lang="zh-CN" altLang="en-US" b="1" dirty="0" smtClean="0"/>
-              <a:t>、由于三维引擎内部需要下载需要的静态资源，比如一些图标、动画、模型，需要传递动视引擎组件的上下文给引擎，这个需要业务组件后端取获取动视引擎的</a:t>
+              <a:t>、</a:t>
+            </a:r>
+            <a:r>
+              <a:rPr lang="en-US" altLang="zh-CN" b="1" dirty="0" smtClean="0"/>
+              <a:t>Width</a:t>
+            </a:r>
+            <a:r>
+              <a:rPr lang="zh-CN" altLang="en-US" b="1" dirty="0" smtClean="0"/>
+              <a:t>和</a:t>
+            </a:r>
+            <a:r>
+              <a:rPr lang="en-US" altLang="zh-CN" b="1" dirty="0" smtClean="0"/>
+              <a:t>height</a:t>
+            </a:r>
+            <a:r>
+              <a:rPr lang="zh-CN" altLang="en-US" b="1" dirty="0" smtClean="0"/>
+              <a:t>支持弹性布局，需要业务组件监听</a:t>
+            </a:r>
+            <a:r>
+              <a:rPr lang="en-US" altLang="zh-CN" b="1" dirty="0" smtClean="0"/>
+              <a:t>resize</a:t>
+            </a:r>
+            <a:r>
+              <a:rPr lang="zh-CN" altLang="en-US" b="1" dirty="0" smtClean="0"/>
+              <a:t>事件，动态计算出三维容器宽和高，传给</a:t>
             </a:r>
             <a:r>
               <a:rPr lang="en-US" altLang="zh-CN" b="1" dirty="0" err="1" smtClean="0"/>
-              <a:t>ip:port</a:t>
-            </a:r>
-            <a:r>
-              <a:rPr lang="en-US" altLang="zh-CN" b="1" dirty="0" smtClean="0"/>
-              <a:t>/</a:t>
+              <a:t>dve-vue</a:t>
             </a:r>
             <a:r>
               <a:rPr lang="zh-CN" altLang="en-US" b="1" dirty="0" smtClean="0"/>
-              <a:t>组件标识</a:t>
+              <a:t>组件。</a:t>
             </a:r>
             <a:endParaRPr lang="en-US" altLang="zh-CN" b="1" dirty="0" smtClean="0"/>
           </a:p>
@@ -1205,9 +1113,20 @@
             </a:r>
             <a:r>
               <a:rPr lang="zh-CN" altLang="en-US" b="1" dirty="0" smtClean="0"/>
-              <a:t>、地图配置好之后需要加载地图结构和资源，这个同样是从动视引擎后端获取</a:t>
-            </a:r>
-            <a:endParaRPr lang="en-US" altLang="zh-CN" b="1" dirty="0" smtClean="0"/>
+              <a:t>、</a:t>
+            </a:r>
+            <a:r>
+              <a:rPr lang="en-US" altLang="zh-CN" b="1" dirty="0" err="1" smtClean="0"/>
+              <a:t>dveId</a:t>
+            </a:r>
+            <a:r>
+              <a:rPr lang="zh-CN" altLang="en-US" b="1" dirty="0" smtClean="0"/>
+              <a:t>是画布</a:t>
+            </a:r>
+            <a:r>
+              <a:rPr lang="en-US" altLang="zh-CN" b="1" dirty="0" smtClean="0"/>
+              <a:t>id</a:t>
+            </a:r>
           </a:p>
           <a:p>
             <a:r>
@@ -1216,31 +1135,15 @@
             </a:r>
             <a:r>
               <a:rPr lang="zh-CN" altLang="en-US" b="1" dirty="0" smtClean="0"/>
-              <a:t>、</a:t>
+              <a:t>、组件会抛出画布加载的进度，根据进度可以处理后面逻辑，</a:t>
             </a:r>
             <a:r>
               <a:rPr lang="en-US" altLang="zh-CN" b="1" dirty="0" smtClean="0"/>
-              <a:t>Builder</a:t>
+              <a:t>1</a:t>
             </a:r>
             <a:r>
               <a:rPr lang="zh-CN" altLang="en-US" b="1" dirty="0" smtClean="0"/>
-              <a:t>是</a:t>
-            </a:r>
-            <a:r>
-              <a:rPr lang="en-US" altLang="zh-CN" b="1" dirty="0" err="1" smtClean="0"/>
-              <a:t>dvejs</a:t>
-            </a:r>
-            <a:r>
-              <a:rPr lang="zh-CN" altLang="en-US" b="1" dirty="0" smtClean="0"/>
-              <a:t>中构建类，里面把三维地图的构建过程实现（新建三维地图、下载地图资源、添加所有场景图层和要素图层），这样只业务只需要调其</a:t>
-            </a:r>
-            <a:r>
-              <a:rPr lang="en-US" altLang="zh-CN" b="1" dirty="0" err="1" smtClean="0"/>
-              <a:t>initMap</a:t>
-            </a:r>
-            <a:r>
-              <a:rPr lang="zh-CN" altLang="en-US" b="1" dirty="0" smtClean="0"/>
-              <a:t>方法就可以加载三维场景</a:t>
+              <a:t>代表画布加载完毕</a:t>
             </a:r>
             <a:endParaRPr lang="zh-CN" altLang="en-US" b="1" dirty="0"/>
           </a:p>
@@ -1273,7 +1176,7 @@
     </p:spTree>
     <p:extLst>
       <p:ext uri="{BB962C8B-B14F-4D97-AF65-F5344CB8AC3E}">
-        <p14:creationId xmlns:p14="http://schemas.microsoft.com/office/powerpoint/2010/main" val="1213525792"/>
+        <p14:creationId xmlns:p14="http://schemas.microsoft.com/office/powerpoint/2010/main" val="3326565731"/>
       </p:ext>
     </p:extLst>
   </p:cSld>
@@ -1333,8 +1236,125 @@
           <a:lstStyle/>
           <a:p>
             <a:r>
+              <a:rPr lang="en-US" altLang="zh-CN" b="1" dirty="0" smtClean="0"/>
+              <a:t>1</a:t>
+            </a:r>
+            <a:r>
               <a:rPr lang="zh-CN" altLang="en-US" b="1" dirty="0" smtClean="0"/>
-              <a:t>绘制场景图层是不需要传任何参数，因为之前已经说过场景图层不涉及任何业务数据交互</a:t>
+              <a:t>、</a:t>
+            </a:r>
+            <a:r>
+              <a:rPr lang="en-US" altLang="zh-CN" b="1" dirty="0" err="1" smtClean="0"/>
+              <a:t>gameInstance</a:t>
+            </a:r>
+            <a:r>
+              <a:rPr lang="zh-CN" altLang="en-US" b="1" dirty="0" smtClean="0"/>
+              <a:t>是和</a:t>
+            </a:r>
+            <a:r>
+              <a:rPr lang="en-US" altLang="zh-CN" b="1" dirty="0" smtClean="0"/>
+              <a:t>unity3D</a:t>
+            </a:r>
+            <a:r>
+              <a:rPr lang="zh-CN" altLang="en-US" b="1" dirty="0" smtClean="0"/>
+              <a:t>进行通信的实例，所有的直接通信接口都得通过这个实例，因为我们封装了</a:t>
+            </a:r>
+            <a:r>
+              <a:rPr lang="en-US" altLang="zh-CN" b="1" dirty="0" err="1" smtClean="0"/>
+              <a:t>dvejs</a:t>
+            </a:r>
+            <a:r>
+              <a:rPr lang="zh-CN" altLang="en-US" b="1" dirty="0" smtClean="0"/>
+              <a:t>，直接通信都在</a:t>
+            </a:r>
+            <a:r>
+              <a:rPr lang="en-US" altLang="zh-CN" b="1" dirty="0" err="1" smtClean="0"/>
+              <a:t>dvejs</a:t>
+            </a:r>
+            <a:r>
+              <a:rPr lang="zh-CN" altLang="en-US" b="1" dirty="0" smtClean="0"/>
+              <a:t>，业务组件只需要调</a:t>
+            </a:r>
+            <a:r>
+              <a:rPr lang="en-US" altLang="zh-CN" b="1" dirty="0" err="1" smtClean="0"/>
+              <a:t>dvejs</a:t>
+            </a:r>
+            <a:r>
+              <a:rPr lang="zh-CN" altLang="en-US" b="1" dirty="0" smtClean="0"/>
+              <a:t>接口就可以，这里需要把这个实例传给</a:t>
+            </a:r>
+            <a:r>
+              <a:rPr lang="en-US" altLang="zh-CN" b="1" dirty="0" err="1" smtClean="0"/>
+              <a:t>dvejs</a:t>
+            </a:r>
+            <a:endParaRPr lang="en-US" altLang="zh-CN" b="1" dirty="0" smtClean="0"/>
+          </a:p>
+          <a:p>
+            <a:r>
+              <a:rPr lang="en-US" altLang="zh-CN" b="1" dirty="0" smtClean="0"/>
+              <a:t>2</a:t>
+            </a:r>
+            <a:r>
+              <a:rPr lang="zh-CN" altLang="en-US" b="1" dirty="0" smtClean="0"/>
+              <a:t>、由于三维引擎内部需要下载需要的静态资源，比如一些图标、动画、模型，需要传递动视引擎组件的上下文给引擎，这个需要业务组件后端取获取动视引擎的</a:t>
+            </a:r>
+            <a:r>
+              <a:rPr lang="en-US" altLang="zh-CN" b="1" dirty="0" err="1" smtClean="0"/>
+              <a:t>ip:port</a:t>
+            </a:r>
+            <a:r>
+              <a:rPr lang="en-US" altLang="zh-CN" b="1" dirty="0" smtClean="0"/>
+              <a:t>/</a:t>
+            </a:r>
+            <a:r>
+              <a:rPr lang="zh-CN" altLang="en-US" b="1" dirty="0" smtClean="0"/>
+              <a:t>组件标识</a:t>
+            </a:r>
+            <a:endParaRPr lang="en-US" altLang="zh-CN" b="1" dirty="0" smtClean="0"/>
+          </a:p>
+          <a:p>
+            <a:r>
+              <a:rPr lang="en-US" altLang="zh-CN" b="1" dirty="0" smtClean="0"/>
+              <a:t>3</a:t>
+            </a:r>
+            <a:r>
+              <a:rPr lang="zh-CN" altLang="en-US" b="1" dirty="0" smtClean="0"/>
+              <a:t>、地图配置好之后需要加载地图结构和资源，这个同样是从动视引擎后端获取</a:t>
+            </a:r>
+            <a:endParaRPr lang="en-US" altLang="zh-CN" b="1" dirty="0" smtClean="0"/>
+          </a:p>
+          <a:p>
+            <a:r>
+              <a:rPr lang="en-US" altLang="zh-CN" b="1" dirty="0" smtClean="0"/>
+              <a:t>4</a:t>
+            </a:r>
+            <a:r>
+              <a:rPr lang="zh-CN" altLang="en-US" b="1" dirty="0" smtClean="0"/>
+              <a:t>、</a:t>
+            </a:r>
+            <a:r>
+              <a:rPr lang="en-US" altLang="zh-CN" b="1" dirty="0" smtClean="0"/>
+              <a:t>Builder</a:t>
+            </a:r>
+            <a:r>
+              <a:rPr lang="zh-CN" altLang="en-US" b="1" dirty="0" smtClean="0"/>
+              <a:t>是</a:t>
+            </a:r>
+            <a:r>
+              <a:rPr lang="en-US" altLang="zh-CN" b="1" dirty="0" err="1" smtClean="0"/>
+              <a:t>dvejs</a:t>
+            </a:r>
+            <a:r>
+              <a:rPr lang="zh-CN" altLang="en-US" b="1" dirty="0" smtClean="0"/>
+              <a:t>中构建类，里面把三维地图的构建过程实现（新建三维地图、下载地图资源、添加所有场景图层和要素图层），这样只业务只需要调其</a:t>
+            </a:r>
+            <a:r>
+              <a:rPr lang="en-US" altLang="zh-CN" b="1" dirty="0" err="1" smtClean="0"/>
+              <a:t>initMap</a:t>
+            </a:r>
+            <a:r>
+              <a:rPr lang="zh-CN" altLang="en-US" b="1" dirty="0" smtClean="0"/>
+              <a:t>方法就可以加载三维场景</a:t>
             </a:r>
             <a:endParaRPr lang="zh-CN" altLang="en-US" b="1" dirty="0"/>
           </a:p>
@@ -1367,7 +1387,7 @@
     </p:spTree>
     <p:extLst>
       <p:ext uri="{BB962C8B-B14F-4D97-AF65-F5344CB8AC3E}">
-        <p14:creationId xmlns:p14="http://schemas.microsoft.com/office/powerpoint/2010/main" val="1436341000"/>
+        <p14:creationId xmlns:p14="http://schemas.microsoft.com/office/powerpoint/2010/main" val="1213525792"/>
       </p:ext>
     </p:extLst>
   </p:cSld>
@@ -1428,7 +1448,7 @@
           <a:p>
             <a:r>
               <a:rPr lang="zh-CN" altLang="en-US" b="1" dirty="0" smtClean="0"/>
-              <a:t>绘制要素图层需要传模型和资源的绑定关系，这个需要资源上图之后，业务后端传给前端</a:t>
+              <a:t>绘制场景图层是不需要传任何参数，因为之前已经说过场景图层不涉及任何业务数据交互</a:t>
             </a:r>
             <a:endParaRPr lang="zh-CN" altLang="en-US" b="1" dirty="0"/>
           </a:p>
@@ -1461,7 +1481,7 @@
     </p:spTree>
     <p:extLst>
       <p:ext uri="{BB962C8B-B14F-4D97-AF65-F5344CB8AC3E}">
-        <p14:creationId xmlns:p14="http://schemas.microsoft.com/office/powerpoint/2010/main" val="4268831211"/>
+        <p14:creationId xmlns:p14="http://schemas.microsoft.com/office/powerpoint/2010/main" val="1436341000"/>
       </p:ext>
     </p:extLst>
   </p:cSld>
@@ -1522,15 +1542,7 @@
           <a:p>
             <a:r>
               <a:rPr lang="zh-CN" altLang="en-US" b="1" dirty="0" smtClean="0"/>
-              <a:t>现在三维场景和里面的图层都已经加载、绘制，剩下的就是根据项目的业务调用</a:t>
-            </a:r>
-            <a:r>
-              <a:rPr lang="en-US" altLang="zh-CN" b="1" dirty="0" err="1" smtClean="0"/>
-              <a:t>dvejs</a:t>
-            </a:r>
-            <a:r>
-              <a:rPr lang="zh-CN" altLang="en-US" b="1" dirty="0" smtClean="0"/>
-              <a:t>的功能接口实现效果，这边我们演示一下我们通过动视引擎实现的业务项目</a:t>
+              <a:t>绘制要素图层需要传模型和资源的绑定关系，这个需要资源上图之后，业务后端传给前端</a:t>
             </a:r>
             <a:endParaRPr lang="zh-CN" altLang="en-US" b="1" dirty="0"/>
           </a:p>
@@ -1563,7 +1575,7 @@
     </p:spTree>
     <p:extLst>
       <p:ext uri="{BB962C8B-B14F-4D97-AF65-F5344CB8AC3E}">
-        <p14:creationId xmlns:p14="http://schemas.microsoft.com/office/powerpoint/2010/main" val="473249192"/>
+        <p14:creationId xmlns:p14="http://schemas.microsoft.com/office/powerpoint/2010/main" val="4268831211"/>
       </p:ext>
     </p:extLst>
   </p:cSld>
@@ -1622,7 +1634,19 @@
           <a:bodyPr/>
           <a:lstStyle/>
           <a:p>
-            <a:endParaRPr lang="zh-CN" altLang="en-US" dirty="0"/>
+            <a:r>
+              <a:rPr lang="zh-CN" altLang="en-US" b="1" dirty="0" smtClean="0"/>
+              <a:t>现在三维场景和里面的图层都已经加载、绘制，剩下的就是根据项目的业务调用</a:t>
+            </a:r>
+            <a:r>
+              <a:rPr lang="en-US" altLang="zh-CN" b="1" dirty="0" err="1" smtClean="0"/>
+              <a:t>dvejs</a:t>
+            </a:r>
+            <a:r>
+              <a:rPr lang="zh-CN" altLang="en-US" b="1" dirty="0" smtClean="0"/>
+              <a:t>的功能接口实现效果，这边我们演示一下我们通过动视引擎实现的业务项目</a:t>
+            </a:r>
+            <a:endParaRPr lang="zh-CN" altLang="en-US" b="1" dirty="0"/>
           </a:p>
         </p:txBody>
       </p:sp>
@@ -1653,7 +1677,7 @@
     </p:spTree>
     <p:extLst>
       <p:ext uri="{BB962C8B-B14F-4D97-AF65-F5344CB8AC3E}">
-        <p14:creationId xmlns:p14="http://schemas.microsoft.com/office/powerpoint/2010/main" val="3285389198"/>
+        <p14:creationId xmlns:p14="http://schemas.microsoft.com/office/powerpoint/2010/main" val="473249192"/>
       </p:ext>
     </p:extLst>
   </p:cSld>
@@ -1712,389 +1736,7 @@
           <a:bodyPr/>
           <a:lstStyle/>
           <a:p>
-            <a:r>
-              <a:rPr lang="zh-CN" altLang="en-US" b="1" dirty="0" smtClean="0"/>
-              <a:t>在三维引擎应用的过程中发现了两个比较大的问题：</a:t>
-            </a:r>
-            <a:endParaRPr lang="en-US" altLang="zh-CN" b="1" dirty="0" smtClean="0"/>
-          </a:p>
-          <a:p>
-            <a:r>
-              <a:rPr lang="en-US" altLang="zh-CN" b="1" dirty="0" smtClean="0"/>
-              <a:t>1</a:t>
-            </a:r>
-            <a:r>
-              <a:rPr lang="zh-CN" altLang="en-US" b="1" dirty="0" smtClean="0"/>
-              <a:t>、在单页面中，路由离开三维服务的页面，重新进入会报错，并且内存溢出。</a:t>
-            </a:r>
-            <a:endParaRPr lang="en-US" altLang="zh-CN" b="1" dirty="0" smtClean="0"/>
-          </a:p>
-          <a:p>
-            <a:r>
-              <a:rPr lang="zh-CN" altLang="en-US" b="1" dirty="0" smtClean="0"/>
-              <a:t>解决方法：刚开始尝试前端的内存管理的一些方法，比如在页面离开时销毁全局变量、解绑广播事件等，但都没多用。</a:t>
-            </a:r>
-            <a:endParaRPr lang="en-US" altLang="zh-CN" b="1" dirty="0" smtClean="0"/>
-          </a:p>
-          <a:p>
-            <a:r>
-              <a:rPr lang="en-US" altLang="zh-CN" b="1" dirty="0" smtClean="0"/>
-              <a:t>2</a:t>
-            </a:r>
-            <a:r>
-              <a:rPr lang="zh-CN" altLang="en-US" b="1" dirty="0" smtClean="0"/>
-              <a:t>、为了能够提测，先采取多页面方式，重新进入页面不会报错了，但内存问题还是没有解决，切换多次之后内存还是会累积上升。</a:t>
-            </a:r>
-            <a:endParaRPr lang="en-US" altLang="zh-CN" b="1" dirty="0" smtClean="0"/>
-          </a:p>
-          <a:p>
-            <a:r>
-              <a:rPr lang="en-US" altLang="zh-CN" b="1" dirty="0" smtClean="0"/>
-              <a:t>3</a:t>
-            </a:r>
-            <a:r>
-              <a:rPr lang="zh-CN" altLang="en-US" b="1" dirty="0" smtClean="0"/>
-              <a:t>、后来查询到新版本的</a:t>
-            </a:r>
-            <a:r>
-              <a:rPr lang="en-US" altLang="zh-CN" b="1" dirty="0" smtClean="0"/>
-              <a:t>unity3D</a:t>
-            </a:r>
-            <a:r>
-              <a:rPr lang="zh-CN" altLang="en-US" b="1" dirty="0" smtClean="0"/>
-              <a:t>提供了一个销毁进程的方法，就是解决方法，这个方法做了这些事情：</a:t>
-            </a:r>
-            <a:endParaRPr lang="en-US" altLang="zh-CN" b="1" dirty="0" smtClean="0"/>
-          </a:p>
-          <a:p>
-            <a:r>
-              <a:rPr lang="en-US" altLang="zh-CN" b="1" dirty="0" smtClean="0"/>
-              <a:t>1</a:t>
-            </a:r>
-            <a:r>
-              <a:rPr lang="zh-CN" altLang="en-US" b="1" dirty="0" smtClean="0"/>
-              <a:t>）</a:t>
-            </a:r>
-            <a:r>
-              <a:rPr lang="en-US" altLang="zh-CN" sz="1200" b="0" i="0" kern="1200" dirty="0" smtClean="0">
-                <a:solidFill>
-                  <a:schemeClr val="tx1"/>
-                </a:solidFill>
-                <a:effectLst/>
-                <a:latin typeface="+mn-lt"/>
-                <a:ea typeface="+mn-ea"/>
-                <a:cs typeface="+mn-cs"/>
-              </a:rPr>
-              <a:t>engine shutdown sequence</a:t>
-            </a:r>
-            <a:r>
-              <a:rPr lang="zh-CN" altLang="en-US" sz="1200" b="0" i="0" kern="1200" dirty="0" smtClean="0">
-                <a:solidFill>
-                  <a:schemeClr val="tx1"/>
-                </a:solidFill>
-                <a:effectLst/>
-                <a:latin typeface="+mn-lt"/>
-                <a:ea typeface="+mn-ea"/>
-                <a:cs typeface="+mn-cs"/>
-              </a:rPr>
-              <a:t>（引擎关闭进程）</a:t>
-            </a:r>
-            <a:endParaRPr lang="en-US" altLang="zh-CN" sz="1200" b="0" i="0" kern="1200" dirty="0" smtClean="0">
-              <a:solidFill>
-                <a:schemeClr val="tx1"/>
-              </a:solidFill>
-              <a:effectLst/>
-              <a:latin typeface="+mn-lt"/>
-              <a:ea typeface="+mn-ea"/>
-              <a:cs typeface="+mn-cs"/>
-            </a:endParaRPr>
-          </a:p>
-          <a:p>
-            <a:r>
-              <a:rPr lang="en-US" altLang="zh-CN" sz="1200" b="0" i="0" kern="1200" dirty="0" smtClean="0">
-                <a:solidFill>
-                  <a:schemeClr val="tx1"/>
-                </a:solidFill>
-                <a:effectLst/>
-                <a:latin typeface="+mn-lt"/>
-                <a:ea typeface="+mn-ea"/>
-                <a:cs typeface="+mn-cs"/>
-              </a:rPr>
-              <a:t>2</a:t>
-            </a:r>
-            <a:r>
-              <a:rPr lang="zh-CN" altLang="en-US" sz="1200" b="0" i="0" kern="1200" dirty="0" smtClean="0">
-                <a:solidFill>
-                  <a:schemeClr val="tx1"/>
-                </a:solidFill>
-                <a:effectLst/>
-                <a:latin typeface="+mn-lt"/>
-                <a:ea typeface="+mn-ea"/>
-                <a:cs typeface="+mn-cs"/>
-              </a:rPr>
-              <a:t>）移除所有绑定在</a:t>
-            </a:r>
-            <a:r>
-              <a:rPr lang="en-US" altLang="zh-CN" sz="1200" b="0" i="0" kern="1200" dirty="0" smtClean="0">
-                <a:solidFill>
-                  <a:schemeClr val="tx1"/>
-                </a:solidFill>
-                <a:effectLst/>
-                <a:latin typeface="+mn-lt"/>
-                <a:ea typeface="+mn-ea"/>
-                <a:cs typeface="+mn-cs"/>
-              </a:rPr>
-              <a:t>canvas</a:t>
-            </a:r>
-            <a:r>
-              <a:rPr lang="zh-CN" altLang="en-US" sz="1200" b="0" i="0" kern="1200" dirty="0" smtClean="0">
-                <a:solidFill>
-                  <a:schemeClr val="tx1"/>
-                </a:solidFill>
-                <a:effectLst/>
-                <a:latin typeface="+mn-lt"/>
-                <a:ea typeface="+mn-ea"/>
-                <a:cs typeface="+mn-cs"/>
-              </a:rPr>
-              <a:t>、</a:t>
-            </a:r>
-            <a:r>
-              <a:rPr lang="en-US" altLang="zh-CN" sz="1200" b="0" i="0" kern="1200" dirty="0" smtClean="0">
-                <a:solidFill>
-                  <a:schemeClr val="tx1"/>
-                </a:solidFill>
-                <a:effectLst/>
-                <a:latin typeface="+mn-lt"/>
-                <a:ea typeface="+mn-ea"/>
-                <a:cs typeface="+mn-cs"/>
-              </a:rPr>
-              <a:t>window</a:t>
-            </a:r>
-            <a:r>
-              <a:rPr lang="zh-CN" altLang="en-US" sz="1200" b="0" i="0" kern="1200" dirty="0" smtClean="0">
-                <a:solidFill>
-                  <a:schemeClr val="tx1"/>
-                </a:solidFill>
-                <a:effectLst/>
-                <a:latin typeface="+mn-lt"/>
-                <a:ea typeface="+mn-ea"/>
-                <a:cs typeface="+mn-cs"/>
-              </a:rPr>
-              <a:t>和</a:t>
-            </a:r>
-            <a:r>
-              <a:rPr lang="en-US" altLang="zh-CN" sz="1200" b="0" i="0" kern="1200" dirty="0" smtClean="0">
-                <a:solidFill>
-                  <a:schemeClr val="tx1"/>
-                </a:solidFill>
-                <a:effectLst/>
-                <a:latin typeface="+mn-lt"/>
-                <a:ea typeface="+mn-ea"/>
-                <a:cs typeface="+mn-cs"/>
-              </a:rPr>
-              <a:t>document</a:t>
-            </a:r>
-            <a:r>
-              <a:rPr lang="zh-CN" altLang="en-US" sz="1200" b="0" i="0" kern="1200" dirty="0" smtClean="0">
-                <a:solidFill>
-                  <a:schemeClr val="tx1"/>
-                </a:solidFill>
-                <a:effectLst/>
-                <a:latin typeface="+mn-lt"/>
-                <a:ea typeface="+mn-ea"/>
-                <a:cs typeface="+mn-cs"/>
-              </a:rPr>
-              <a:t>的事件 </a:t>
-            </a:r>
-            <a:endParaRPr lang="en-US" altLang="zh-CN" sz="1200" b="0" i="0" kern="1200" dirty="0" smtClean="0">
-              <a:solidFill>
-                <a:schemeClr val="tx1"/>
-              </a:solidFill>
-              <a:effectLst/>
-              <a:latin typeface="+mn-lt"/>
-              <a:ea typeface="+mn-ea"/>
-              <a:cs typeface="+mn-cs"/>
-            </a:endParaRPr>
-          </a:p>
-          <a:p>
-            <a:r>
-              <a:rPr lang="en-US" altLang="zh-CN" sz="1200" b="0" i="0" kern="1200" dirty="0" smtClean="0">
-                <a:solidFill>
-                  <a:schemeClr val="tx1"/>
-                </a:solidFill>
-                <a:effectLst/>
-                <a:latin typeface="+mn-lt"/>
-                <a:ea typeface="+mn-ea"/>
-                <a:cs typeface="+mn-cs"/>
-              </a:rPr>
-              <a:t>3</a:t>
-            </a:r>
-            <a:r>
-              <a:rPr lang="zh-CN" altLang="en-US" sz="1200" b="0" i="0" kern="1200" dirty="0" smtClean="0">
-                <a:solidFill>
-                  <a:schemeClr val="tx1"/>
-                </a:solidFill>
-                <a:effectLst/>
-                <a:latin typeface="+mn-lt"/>
-                <a:ea typeface="+mn-ea"/>
-                <a:cs typeface="+mn-cs"/>
-              </a:rPr>
-              <a:t>）取消事件循环</a:t>
-            </a:r>
-            <a:endParaRPr lang="en-US" altLang="zh-CN" sz="1200" b="0" i="0" kern="1200" dirty="0" smtClean="0">
-              <a:solidFill>
-                <a:schemeClr val="tx1"/>
-              </a:solidFill>
-              <a:effectLst/>
-              <a:latin typeface="+mn-lt"/>
-              <a:ea typeface="+mn-ea"/>
-              <a:cs typeface="+mn-cs"/>
-            </a:endParaRPr>
-          </a:p>
-          <a:p>
-            <a:r>
-              <a:rPr lang="en-US" altLang="zh-CN" sz="1200" b="0" i="0" kern="1200" dirty="0" smtClean="0">
-                <a:solidFill>
-                  <a:schemeClr val="tx1"/>
-                </a:solidFill>
-                <a:effectLst/>
-                <a:latin typeface="+mn-lt"/>
-                <a:ea typeface="+mn-ea"/>
-                <a:cs typeface="+mn-cs"/>
-              </a:rPr>
-              <a:t>4</a:t>
-            </a:r>
-            <a:r>
-              <a:rPr lang="zh-CN" altLang="en-US" sz="1200" b="0" i="0" kern="1200" dirty="0" smtClean="0">
-                <a:solidFill>
-                  <a:schemeClr val="tx1"/>
-                </a:solidFill>
-                <a:effectLst/>
-                <a:latin typeface="+mn-lt"/>
-                <a:ea typeface="+mn-ea"/>
-                <a:cs typeface="+mn-cs"/>
-              </a:rPr>
-              <a:t>）清除所有定时器</a:t>
-            </a:r>
-            <a:endParaRPr lang="en-US" altLang="zh-CN" sz="1200" b="0" i="0" kern="1200" dirty="0" smtClean="0">
-              <a:solidFill>
-                <a:schemeClr val="tx1"/>
-              </a:solidFill>
-              <a:effectLst/>
-              <a:latin typeface="+mn-lt"/>
-              <a:ea typeface="+mn-ea"/>
-              <a:cs typeface="+mn-cs"/>
-            </a:endParaRPr>
-          </a:p>
-          <a:p>
-            <a:r>
-              <a:rPr lang="en-US" altLang="zh-CN" sz="1200" b="0" i="0" kern="1200" dirty="0" smtClean="0">
-                <a:solidFill>
-                  <a:schemeClr val="tx1"/>
-                </a:solidFill>
-                <a:effectLst/>
-                <a:latin typeface="+mn-lt"/>
-                <a:ea typeface="+mn-ea"/>
-                <a:cs typeface="+mn-cs"/>
-              </a:rPr>
-              <a:t>5</a:t>
-            </a:r>
-            <a:r>
-              <a:rPr lang="zh-CN" altLang="en-US" sz="1200" b="0" i="0" kern="1200" dirty="0" smtClean="0">
-                <a:solidFill>
-                  <a:schemeClr val="tx1"/>
-                </a:solidFill>
-                <a:effectLst/>
-                <a:latin typeface="+mn-lt"/>
-                <a:ea typeface="+mn-ea"/>
-                <a:cs typeface="+mn-cs"/>
-              </a:rPr>
-              <a:t>）删除所有由</a:t>
-            </a:r>
-            <a:r>
-              <a:rPr lang="en-US" altLang="zh-CN" sz="1200" b="0" i="0" kern="1200" dirty="0" err="1" smtClean="0">
-                <a:solidFill>
-                  <a:schemeClr val="tx1"/>
-                </a:solidFill>
-                <a:effectLst/>
-                <a:latin typeface="+mn-lt"/>
-                <a:ea typeface="+mn-ea"/>
-                <a:cs typeface="+mn-cs"/>
-              </a:rPr>
-              <a:t>unityLoader</a:t>
-            </a:r>
-            <a:r>
-              <a:rPr lang="zh-CN" altLang="en-US" sz="1200" b="0" i="0" kern="1200" dirty="0" smtClean="0">
-                <a:solidFill>
-                  <a:schemeClr val="tx1"/>
-                </a:solidFill>
-                <a:effectLst/>
-                <a:latin typeface="+mn-lt"/>
-                <a:ea typeface="+mn-ea"/>
-                <a:cs typeface="+mn-cs"/>
-              </a:rPr>
-              <a:t>产生的局部变量</a:t>
-            </a:r>
-            <a:endParaRPr lang="en-US" altLang="zh-CN" sz="1200" b="0" i="0" kern="1200" dirty="0" smtClean="0">
-              <a:solidFill>
-                <a:schemeClr val="tx1"/>
-              </a:solidFill>
-              <a:effectLst/>
-              <a:latin typeface="+mn-lt"/>
-              <a:ea typeface="+mn-ea"/>
-              <a:cs typeface="+mn-cs"/>
-            </a:endParaRPr>
-          </a:p>
-          <a:p>
-            <a:r>
-              <a:rPr lang="en-US" altLang="zh-CN" sz="1200" b="0" i="0" kern="1200" dirty="0" smtClean="0">
-                <a:solidFill>
-                  <a:schemeClr val="tx1"/>
-                </a:solidFill>
-                <a:effectLst/>
-                <a:latin typeface="+mn-lt"/>
-                <a:ea typeface="+mn-ea"/>
-                <a:cs typeface="+mn-cs"/>
-              </a:rPr>
-              <a:t>6</a:t>
-            </a:r>
-            <a:r>
-              <a:rPr lang="zh-CN" altLang="en-US" sz="1200" b="0" i="0" kern="1200" dirty="0" smtClean="0">
-                <a:solidFill>
-                  <a:schemeClr val="tx1"/>
-                </a:solidFill>
-                <a:effectLst/>
-                <a:latin typeface="+mn-lt"/>
-                <a:ea typeface="+mn-ea"/>
-                <a:cs typeface="+mn-cs"/>
-              </a:rPr>
-              <a:t>）移除</a:t>
-            </a:r>
-            <a:r>
-              <a:rPr lang="en-US" altLang="zh-CN" sz="1200" b="0" i="0" kern="1200" dirty="0" smtClean="0">
-                <a:solidFill>
-                  <a:schemeClr val="tx1"/>
-                </a:solidFill>
-                <a:effectLst/>
-                <a:latin typeface="+mn-lt"/>
-                <a:ea typeface="+mn-ea"/>
-                <a:cs typeface="+mn-cs"/>
-              </a:rPr>
-              <a:t>canvas</a:t>
-            </a:r>
-            <a:r>
-              <a:rPr lang="zh-CN" altLang="en-US" sz="1200" b="0" i="0" kern="1200" dirty="0" smtClean="0">
-                <a:solidFill>
-                  <a:schemeClr val="tx1"/>
-                </a:solidFill>
-                <a:effectLst/>
-                <a:latin typeface="+mn-lt"/>
-                <a:ea typeface="+mn-ea"/>
-                <a:cs typeface="+mn-cs"/>
-              </a:rPr>
-              <a:t>标签</a:t>
-            </a:r>
-            <a:endParaRPr lang="en-US" altLang="zh-CN" b="1" dirty="0" smtClean="0"/>
+            <a:endParaRPr lang="zh-CN" altLang="en-US" dirty="0"/>
           </a:p>
         </p:txBody>
       </p:sp>
@@ -2125,7 +1767,7 @@
     </p:spTree>
     <p:extLst>
       <p:ext uri="{BB962C8B-B14F-4D97-AF65-F5344CB8AC3E}">
-        <p14:creationId xmlns:p14="http://schemas.microsoft.com/office/powerpoint/2010/main" val="2501867246"/>
+        <p14:creationId xmlns:p14="http://schemas.microsoft.com/office/powerpoint/2010/main" val="3285389198"/>
       </p:ext>
     </p:extLst>
   </p:cSld>
@@ -2274,7 +1916,389 @@
           <a:bodyPr/>
           <a:lstStyle/>
           <a:p>
-            <a:endParaRPr lang="zh-CN" altLang="en-US" b="1" dirty="0"/>
+            <a:r>
+              <a:rPr lang="zh-CN" altLang="en-US" b="1" dirty="0" smtClean="0"/>
+              <a:t>在三维引擎应用的过程中发现了两个比较大的问题：</a:t>
+            </a:r>
+            <a:endParaRPr lang="en-US" altLang="zh-CN" b="1" dirty="0" smtClean="0"/>
+          </a:p>
+          <a:p>
+            <a:r>
+              <a:rPr lang="en-US" altLang="zh-CN" b="1" dirty="0" smtClean="0"/>
+              <a:t>1</a:t>
+            </a:r>
+            <a:r>
+              <a:rPr lang="zh-CN" altLang="en-US" b="1" dirty="0" smtClean="0"/>
+              <a:t>、在单页面中，路由离开三维服务的页面，重新进入会报错，并且内存溢出。</a:t>
+            </a:r>
+            <a:endParaRPr lang="en-US" altLang="zh-CN" b="1" dirty="0" smtClean="0"/>
+          </a:p>
+          <a:p>
+            <a:r>
+              <a:rPr lang="zh-CN" altLang="en-US" b="1" dirty="0" smtClean="0"/>
+              <a:t>解决方法：刚开始尝试前端的内存管理的一些方法，比如在页面离开时销毁全局变量、解绑广播事件等，但都没多用。</a:t>
+            </a:r>
+            <a:endParaRPr lang="en-US" altLang="zh-CN" b="1" dirty="0" smtClean="0"/>
+          </a:p>
+          <a:p>
+            <a:r>
+              <a:rPr lang="en-US" altLang="zh-CN" b="1" dirty="0" smtClean="0"/>
+              <a:t>2</a:t>
+            </a:r>
+            <a:r>
+              <a:rPr lang="zh-CN" altLang="en-US" b="1" dirty="0" smtClean="0"/>
+              <a:t>、为了能够提测，先采取多页面方式，重新进入页面不会报错了，但内存问题还是没有解决，切换多次之后内存还是会累积上升。</a:t>
+            </a:r>
+            <a:endParaRPr lang="en-US" altLang="zh-CN" b="1" dirty="0" smtClean="0"/>
+          </a:p>
+          <a:p>
+            <a:r>
+              <a:rPr lang="en-US" altLang="zh-CN" b="1" dirty="0" smtClean="0"/>
+              <a:t>3</a:t>
+            </a:r>
+            <a:r>
+              <a:rPr lang="zh-CN" altLang="en-US" b="1" dirty="0" smtClean="0"/>
+              <a:t>、后来查询到新版本的</a:t>
+            </a:r>
+            <a:r>
+              <a:rPr lang="en-US" altLang="zh-CN" b="1" dirty="0" smtClean="0"/>
+              <a:t>unity3D</a:t>
+            </a:r>
+            <a:r>
+              <a:rPr lang="zh-CN" altLang="en-US" b="1" dirty="0" smtClean="0"/>
+              <a:t>提供了一个销毁进程的方法，就是解决方法，这个方法做了这些事情：</a:t>
+            </a:r>
+            <a:endParaRPr lang="en-US" altLang="zh-CN" b="1" dirty="0" smtClean="0"/>
+          </a:p>
+          <a:p>
+            <a:r>
+              <a:rPr lang="en-US" altLang="zh-CN" b="1" dirty="0" smtClean="0"/>
+              <a:t>1</a:t>
+            </a:r>
+            <a:r>
+              <a:rPr lang="zh-CN" altLang="en-US" b="1" dirty="0" smtClean="0"/>
+              <a:t>）</a:t>
+            </a:r>
+            <a:r>
+              <a:rPr lang="en-US" altLang="zh-CN" sz="1200" b="0" i="0" kern="1200" dirty="0" smtClean="0">
+                <a:solidFill>
+                  <a:schemeClr val="tx1"/>
+                </a:solidFill>
+                <a:effectLst/>
+                <a:latin typeface="+mn-lt"/>
+                <a:ea typeface="+mn-ea"/>
+                <a:cs typeface="+mn-cs"/>
+              </a:rPr>
+              <a:t>engine shutdown sequence</a:t>
+            </a:r>
+            <a:r>
+              <a:rPr lang="zh-CN" altLang="en-US" sz="1200" b="0" i="0" kern="1200" dirty="0" smtClean="0">
+                <a:solidFill>
+                  <a:schemeClr val="tx1"/>
+                </a:solidFill>
+                <a:effectLst/>
+                <a:latin typeface="+mn-lt"/>
+                <a:ea typeface="+mn-ea"/>
+                <a:cs typeface="+mn-cs"/>
+              </a:rPr>
+              <a:t>（引擎关闭进程）</a:t>
+            </a:r>
+            <a:endParaRPr lang="en-US" altLang="zh-CN" sz="1200" b="0" i="0" kern="1200" dirty="0" smtClean="0">
+              <a:solidFill>
+                <a:schemeClr val="tx1"/>
+              </a:solidFill>
+              <a:effectLst/>
+              <a:latin typeface="+mn-lt"/>
+              <a:ea typeface="+mn-ea"/>
+              <a:cs typeface="+mn-cs"/>
+            </a:endParaRPr>
+          </a:p>
+          <a:p>
+            <a:r>
+              <a:rPr lang="en-US" altLang="zh-CN" sz="1200" b="0" i="0" kern="1200" dirty="0" smtClean="0">
+                <a:solidFill>
+                  <a:schemeClr val="tx1"/>
+                </a:solidFill>
+                <a:effectLst/>
+                <a:latin typeface="+mn-lt"/>
+                <a:ea typeface="+mn-ea"/>
+                <a:cs typeface="+mn-cs"/>
+              </a:rPr>
+              <a:t>2</a:t>
+            </a:r>
+            <a:r>
+              <a:rPr lang="zh-CN" altLang="en-US" sz="1200" b="0" i="0" kern="1200" dirty="0" smtClean="0">
+                <a:solidFill>
+                  <a:schemeClr val="tx1"/>
+                </a:solidFill>
+                <a:effectLst/>
+                <a:latin typeface="+mn-lt"/>
+                <a:ea typeface="+mn-ea"/>
+                <a:cs typeface="+mn-cs"/>
+              </a:rPr>
+              <a:t>）移除所有绑定在</a:t>
+            </a:r>
+            <a:r>
+              <a:rPr lang="en-US" altLang="zh-CN" sz="1200" b="0" i="0" kern="1200" dirty="0" smtClean="0">
+                <a:solidFill>
+                  <a:schemeClr val="tx1"/>
+                </a:solidFill>
+                <a:effectLst/>
+                <a:latin typeface="+mn-lt"/>
+                <a:ea typeface="+mn-ea"/>
+                <a:cs typeface="+mn-cs"/>
+              </a:rPr>
+              <a:t>canvas</a:t>
+            </a:r>
+            <a:r>
+              <a:rPr lang="zh-CN" altLang="en-US" sz="1200" b="0" i="0" kern="1200" dirty="0" smtClean="0">
+                <a:solidFill>
+                  <a:schemeClr val="tx1"/>
+                </a:solidFill>
+                <a:effectLst/>
+                <a:latin typeface="+mn-lt"/>
+                <a:ea typeface="+mn-ea"/>
+                <a:cs typeface="+mn-cs"/>
+              </a:rPr>
+              <a:t>、</a:t>
+            </a:r>
+            <a:r>
+              <a:rPr lang="en-US" altLang="zh-CN" sz="1200" b="0" i="0" kern="1200" dirty="0" smtClean="0">
+                <a:solidFill>
+                  <a:schemeClr val="tx1"/>
+                </a:solidFill>
+                <a:effectLst/>
+                <a:latin typeface="+mn-lt"/>
+                <a:ea typeface="+mn-ea"/>
+                <a:cs typeface="+mn-cs"/>
+              </a:rPr>
+              <a:t>window</a:t>
+            </a:r>
+            <a:r>
+              <a:rPr lang="zh-CN" altLang="en-US" sz="1200" b="0" i="0" kern="1200" dirty="0" smtClean="0">
+                <a:solidFill>
+                  <a:schemeClr val="tx1"/>
+                </a:solidFill>
+                <a:effectLst/>
+                <a:latin typeface="+mn-lt"/>
+                <a:ea typeface="+mn-ea"/>
+                <a:cs typeface="+mn-cs"/>
+              </a:rPr>
+              <a:t>和</a:t>
+            </a:r>
+            <a:r>
+              <a:rPr lang="en-US" altLang="zh-CN" sz="1200" b="0" i="0" kern="1200" dirty="0" smtClean="0">
+                <a:solidFill>
+                  <a:schemeClr val="tx1"/>
+                </a:solidFill>
+                <a:effectLst/>
+                <a:latin typeface="+mn-lt"/>
+                <a:ea typeface="+mn-ea"/>
+                <a:cs typeface="+mn-cs"/>
+              </a:rPr>
+              <a:t>document</a:t>
+            </a:r>
+            <a:r>
+              <a:rPr lang="zh-CN" altLang="en-US" sz="1200" b="0" i="0" kern="1200" dirty="0" smtClean="0">
+                <a:solidFill>
+                  <a:schemeClr val="tx1"/>
+                </a:solidFill>
+                <a:effectLst/>
+                <a:latin typeface="+mn-lt"/>
+                <a:ea typeface="+mn-ea"/>
+                <a:cs typeface="+mn-cs"/>
+              </a:rPr>
+              <a:t>的事件 </a:t>
+            </a:r>
+            <a:endParaRPr lang="en-US" altLang="zh-CN" sz="1200" b="0" i="0" kern="1200" dirty="0" smtClean="0">
+              <a:solidFill>
+                <a:schemeClr val="tx1"/>
+              </a:solidFill>
+              <a:effectLst/>
+              <a:latin typeface="+mn-lt"/>
+              <a:ea typeface="+mn-ea"/>
+              <a:cs typeface="+mn-cs"/>
+            </a:endParaRPr>
+          </a:p>
+          <a:p>
+            <a:r>
+              <a:rPr lang="en-US" altLang="zh-CN" sz="1200" b="0" i="0" kern="1200" dirty="0" smtClean="0">
+                <a:solidFill>
+                  <a:schemeClr val="tx1"/>
+                </a:solidFill>
+                <a:effectLst/>
+                <a:latin typeface="+mn-lt"/>
+                <a:ea typeface="+mn-ea"/>
+                <a:cs typeface="+mn-cs"/>
+              </a:rPr>
+              <a:t>3</a:t>
+            </a:r>
+            <a:r>
+              <a:rPr lang="zh-CN" altLang="en-US" sz="1200" b="0" i="0" kern="1200" dirty="0" smtClean="0">
+                <a:solidFill>
+                  <a:schemeClr val="tx1"/>
+                </a:solidFill>
+                <a:effectLst/>
+                <a:latin typeface="+mn-lt"/>
+                <a:ea typeface="+mn-ea"/>
+                <a:cs typeface="+mn-cs"/>
+              </a:rPr>
+              <a:t>）取消事件循环</a:t>
+            </a:r>
+            <a:endParaRPr lang="en-US" altLang="zh-CN" sz="1200" b="0" i="0" kern="1200" dirty="0" smtClean="0">
+              <a:solidFill>
+                <a:schemeClr val="tx1"/>
+              </a:solidFill>
+              <a:effectLst/>
+              <a:latin typeface="+mn-lt"/>
+              <a:ea typeface="+mn-ea"/>
+              <a:cs typeface="+mn-cs"/>
+            </a:endParaRPr>
+          </a:p>
+          <a:p>
+            <a:r>
+              <a:rPr lang="en-US" altLang="zh-CN" sz="1200" b="0" i="0" kern="1200" dirty="0" smtClean="0">
+                <a:solidFill>
+                  <a:schemeClr val="tx1"/>
+                </a:solidFill>
+                <a:effectLst/>
+                <a:latin typeface="+mn-lt"/>
+                <a:ea typeface="+mn-ea"/>
+                <a:cs typeface="+mn-cs"/>
+              </a:rPr>
+              <a:t>4</a:t>
+            </a:r>
+            <a:r>
+              <a:rPr lang="zh-CN" altLang="en-US" sz="1200" b="0" i="0" kern="1200" dirty="0" smtClean="0">
+                <a:solidFill>
+                  <a:schemeClr val="tx1"/>
+                </a:solidFill>
+                <a:effectLst/>
+                <a:latin typeface="+mn-lt"/>
+                <a:ea typeface="+mn-ea"/>
+                <a:cs typeface="+mn-cs"/>
+              </a:rPr>
+              <a:t>）清除所有定时器</a:t>
+            </a:r>
+            <a:endParaRPr lang="en-US" altLang="zh-CN" sz="1200" b="0" i="0" kern="1200" dirty="0" smtClean="0">
+              <a:solidFill>
+                <a:schemeClr val="tx1"/>
+              </a:solidFill>
+              <a:effectLst/>
+              <a:latin typeface="+mn-lt"/>
+              <a:ea typeface="+mn-ea"/>
+              <a:cs typeface="+mn-cs"/>
+            </a:endParaRPr>
+          </a:p>
+          <a:p>
+            <a:r>
+              <a:rPr lang="en-US" altLang="zh-CN" sz="1200" b="0" i="0" kern="1200" dirty="0" smtClean="0">
+                <a:solidFill>
+                  <a:schemeClr val="tx1"/>
+                </a:solidFill>
+                <a:effectLst/>
+                <a:latin typeface="+mn-lt"/>
+                <a:ea typeface="+mn-ea"/>
+                <a:cs typeface="+mn-cs"/>
+              </a:rPr>
+              <a:t>5</a:t>
+            </a:r>
+            <a:r>
+              <a:rPr lang="zh-CN" altLang="en-US" sz="1200" b="0" i="0" kern="1200" dirty="0" smtClean="0">
+                <a:solidFill>
+                  <a:schemeClr val="tx1"/>
+                </a:solidFill>
+                <a:effectLst/>
+                <a:latin typeface="+mn-lt"/>
+                <a:ea typeface="+mn-ea"/>
+                <a:cs typeface="+mn-cs"/>
+              </a:rPr>
+              <a:t>）删除所有由</a:t>
+            </a:r>
+            <a:r>
+              <a:rPr lang="en-US" altLang="zh-CN" sz="1200" b="0" i="0" kern="1200" dirty="0" err="1" smtClean="0">
+                <a:solidFill>
+                  <a:schemeClr val="tx1"/>
+                </a:solidFill>
+                <a:effectLst/>
+                <a:latin typeface="+mn-lt"/>
+                <a:ea typeface="+mn-ea"/>
+                <a:cs typeface="+mn-cs"/>
+              </a:rPr>
+              <a:t>unityLoader</a:t>
+            </a:r>
+            <a:r>
+              <a:rPr lang="zh-CN" altLang="en-US" sz="1200" b="0" i="0" kern="1200" dirty="0" smtClean="0">
+                <a:solidFill>
+                  <a:schemeClr val="tx1"/>
+                </a:solidFill>
+                <a:effectLst/>
+                <a:latin typeface="+mn-lt"/>
+                <a:ea typeface="+mn-ea"/>
+                <a:cs typeface="+mn-cs"/>
+              </a:rPr>
+              <a:t>产生的局部变量</a:t>
+            </a:r>
+            <a:endParaRPr lang="en-US" altLang="zh-CN" sz="1200" b="0" i="0" kern="1200" dirty="0" smtClean="0">
+              <a:solidFill>
+                <a:schemeClr val="tx1"/>
+              </a:solidFill>
+              <a:effectLst/>
+              <a:latin typeface="+mn-lt"/>
+              <a:ea typeface="+mn-ea"/>
+              <a:cs typeface="+mn-cs"/>
+            </a:endParaRPr>
+          </a:p>
+          <a:p>
+            <a:r>
+              <a:rPr lang="en-US" altLang="zh-CN" sz="1200" b="0" i="0" kern="1200" dirty="0" smtClean="0">
+                <a:solidFill>
+                  <a:schemeClr val="tx1"/>
+                </a:solidFill>
+                <a:effectLst/>
+                <a:latin typeface="+mn-lt"/>
+                <a:ea typeface="+mn-ea"/>
+                <a:cs typeface="+mn-cs"/>
+              </a:rPr>
+              <a:t>6</a:t>
+            </a:r>
+            <a:r>
+              <a:rPr lang="zh-CN" altLang="en-US" sz="1200" b="0" i="0" kern="1200" dirty="0" smtClean="0">
+                <a:solidFill>
+                  <a:schemeClr val="tx1"/>
+                </a:solidFill>
+                <a:effectLst/>
+                <a:latin typeface="+mn-lt"/>
+                <a:ea typeface="+mn-ea"/>
+                <a:cs typeface="+mn-cs"/>
+              </a:rPr>
+              <a:t>）移除</a:t>
+            </a:r>
+            <a:r>
+              <a:rPr lang="en-US" altLang="zh-CN" sz="1200" b="0" i="0" kern="1200" dirty="0" smtClean="0">
+                <a:solidFill>
+                  <a:schemeClr val="tx1"/>
+                </a:solidFill>
+                <a:effectLst/>
+                <a:latin typeface="+mn-lt"/>
+                <a:ea typeface="+mn-ea"/>
+                <a:cs typeface="+mn-cs"/>
+              </a:rPr>
+              <a:t>canvas</a:t>
+            </a:r>
+            <a:r>
+              <a:rPr lang="zh-CN" altLang="en-US" sz="1200" b="0" i="0" kern="1200" dirty="0" smtClean="0">
+                <a:solidFill>
+                  <a:schemeClr val="tx1"/>
+                </a:solidFill>
+                <a:effectLst/>
+                <a:latin typeface="+mn-lt"/>
+                <a:ea typeface="+mn-ea"/>
+                <a:cs typeface="+mn-cs"/>
+              </a:rPr>
+              <a:t>标签</a:t>
+            </a:r>
+            <a:endParaRPr lang="en-US" altLang="zh-CN" b="1" dirty="0" smtClean="0"/>
           </a:p>
         </p:txBody>
       </p:sp>
@@ -2305,7 +2329,7 @@
     </p:spTree>
     <p:extLst>
       <p:ext uri="{BB962C8B-B14F-4D97-AF65-F5344CB8AC3E}">
-        <p14:creationId xmlns:p14="http://schemas.microsoft.com/office/powerpoint/2010/main" val="649753915"/>
+        <p14:creationId xmlns:p14="http://schemas.microsoft.com/office/powerpoint/2010/main" val="2501867246"/>
       </p:ext>
     </p:extLst>
   </p:cSld>
@@ -2364,7 +2388,7 @@
           <a:bodyPr/>
           <a:lstStyle/>
           <a:p>
-            <a:endParaRPr lang="zh-CN" altLang="en-US"/>
+            <a:endParaRPr lang="zh-CN" altLang="en-US" b="1" dirty="0"/>
           </a:p>
         </p:txBody>
       </p:sp>
@@ -2395,7 +2419,7 @@
     </p:spTree>
     <p:extLst>
       <p:ext uri="{BB962C8B-B14F-4D97-AF65-F5344CB8AC3E}">
-        <p14:creationId xmlns:p14="http://schemas.microsoft.com/office/powerpoint/2010/main" val="996571867"/>
+        <p14:creationId xmlns:p14="http://schemas.microsoft.com/office/powerpoint/2010/main" val="649753915"/>
       </p:ext>
     </p:extLst>
   </p:cSld>
@@ -2477,6 +2501,96 @@
               <a:rPr lang="zh-CN" altLang="en-US" smtClean="0"/>
               <a:pPr/>
               <a:t>22</a:t>
+            </a:fld>
+            <a:endParaRPr lang="zh-CN" altLang="en-US"/>
+          </a:p>
+        </p:txBody>
+      </p:sp>
+    </p:spTree>
+    <p:extLst>
+      <p:ext uri="{BB962C8B-B14F-4D97-AF65-F5344CB8AC3E}">
+        <p14:creationId xmlns:p14="http://schemas.microsoft.com/office/powerpoint/2010/main" val="996571867"/>
+      </p:ext>
+    </p:extLst>
+  </p:cSld>
+  <p:clrMapOvr>
+    <a:masterClrMapping/>
+  </p:clrMapOvr>
+</p:notes>
+</file>
+
+<file path=ppt/notesSlides/notesSlide23.xml><?xml version="1.0" encoding="utf-8"?>
+<p:notes xmlns:a="http://schemas.openxmlformats.org/drawingml/2006/main" xmlns:r="http://schemas.openxmlformats.org/officeDocument/2006/relationships" xmlns:p="http://schemas.openxmlformats.org/presentationml/2006/main">
+  <p:cSld>
+    <p:spTree>
+      <p:nvGrpSpPr>
+        <p:cNvPr id="1" name=""/>
+        <p:cNvGrpSpPr/>
+        <p:nvPr/>
+      </p:nvGrpSpPr>
+      <p:grpSpPr>
+        <a:xfrm>
+          <a:off x="0" y="0"/>
+          <a:ext cx="0" cy="0"/>
+          <a:chOff x="0" y="0"/>
+          <a:chExt cx="0" cy="0"/>
+        </a:xfrm>
+      </p:grpSpPr>
+      <p:sp>
+        <p:nvSpPr>
+          <p:cNvPr id="2" name="幻灯片图像占位符 1"/>
+          <p:cNvSpPr>
+            <a:spLocks noGrp="1" noRot="1" noChangeAspect="1"/>
+          </p:cNvSpPr>
+          <p:nvPr>
+            <p:ph type="sldImg"/>
+          </p:nvPr>
+        </p:nvSpPr>
+        <p:spPr>
+          <a:xfrm>
+            <a:off x="381000" y="685800"/>
+            <a:ext cx="6096000" cy="3429000"/>
+          </a:xfrm>
+        </p:spPr>
+      </p:sp>
+      <p:sp>
+        <p:nvSpPr>
+          <p:cNvPr id="3" name="备注占位符 2"/>
+          <p:cNvSpPr>
+            <a:spLocks noGrp="1"/>
+          </p:cNvSpPr>
+          <p:nvPr>
+            <p:ph type="body" idx="1"/>
+          </p:nvPr>
+        </p:nvSpPr>
+        <p:spPr/>
+        <p:txBody>
+          <a:bodyPr/>
+          <a:lstStyle/>
+          <a:p>
+            <a:endParaRPr lang="zh-CN" altLang="en-US"/>
+          </a:p>
+        </p:txBody>
+      </p:sp>
+      <p:sp>
+        <p:nvSpPr>
+          <p:cNvPr id="4" name="灯片编号占位符 3"/>
+          <p:cNvSpPr>
+            <a:spLocks noGrp="1"/>
+          </p:cNvSpPr>
+          <p:nvPr>
+            <p:ph type="sldNum" sz="quarter" idx="10"/>
+          </p:nvPr>
+        </p:nvSpPr>
+        <p:spPr/>
+        <p:txBody>
+          <a:bodyPr/>
+          <a:lstStyle/>
+          <a:p>
+            <a:fld id="{32324CB8-5ED7-4F52-9624-236BCCB4B688}" type="slidenum">
+              <a:rPr lang="zh-CN" altLang="en-US" smtClean="0"/>
+              <a:pPr/>
+              <a:t>23</a:t>
             </a:fld>
             <a:endParaRPr lang="zh-CN" altLang="en-US"/>
           </a:p>
@@ -3087,7 +3201,7 @@
           <a:bodyPr/>
           <a:lstStyle/>
           <a:p>
-            <a:endParaRPr lang="zh-CN" altLang="en-US"/>
+            <a:endParaRPr lang="zh-CN" altLang="en-US" dirty="0"/>
           </a:p>
         </p:txBody>
       </p:sp>
@@ -3118,7 +3232,7 @@
     </p:spTree>
     <p:extLst>
       <p:ext uri="{BB962C8B-B14F-4D97-AF65-F5344CB8AC3E}">
-        <p14:creationId xmlns:p14="http://schemas.microsoft.com/office/powerpoint/2010/main" val="2508051312"/>
+        <p14:creationId xmlns:p14="http://schemas.microsoft.com/office/powerpoint/2010/main" val="3723408753"/>
       </p:ext>
     </p:extLst>
   </p:cSld>
@@ -3177,47 +3291,7 @@
           <a:bodyPr/>
           <a:lstStyle/>
           <a:p>
-            <a:pPr marL="0" marR="0" lvl="0" indent="0" algn="l" defTabSz="914400" rtl="0" eaLnBrk="1" fontAlgn="auto" latinLnBrk="0" hangingPunct="1">
-              <a:lnSpc>
-                <a:spcPct val="100000"/>
-              </a:lnSpc>
-              <a:spcBef>
-                <a:spcPts val="0"/>
-              </a:spcBef>
-              <a:spcAft>
-                <a:spcPts val="0"/>
-              </a:spcAft>
-              <a:buClrTx/>
-              <a:buSzTx/>
-              <a:buFontTx/>
-              <a:buNone/>
-              <a:tabLst/>
-              <a:defRPr/>
-            </a:pPr>
-            <a:r>
-              <a:rPr lang="zh-CN" altLang="en-US" dirty="0" smtClean="0"/>
-              <a:t>接触过</a:t>
-            </a:r>
-            <a:r>
-              <a:rPr lang="en-US" altLang="zh-CN" dirty="0" err="1" smtClean="0"/>
-              <a:t>gais</a:t>
-            </a:r>
-            <a:r>
-              <a:rPr lang="zh-CN" altLang="en-US" dirty="0" smtClean="0"/>
-              <a:t>组件的同事应该比较前面三块内容，这三块内容是借鉴</a:t>
-            </a:r>
-            <a:r>
-              <a:rPr lang="en-US" altLang="zh-CN" dirty="0" err="1" smtClean="0"/>
-              <a:t>gais</a:t>
-            </a:r>
-            <a:r>
-              <a:rPr lang="zh-CN" altLang="en-US" dirty="0" smtClean="0"/>
-              <a:t>组件的，各个应用组件申请相对独立的工作空间，引擎对各应用组件的三维相关进行集中管理。资源包管理可以对之前的配置进行导出，后面需要在其他平台进行安装只需要导入之前的资源包即可，无需重新配置。这三块后面简单演示一下就会很清楚</a:t>
-            </a:r>
-            <a:endParaRPr lang="id-ID" altLang="zh-CN" dirty="0" smtClean="0"/>
-          </a:p>
-          <a:p>
-            <a:endParaRPr lang="zh-CN" altLang="en-US" dirty="0"/>
+            <a:endParaRPr lang="zh-CN" altLang="en-US"/>
           </a:p>
         </p:txBody>
       </p:sp>
@@ -3248,7 +3322,7 @@
     </p:spTree>
     <p:extLst>
       <p:ext uri="{BB962C8B-B14F-4D97-AF65-F5344CB8AC3E}">
-        <p14:creationId xmlns:p14="http://schemas.microsoft.com/office/powerpoint/2010/main" val="900534802"/>
+        <p14:creationId xmlns:p14="http://schemas.microsoft.com/office/powerpoint/2010/main" val="2508051312"/>
       </p:ext>
     </p:extLst>
   </p:cSld>
@@ -3326,11 +3400,28 @@
             </a:pPr>
             <a:r>
               <a:rPr lang="zh-CN" altLang="en-US" dirty="0" smtClean="0"/>
-              <a:t>图层分为要素图层和场景图层两类，这两类图层区别就在于是否跟业务有关，跟业务无关的是场景图层，跟业务有关的是要素图层，所以一个图层是要素图层还是场景图层其实是不是固定的，在不同业务场景下可以互换的</a:t>
-            </a:r>
-          </a:p>
-          <a:p>
-            <a:endParaRPr lang="zh-CN" altLang="en-US" b="1" dirty="0"/>
+              <a:t>接触过</a:t>
+            </a:r>
+            <a:r>
+              <a:rPr lang="en-US" altLang="zh-CN" dirty="0" err="1" smtClean="0"/>
+              <a:t>gais</a:t>
+            </a:r>
+            <a:r>
+              <a:rPr lang="zh-CN" altLang="en-US" dirty="0" smtClean="0"/>
+              <a:t>组件的同事应该比较前面三块内容，这三块内容是借鉴</a:t>
+            </a:r>
+            <a:r>
+              <a:rPr lang="en-US" altLang="zh-CN" dirty="0" err="1" smtClean="0"/>
+              <a:t>gais</a:t>
+            </a:r>
+            <a:r>
+              <a:rPr lang="zh-CN" altLang="en-US" dirty="0" smtClean="0"/>
+              <a:t>组件的，各个应用组件申请相对独立的工作空间，引擎对各应用组件的三维相关进行集中管理。资源包管理可以对之前的配置进行导出，后面需要在其他平台进行安装只需要导入之前的资源包即可，无需重新配置。这三块后面简单演示一下就会很清楚</a:t>
+            </a:r>
+            <a:endParaRPr lang="id-ID" altLang="zh-CN" dirty="0" smtClean="0"/>
+          </a:p>
+          <a:p>
+            <a:endParaRPr lang="zh-CN" altLang="en-US" dirty="0"/>
           </a:p>
         </p:txBody>
       </p:sp>
@@ -3361,7 +3452,7 @@
     </p:spTree>
     <p:extLst>
       <p:ext uri="{BB962C8B-B14F-4D97-AF65-F5344CB8AC3E}">
-        <p14:creationId xmlns:p14="http://schemas.microsoft.com/office/powerpoint/2010/main" val="1570061370"/>
+        <p14:creationId xmlns:p14="http://schemas.microsoft.com/office/powerpoint/2010/main" val="900534802"/>
       </p:ext>
     </p:extLst>
   </p:cSld>
@@ -3502,7 +3593,7 @@
           <a:p>
             <a:fld id="{B3CF370B-95BA-4E24-95EE-F0D16ECD3186}" type="datetimeFigureOut">
               <a:rPr lang="zh-CN" altLang="en-US" smtClean="0"/>
-              <a:t>2019/10/18</a:t>
+              <a:t>2019/10/25</a:t>
             </a:fld>
             <a:endParaRPr lang="zh-CN" altLang="en-US"/>
           </a:p>
@@ -3672,7 +3763,7 @@
           <a:p>
             <a:fld id="{B3CF370B-95BA-4E24-95EE-F0D16ECD3186}" type="datetimeFigureOut">
               <a:rPr lang="zh-CN" altLang="en-US" smtClean="0"/>
-              <a:t>2019/10/18</a:t>
+              <a:t>2019/10/25</a:t>
             </a:fld>
             <a:endParaRPr lang="zh-CN" altLang="en-US"/>
           </a:p>
@@ -3852,7 +3943,7 @@
           <a:p>
             <a:fld id="{B3CF370B-95BA-4E24-95EE-F0D16ECD3186}" type="datetimeFigureOut">
               <a:rPr lang="zh-CN" altLang="en-US" smtClean="0"/>
-              <a:t>2019/10/18</a:t>
+              <a:t>2019/10/25</a:t>
             </a:fld>
             <a:endParaRPr lang="zh-CN" altLang="en-US"/>
           </a:p>
@@ -4022,7 +4113,7 @@
           <a:p>
             <a:fld id="{B3CF370B-95BA-4E24-95EE-F0D16ECD3186}" type="datetimeFigureOut">
               <a:rPr lang="zh-CN" altLang="en-US" smtClean="0"/>
-              <a:t>2019/10/18</a:t>
+              <a:t>2019/10/25</a:t>
             </a:fld>
             <a:endParaRPr lang="zh-CN" altLang="en-US"/>
           </a:p>
@@ -4268,7 +4359,7 @@
           <a:p>
             <a:fld id="{B3CF370B-95BA-4E24-95EE-F0D16ECD3186}" type="datetimeFigureOut">
               <a:rPr lang="zh-CN" altLang="en-US" smtClean="0"/>
-              <a:t>2019/10/18</a:t>
+              <a:t>2019/10/25</a:t>
             </a:fld>
             <a:endParaRPr lang="zh-CN" altLang="en-US"/>
           </a:p>
@@ -4500,7 +4591,7 @@
           <a:p>
             <a:fld id="{B3CF370B-95BA-4E24-95EE-F0D16ECD3186}" type="datetimeFigureOut">
               <a:rPr lang="zh-CN" altLang="en-US" smtClean="0"/>
-              <a:t>2019/10/18</a:t>
+              <a:t>2019/10/25</a:t>
             </a:fld>
             <a:endParaRPr lang="zh-CN" altLang="en-US"/>
           </a:p>
@@ -4867,7 +4958,7 @@
           <a:p>
             <a:fld id="{B3CF370B-95BA-4E24-95EE-F0D16ECD3186}" type="datetimeFigureOut">
               <a:rPr lang="zh-CN" altLang="en-US" smtClean="0"/>
-              <a:t>2019/10/18</a:t>
+              <a:t>2019/10/25</a:t>
             </a:fld>
             <a:endParaRPr lang="zh-CN" altLang="en-US"/>
           </a:p>
@@ -4985,7 +5076,7 @@
           <a:p>
             <a:fld id="{B3CF370B-95BA-4E24-95EE-F0D16ECD3186}" type="datetimeFigureOut">
               <a:rPr lang="zh-CN" altLang="en-US" smtClean="0"/>
-              <a:t>2019/10/18</a:t>
+              <a:t>2019/10/25</a:t>
             </a:fld>
             <a:endParaRPr lang="zh-CN" altLang="en-US"/>
           </a:p>
@@ -5080,7 +5171,7 @@
           <a:p>
             <a:fld id="{B3CF370B-95BA-4E24-95EE-F0D16ECD3186}" type="datetimeFigureOut">
               <a:rPr lang="zh-CN" altLang="en-US" smtClean="0"/>
-              <a:t>2019/10/18</a:t>
+              <a:t>2019/10/25</a:t>
             </a:fld>
             <a:endParaRPr lang="zh-CN" altLang="en-US"/>
           </a:p>
@@ -5357,7 +5448,7 @@
           <a:p>
             <a:fld id="{B3CF370B-95BA-4E24-95EE-F0D16ECD3186}" type="datetimeFigureOut">
               <a:rPr lang="zh-CN" altLang="en-US" smtClean="0"/>
-              <a:t>2019/10/18</a:t>
+              <a:t>2019/10/25</a:t>
             </a:fld>
             <a:endParaRPr lang="zh-CN" altLang="en-US"/>
           </a:p>
@@ -5610,7 +5701,7 @@
           <a:p>
             <a:fld id="{B3CF370B-95BA-4E24-95EE-F0D16ECD3186}" type="datetimeFigureOut">
               <a:rPr lang="zh-CN" altLang="en-US" smtClean="0"/>
-              <a:t>2019/10/18</a:t>
+              <a:t>2019/10/25</a:t>
             </a:fld>
             <a:endParaRPr lang="zh-CN" altLang="en-US"/>
           </a:p>
@@ -5823,7 +5914,7 @@
           <a:p>
             <a:fld id="{B3CF370B-95BA-4E24-95EE-F0D16ECD3186}" type="datetimeFigureOut">
               <a:rPr lang="zh-CN" altLang="en-US" smtClean="0"/>
-              <a:t>2019/10/18</a:t>
+              <a:t>2019/10/25</a:t>
             </a:fld>
             <a:endParaRPr lang="zh-CN" altLang="en-US"/>
           </a:p>
@@ -7773,6 +7864,242 @@
           <a:p>
             <a:r>
               <a:rPr lang="zh-CN" altLang="en-US" dirty="0"/>
+              <a:t>地图结构</a:t>
+            </a:r>
+          </a:p>
+        </p:txBody>
+      </p:sp>
+      <p:pic>
+        <p:nvPicPr>
+          <p:cNvPr id="103" name="图片 102"/>
+          <p:cNvPicPr>
+            <a:picLocks noChangeAspect="1"/>
+          </p:cNvPicPr>
+          <p:nvPr/>
+        </p:nvPicPr>
+        <p:blipFill>
+          <a:blip r:embed="rId3" cstate="print">
+            <a:extLst>
+              <a:ext uri="{28A0092B-C50C-407E-A947-70E740481C1C}">
+                <a14:useLocalDpi xmlns:a14="http://schemas.microsoft.com/office/drawing/2010/main" val="0"/>
+              </a:ext>
+            </a:extLst>
+          </a:blip>
+          <a:stretch>
+            <a:fillRect/>
+          </a:stretch>
+        </p:blipFill>
+        <p:spPr>
+          <a:xfrm>
+            <a:off x="9456374" y="337205"/>
+            <a:ext cx="2422630" cy="342895"/>
+          </a:xfrm>
+          <a:prstGeom prst="rect">
+            <a:avLst/>
+          </a:prstGeom>
+        </p:spPr>
+      </p:pic>
+      <p:sp>
+        <p:nvSpPr>
+          <p:cNvPr id="6" name="TextBox 96"/>
+          <p:cNvSpPr txBox="1"/>
+          <p:nvPr/>
+        </p:nvSpPr>
+        <p:spPr>
+          <a:xfrm>
+            <a:off x="1402672" y="1872269"/>
+            <a:ext cx="9463776" cy="3732892"/>
+          </a:xfrm>
+          <a:prstGeom prst="rect">
+            <a:avLst/>
+          </a:prstGeom>
+          <a:noFill/>
+        </p:spPr>
+        <p:txBody>
+          <a:bodyPr wrap="square" lIns="91387" tIns="45694" rIns="91387" bIns="45694" rtlCol="0">
+            <a:spAutoFit/>
+          </a:bodyPr>
+          <a:lstStyle/>
+          <a:p>
+            <a:pPr marL="285586" indent="-285586" defTabSz="913874">
+              <a:lnSpc>
+                <a:spcPct val="150000"/>
+              </a:lnSpc>
+              <a:buClr>
+                <a:srgbClr val="FF0000"/>
+              </a:buClr>
+              <a:buFont typeface="Wingdings" panose="05000000000000000000" pitchFamily="2" charset="2"/>
+              <a:buChar char="n"/>
+            </a:pPr>
+            <a:r>
+              <a:rPr lang="zh-CN" altLang="en-US" sz="2000" dirty="0" smtClean="0"/>
+              <a:t>专题地图</a:t>
+            </a:r>
+            <a:endParaRPr lang="en-US" altLang="zh-CN" sz="2000" dirty="0" smtClean="0"/>
+          </a:p>
+          <a:p>
+            <a:pPr marL="285586" indent="-285586" defTabSz="913874">
+              <a:lnSpc>
+                <a:spcPct val="150000"/>
+              </a:lnSpc>
+              <a:buClr>
+                <a:srgbClr val="FF0000"/>
+              </a:buClr>
+              <a:buFont typeface="Wingdings" panose="05000000000000000000" pitchFamily="2" charset="2"/>
+              <a:buChar char="n"/>
+            </a:pPr>
+            <a:r>
+              <a:rPr lang="zh-CN" altLang="en-US" sz="2000" dirty="0" smtClean="0">
+                <a:solidFill>
+                  <a:prstClr val="black"/>
+                </a:solidFill>
+              </a:rPr>
+              <a:t>图层，包括场景图层和要素图层，</a:t>
+            </a:r>
+            <a:r>
+              <a:rPr lang="zh-CN" altLang="zh-CN" sz="2000" dirty="0"/>
+              <a:t>场景图层指基础三维</a:t>
+            </a:r>
+            <a:r>
+              <a:rPr lang="en-US" altLang="zh-CN" sz="2000" dirty="0"/>
+              <a:t>BIM</a:t>
+            </a:r>
+            <a:r>
+              <a:rPr lang="zh-CN" altLang="zh-CN" sz="2000" dirty="0"/>
+              <a:t>数据的分类，要素图层是设备、数据对象的</a:t>
+            </a:r>
+            <a:r>
+              <a:rPr lang="zh-CN" altLang="zh-CN" sz="2000" dirty="0" smtClean="0"/>
+              <a:t>分类</a:t>
+            </a:r>
+            <a:endParaRPr lang="en-US" altLang="zh-CN" sz="2000" dirty="0" smtClean="0">
+              <a:solidFill>
+                <a:prstClr val="black"/>
+              </a:solidFill>
+            </a:endParaRPr>
+          </a:p>
+          <a:p>
+            <a:pPr marL="285586" indent="-285586" defTabSz="913874">
+              <a:lnSpc>
+                <a:spcPct val="150000"/>
+              </a:lnSpc>
+              <a:buClr>
+                <a:srgbClr val="FF0000"/>
+              </a:buClr>
+              <a:buFont typeface="Wingdings" panose="05000000000000000000" pitchFamily="2" charset="2"/>
+              <a:buChar char="n"/>
+            </a:pPr>
+            <a:r>
+              <a:rPr lang="zh-CN" altLang="en-US" sz="2000" dirty="0" smtClean="0">
+                <a:solidFill>
+                  <a:prstClr val="black"/>
+                </a:solidFill>
+              </a:rPr>
+              <a:t>样式组合是样式的集合</a:t>
+            </a:r>
+            <a:endParaRPr lang="en-US" altLang="zh-CN" sz="2000" dirty="0" smtClean="0">
+              <a:solidFill>
+                <a:prstClr val="black"/>
+              </a:solidFill>
+            </a:endParaRPr>
+          </a:p>
+          <a:p>
+            <a:pPr marL="285586" indent="-285586" defTabSz="913874">
+              <a:lnSpc>
+                <a:spcPct val="150000"/>
+              </a:lnSpc>
+              <a:buClr>
+                <a:srgbClr val="FF0000"/>
+              </a:buClr>
+              <a:buFont typeface="Wingdings" panose="05000000000000000000" pitchFamily="2" charset="2"/>
+              <a:buChar char="n"/>
+            </a:pPr>
+            <a:r>
+              <a:rPr lang="zh-CN" altLang="en-US" sz="2000" dirty="0" smtClean="0">
+                <a:solidFill>
+                  <a:prstClr val="black"/>
+                </a:solidFill>
+              </a:rPr>
+              <a:t>样式，</a:t>
+            </a:r>
+            <a:r>
+              <a:rPr lang="zh-CN" altLang="zh-CN" sz="2000" dirty="0"/>
+              <a:t>描述图层要素对象的表现形式，支持的样式有：三维模型、图标、二维标注、三维标注、图标闪烁动画、图标自旋转动画、图标帧动画、模型颜色渐变动画、模型自旋转动画、模型材质特效、模型高光特效、模型半透明特效、模型全息特效、模型自发光特效</a:t>
+            </a:r>
+            <a:endParaRPr lang="zh-CN" altLang="zh-CN" sz="2000" dirty="0" smtClean="0">
+              <a:solidFill>
+                <a:prstClr val="black"/>
+              </a:solidFill>
+            </a:endParaRPr>
+          </a:p>
+        </p:txBody>
+      </p:sp>
+    </p:spTree>
+    <p:extLst>
+      <p:ext uri="{BB962C8B-B14F-4D97-AF65-F5344CB8AC3E}">
+        <p14:creationId xmlns:p14="http://schemas.microsoft.com/office/powerpoint/2010/main" val="2755263444"/>
+      </p:ext>
+    </p:extLst>
+  </p:cSld>
+  <p:clrMapOvr>
+    <a:masterClrMapping/>
+  </p:clrMapOvr>
+  <mc:AlternateContent xmlns:mc="http://schemas.openxmlformats.org/markup-compatibility/2006" xmlns:p14="http://schemas.microsoft.com/office/powerpoint/2010/main">
+    <mc:Choice Requires="p14">
+      <p:transition spd="med" p14:dur="700">
+        <p:fade/>
+      </p:transition>
+    </mc:Choice>
+    <mc:Fallback xmlns="">
+      <p:transition spd="med">
+        <p:fade/>
+      </p:transition>
+    </mc:Fallback>
+  </mc:AlternateContent>
+  <p:timing>
+    <p:tnLst>
+      <p:par>
+        <p:cTn id="1" dur="indefinite" restart="never" nodeType="tmRoot"/>
+      </p:par>
+    </p:tnLst>
+  </p:timing>
+</p:sld>
+</file>
+
+<file path=ppt/slides/slide11.xml><?xml version="1.0" encoding="utf-8"?>
+<p:sld xmlns:a="http://schemas.openxmlformats.org/drawingml/2006/main" xmlns:r="http://schemas.openxmlformats.org/officeDocument/2006/relationships" xmlns:p="http://schemas.openxmlformats.org/presentationml/2006/main">
+  <p:cSld>
+    <p:spTree>
+      <p:nvGrpSpPr>
+        <p:cNvPr id="1" name=""/>
+        <p:cNvGrpSpPr/>
+        <p:nvPr/>
+      </p:nvGrpSpPr>
+      <p:grpSpPr>
+        <a:xfrm>
+          <a:off x="0" y="0"/>
+          <a:ext cx="0" cy="0"/>
+          <a:chOff x="0" y="0"/>
+          <a:chExt cx="0" cy="0"/>
+        </a:xfrm>
+      </p:grpSpPr>
+      <p:sp>
+        <p:nvSpPr>
+          <p:cNvPr id="3" name="标题 2"/>
+          <p:cNvSpPr>
+            <a:spLocks noGrp="1"/>
+          </p:cNvSpPr>
+          <p:nvPr>
+            <p:ph type="title"/>
+          </p:nvPr>
+        </p:nvSpPr>
+        <p:spPr/>
+        <p:txBody>
+          <a:bodyPr/>
+          <a:lstStyle/>
+          <a:p>
+            <a:r>
+              <a:rPr lang="zh-CN" altLang="en-US" dirty="0"/>
               <a:t>演示</a:t>
             </a:r>
           </a:p>
@@ -7832,10 +8159,12 @@
           <a:p>
             <a:pPr algn="ctr"/>
             <a:r>
-              <a:rPr lang="en-US" altLang="zh-CN" sz="2000" dirty="0">
-                <a:hlinkClick r:id="rId4"/>
-              </a:rPr>
-              <a:t>https://10.19.133.126/dve/mapConfig</a:t>
+              <a:rPr lang="en-US" altLang="zh-CN" sz="2000" dirty="0"/>
+              <a:t>http://</a:t>
+            </a:r>
+            <a:r>
+              <a:rPr lang="en-US" altLang="zh-CN" sz="2000" dirty="0" smtClean="0"/>
+              <a:t>10.66.174.28:53032/dve/home</a:t>
             </a:r>
             <a:endParaRPr lang="zh-CN" altLang="en-US" sz="2000" dirty="0"/>
           </a:p>
@@ -7873,7 +8202,7 @@
 </p:sld>
 </file>
 
-<file path=ppt/slides/slide11.xml><?xml version="1.0" encoding="utf-8"?>
+<file path=ppt/slides/slide12.xml><?xml version="1.0" encoding="utf-8"?>
 <p:sld xmlns:a="http://schemas.openxmlformats.org/drawingml/2006/main" xmlns:r="http://schemas.openxmlformats.org/officeDocument/2006/relationships" xmlns:p="http://schemas.openxmlformats.org/presentationml/2006/main">
   <p:cSld>
     <p:spTree>
@@ -8786,7 +9115,7 @@
 </p:sld>
 </file>
 
-<file path=ppt/slides/slide12.xml><?xml version="1.0" encoding="utf-8"?>
+<file path=ppt/slides/slide13.xml><?xml version="1.0" encoding="utf-8"?>
 <p:sld xmlns:a="http://schemas.openxmlformats.org/drawingml/2006/main" xmlns:r="http://schemas.openxmlformats.org/officeDocument/2006/relationships" xmlns:p="http://schemas.openxmlformats.org/presentationml/2006/main">
   <p:cSld>
     <p:spTree>
@@ -8999,7 +9328,7 @@
 </p:sld>
 </file>
 
-<file path=ppt/slides/slide13.xml><?xml version="1.0" encoding="utf-8"?>
+<file path=ppt/slides/slide14.xml><?xml version="1.0" encoding="utf-8"?>
 <p:sld xmlns:a="http://schemas.openxmlformats.org/drawingml/2006/main" xmlns:r="http://schemas.openxmlformats.org/officeDocument/2006/relationships" xmlns:p="http://schemas.openxmlformats.org/presentationml/2006/main">
   <p:cSld>
     <p:spTree>
@@ -9137,7 +9466,7 @@
 </p:sld>
 </file>
 
-<file path=ppt/slides/slide14.xml><?xml version="1.0" encoding="utf-8"?>
+<file path=ppt/slides/slide15.xml><?xml version="1.0" encoding="utf-8"?>
 <p:sld xmlns:a="http://schemas.openxmlformats.org/drawingml/2006/main" xmlns:r="http://schemas.openxmlformats.org/officeDocument/2006/relationships" xmlns:p="http://schemas.openxmlformats.org/presentationml/2006/main">
   <p:cSld>
     <p:spTree>
@@ -9267,7 +9596,7 @@
 </p:sld>
 </file>
 
-<file path=ppt/slides/slide15.xml><?xml version="1.0" encoding="utf-8"?>
+<file path=ppt/slides/slide16.xml><?xml version="1.0" encoding="utf-8"?>
 <p:sld xmlns:a="http://schemas.openxmlformats.org/drawingml/2006/main" xmlns:r="http://schemas.openxmlformats.org/officeDocument/2006/relationships" xmlns:p="http://schemas.openxmlformats.org/presentationml/2006/main">
   <p:cSld>
     <p:spTree>
@@ -9397,7 +9726,7 @@
 </p:sld>
 </file>
 
-<file path=ppt/slides/slide16.xml><?xml version="1.0" encoding="utf-8"?>
+<file path=ppt/slides/slide17.xml><?xml version="1.0" encoding="utf-8"?>
 <p:sld xmlns:a="http://schemas.openxmlformats.org/drawingml/2006/main" xmlns:r="http://schemas.openxmlformats.org/officeDocument/2006/relationships" xmlns:p="http://schemas.openxmlformats.org/presentationml/2006/main">
   <p:cSld>
     <p:spTree>
@@ -9527,7 +9856,7 @@
 </p:sld>
 </file>
 
-<file path=ppt/slides/slide17.xml><?xml version="1.0" encoding="utf-8"?>
+<file path=ppt/slides/slide18.xml><?xml version="1.0" encoding="utf-8"?>
 <p:sld xmlns:a="http://schemas.openxmlformats.org/drawingml/2006/main" xmlns:r="http://schemas.openxmlformats.org/officeDocument/2006/relationships" xmlns:p="http://schemas.openxmlformats.org/presentationml/2006/main">
   <p:cSld>
     <p:spTree>
@@ -9664,7 +9993,7 @@
 </p:sld>
 </file>
 
-<file path=ppt/slides/slide18.xml><?xml version="1.0" encoding="utf-8"?>
+<file path=ppt/slides/slide19.xml><?xml version="1.0" encoding="utf-8"?>
 <p:sld xmlns:a="http://schemas.openxmlformats.org/drawingml/2006/main" xmlns:r="http://schemas.openxmlformats.org/officeDocument/2006/relationships" xmlns:p="http://schemas.openxmlformats.org/presentationml/2006/main">
   <p:cSld>
     <p:spTree>
@@ -10574,1108 +10903,6 @@
       </p:timing>
     </mc:Fallback>
   </mc:AlternateContent>
-</p:sld>
-</file>
-
-<file path=ppt/slides/slide19.xml><?xml version="1.0" encoding="utf-8"?>
-<p:sld xmlns:a="http://schemas.openxmlformats.org/drawingml/2006/main" xmlns:r="http://schemas.openxmlformats.org/officeDocument/2006/relationships" xmlns:p="http://schemas.openxmlformats.org/presentationml/2006/main">
-  <p:cSld>
-    <p:spTree>
-      <p:nvGrpSpPr>
-        <p:cNvPr id="1" name=""/>
-        <p:cNvGrpSpPr/>
-        <p:nvPr/>
-      </p:nvGrpSpPr>
-      <p:grpSpPr>
-        <a:xfrm>
-          <a:off x="0" y="0"/>
-          <a:ext cx="0" cy="0"/>
-          <a:chOff x="0" y="0"/>
-          <a:chExt cx="0" cy="0"/>
-        </a:xfrm>
-      </p:grpSpPr>
-      <p:sp>
-        <p:nvSpPr>
-          <p:cNvPr id="3" name="标题 2"/>
-          <p:cNvSpPr>
-            <a:spLocks noGrp="1"/>
-          </p:cNvSpPr>
-          <p:nvPr>
-            <p:ph type="title"/>
-          </p:nvPr>
-        </p:nvSpPr>
-        <p:spPr/>
-        <p:txBody>
-          <a:bodyPr/>
-          <a:lstStyle/>
-          <a:p>
-            <a:r>
-              <a:rPr lang="zh-CN" altLang="en-US" dirty="0" smtClean="0"/>
-              <a:t>问题和解决</a:t>
-            </a:r>
-            <a:endParaRPr lang="zh-CN" altLang="en-US" dirty="0"/>
-          </a:p>
-        </p:txBody>
-      </p:sp>
-      <p:pic>
-        <p:nvPicPr>
-          <p:cNvPr id="103" name="图片 102"/>
-          <p:cNvPicPr>
-            <a:picLocks noChangeAspect="1"/>
-          </p:cNvPicPr>
-          <p:nvPr/>
-        </p:nvPicPr>
-        <p:blipFill>
-          <a:blip r:embed="rId4" cstate="print">
-            <a:extLst>
-              <a:ext uri="{28A0092B-C50C-407E-A947-70E740481C1C}">
-                <a14:useLocalDpi xmlns:a14="http://schemas.microsoft.com/office/drawing/2010/main" val="0"/>
-              </a:ext>
-            </a:extLst>
-          </a:blip>
-          <a:stretch>
-            <a:fillRect/>
-          </a:stretch>
-        </p:blipFill>
-        <p:spPr>
-          <a:xfrm>
-            <a:off x="9456374" y="337205"/>
-            <a:ext cx="2422630" cy="342895"/>
-          </a:xfrm>
-          <a:prstGeom prst="rect">
-            <a:avLst/>
-          </a:prstGeom>
-        </p:spPr>
-      </p:pic>
-      <p:grpSp>
-        <p:nvGrpSpPr>
-          <p:cNvPr id="6" name="组合 5">
-            <a:extLst>
-              <a:ext uri="{FF2B5EF4-FFF2-40B4-BE49-F238E27FC236}">
-                <a16:creationId xmlns:a16="http://schemas.microsoft.com/office/drawing/2014/main" id="{C0498D3A-B738-48EC-A39C-94C58B88932B}"/>
-              </a:ext>
-            </a:extLst>
-          </p:cNvPr>
-          <p:cNvGrpSpPr/>
-          <p:nvPr/>
-        </p:nvGrpSpPr>
-        <p:grpSpPr>
-          <a:xfrm>
-            <a:off x="757282" y="1700808"/>
-            <a:ext cx="10763205" cy="4083608"/>
-            <a:chOff x="757282" y="1700808"/>
-            <a:chExt cx="10763205" cy="4083608"/>
-          </a:xfrm>
-        </p:grpSpPr>
-        <p:grpSp>
-          <p:nvGrpSpPr>
-            <p:cNvPr id="7" name="2b751056-6b97-492c-b763-340acee7e99d" descr="本素材由iSlide™ 提供&#10;iSlide™尊重知识产权并注重保护用户享有的各项权利。郑重提醒您：&#10;iSlide™插件中提供的任何信息内容的所有权、知识产权归其原始权利人或权利受让人所有，您免费/购买获得的是信息内容的使用权，并受下述条款的约束；&#10;1. 您仅可以个人非商业用途使用该等信息内容，不可将信息内容的全部或部分用于出售，或以出租、出借、转让、分销、发布等其他任何方式供他人使用；&#10;2. 禁止在接入互联网或移动互联网的任何网站、平台、应用或程序上以任何方式为他人提供iSlide™插件资源内容的下载。&#10;The resource is supplied by iSlide™.&#10;iSlide™ respects all intellectual property rights and protects all the rights its users acquired.Solemnly remind you:&#10;The ownership and intellectual property of the resources supplied in iSlide Add-in belongs to its owner or the assignee of this ownership.you only acquired the usage of the resources supplied in iSlide Add-in, as well as respected the following restrain terms:&#10;1.You are only allowed to use such resource for personal and non-commercial aim, not allowed to use such resource or part of it for the sale; or rent, lend, transfer to others; or distribution or release it in any way.&#10;2.You are not permitted to provide the resource of iSlide Add-in in any website, platform, application access to the Internet or mobile Internet." title="iSlide™ 版权声明  COPYRIGHT NOTICE">
-              <a:extLst>
-                <a:ext uri="{FF2B5EF4-FFF2-40B4-BE49-F238E27FC236}">
-                  <a16:creationId xmlns:a16="http://schemas.microsoft.com/office/drawing/2014/main" id="{A759C196-DA28-4241-ABB5-975367026FE9}"/>
-                </a:ext>
-              </a:extLst>
-            </p:cNvPr>
-            <p:cNvGrpSpPr>
-              <a:grpSpLocks noChangeAspect="1"/>
-            </p:cNvGrpSpPr>
-            <p:nvPr>
-              <p:custDataLst>
-                <p:tags r:id="rId1"/>
-              </p:custDataLst>
-            </p:nvPr>
-          </p:nvGrpSpPr>
-          <p:grpSpPr>
-            <a:xfrm>
-              <a:off x="757282" y="1700808"/>
-              <a:ext cx="10763205" cy="4083608"/>
-              <a:chOff x="1175743" y="1700808"/>
-              <a:chExt cx="10344744" cy="4083608"/>
-            </a:xfrm>
-          </p:grpSpPr>
-          <p:sp>
-            <p:nvSpPr>
-              <p:cNvPr id="9" name="iṡľïḑè">
-                <a:extLst>
-                  <a:ext uri="{FF2B5EF4-FFF2-40B4-BE49-F238E27FC236}">
-                    <a16:creationId xmlns:a16="http://schemas.microsoft.com/office/drawing/2014/main" id="{48F70259-7598-4270-874A-6F50772D10F6}"/>
-                  </a:ext>
-                </a:extLst>
-              </p:cNvPr>
-              <p:cNvSpPr txBox="1"/>
-              <p:nvPr/>
-            </p:nvSpPr>
-            <p:spPr bwMode="auto">
-              <a:xfrm>
-                <a:off x="3822192" y="1780800"/>
-                <a:ext cx="7698295" cy="4003616"/>
-              </a:xfrm>
-              <a:prstGeom prst="rect">
-                <a:avLst/>
-              </a:prstGeom>
-              <a:noFill/>
-            </p:spPr>
-            <p:txBody>
-              <a:bodyPr wrap="square" tIns="0" anchor="t">
-                <a:noAutofit/>
-              </a:bodyPr>
-              <a:lstStyle>
-                <a:defPPr>
-                  <a:defRPr lang="zh-CN"/>
-                </a:defPPr>
-                <a:lvl1pPr>
-                  <a:defRPr sz="1600" b="1">
-                    <a:latin typeface="Arial" panose="020B0604020202020204" pitchFamily="34" charset="0"/>
-                    <a:ea typeface="微软雅黑" panose="020B0503020204020204" pitchFamily="34" charset="-122"/>
-                    <a:cs typeface="+mn-ea"/>
-                  </a:defRPr>
-                </a:lvl1pPr>
-                <a:lvl2pPr marL="742950" indent="-285750">
-                  <a:defRPr sz="3200" b="1">
-                    <a:solidFill>
-                      <a:srgbClr val="4D4D4D"/>
-                    </a:solidFill>
-                    <a:latin typeface="Arial" panose="020B0604020202020204" pitchFamily="34" charset="0"/>
-                    <a:ea typeface="黑体" panose="02010609060101010101" pitchFamily="49" charset="-122"/>
-                  </a:defRPr>
-                </a:lvl2pPr>
-                <a:lvl3pPr marL="1143000" indent="-228600">
-                  <a:defRPr sz="3200" b="1">
-                    <a:solidFill>
-                      <a:srgbClr val="4D4D4D"/>
-                    </a:solidFill>
-                    <a:latin typeface="Arial" panose="020B0604020202020204" pitchFamily="34" charset="0"/>
-                    <a:ea typeface="黑体" panose="02010609060101010101" pitchFamily="49" charset="-122"/>
-                  </a:defRPr>
-                </a:lvl3pPr>
-                <a:lvl4pPr marL="1600200" indent="-228600">
-                  <a:defRPr sz="3200" b="1">
-                    <a:solidFill>
-                      <a:srgbClr val="4D4D4D"/>
-                    </a:solidFill>
-                    <a:latin typeface="Arial" panose="020B0604020202020204" pitchFamily="34" charset="0"/>
-                    <a:ea typeface="黑体" panose="02010609060101010101" pitchFamily="49" charset="-122"/>
-                  </a:defRPr>
-                </a:lvl4pPr>
-                <a:lvl5pPr marL="2057400" indent="-228600">
-                  <a:defRPr sz="3200" b="1">
-                    <a:solidFill>
-                      <a:srgbClr val="4D4D4D"/>
-                    </a:solidFill>
-                    <a:latin typeface="Arial" panose="020B0604020202020204" pitchFamily="34" charset="0"/>
-                    <a:ea typeface="黑体" panose="02010609060101010101" pitchFamily="49" charset="-122"/>
-                  </a:defRPr>
-                </a:lvl5pPr>
-                <a:lvl6pPr marL="2514600" indent="-228600" eaLnBrk="0" fontAlgn="base" hangingPunct="0">
-                  <a:spcBef>
-                    <a:spcPct val="0"/>
-                  </a:spcBef>
-                  <a:spcAft>
-                    <a:spcPct val="0"/>
-                  </a:spcAft>
-                  <a:defRPr sz="3200" b="1">
-                    <a:solidFill>
-                      <a:srgbClr val="4D4D4D"/>
-                    </a:solidFill>
-                    <a:latin typeface="Arial" panose="020B0604020202020204" pitchFamily="34" charset="0"/>
-                    <a:ea typeface="黑体" panose="02010609060101010101" pitchFamily="49" charset="-122"/>
-                  </a:defRPr>
-                </a:lvl6pPr>
-                <a:lvl7pPr marL="2971800" indent="-228600" eaLnBrk="0" fontAlgn="base" hangingPunct="0">
-                  <a:spcBef>
-                    <a:spcPct val="0"/>
-                  </a:spcBef>
-                  <a:spcAft>
-                    <a:spcPct val="0"/>
-                  </a:spcAft>
-                  <a:defRPr sz="3200" b="1">
-                    <a:solidFill>
-                      <a:srgbClr val="4D4D4D"/>
-                    </a:solidFill>
-                    <a:latin typeface="Arial" panose="020B0604020202020204" pitchFamily="34" charset="0"/>
-                    <a:ea typeface="黑体" panose="02010609060101010101" pitchFamily="49" charset="-122"/>
-                  </a:defRPr>
-                </a:lvl7pPr>
-                <a:lvl8pPr marL="3429000" indent="-228600" eaLnBrk="0" fontAlgn="base" hangingPunct="0">
-                  <a:spcBef>
-                    <a:spcPct val="0"/>
-                  </a:spcBef>
-                  <a:spcAft>
-                    <a:spcPct val="0"/>
-                  </a:spcAft>
-                  <a:defRPr sz="3200" b="1">
-                    <a:solidFill>
-                      <a:srgbClr val="4D4D4D"/>
-                    </a:solidFill>
-                    <a:latin typeface="Arial" panose="020B0604020202020204" pitchFamily="34" charset="0"/>
-                    <a:ea typeface="黑体" panose="02010609060101010101" pitchFamily="49" charset="-122"/>
-                  </a:defRPr>
-                </a:lvl8pPr>
-                <a:lvl9pPr marL="3886200" indent="-228600" eaLnBrk="0" fontAlgn="base" hangingPunct="0">
-                  <a:spcBef>
-                    <a:spcPct val="0"/>
-                  </a:spcBef>
-                  <a:spcAft>
-                    <a:spcPct val="0"/>
-                  </a:spcAft>
-                  <a:defRPr sz="3200" b="1">
-                    <a:solidFill>
-                      <a:srgbClr val="4D4D4D"/>
-                    </a:solidFill>
-                    <a:latin typeface="Arial" panose="020B0604020202020204" pitchFamily="34" charset="0"/>
-                    <a:ea typeface="黑体" panose="02010609060101010101" pitchFamily="49" charset="-122"/>
-                  </a:defRPr>
-                </a:lvl9pPr>
-              </a:lstStyle>
-              <a:p>
-                <a:pPr>
-                  <a:lnSpc>
-                    <a:spcPct val="150000"/>
-                  </a:lnSpc>
-                </a:pPr>
-                <a:endParaRPr lang="en-US" altLang="zh-CN" b="0" dirty="0" smtClean="0">
-                  <a:latin typeface="+mn-lt"/>
-                  <a:ea typeface="+mn-ea"/>
-                  <a:sym typeface="+mn-lt"/>
-                </a:endParaRPr>
-              </a:p>
-              <a:p>
-                <a:pPr marL="342900" indent="-342900">
-                  <a:lnSpc>
-                    <a:spcPct val="150000"/>
-                  </a:lnSpc>
-                  <a:buFont typeface="+mj-lt"/>
-                  <a:buAutoNum type="arabicPeriod"/>
-                </a:pPr>
-                <a:endParaRPr lang="en-US" altLang="zh-CN" b="0" dirty="0">
-                  <a:latin typeface="+mn-lt"/>
-                  <a:ea typeface="+mn-ea"/>
-                  <a:sym typeface="+mn-lt"/>
-                </a:endParaRPr>
-              </a:p>
-              <a:p>
-                <a:pPr>
-                  <a:lnSpc>
-                    <a:spcPct val="150000"/>
-                  </a:lnSpc>
-                </a:pPr>
-                <a:endParaRPr lang="en-US" altLang="zh-CN" b="0" dirty="0">
-                  <a:latin typeface="+mn-lt"/>
-                  <a:ea typeface="+mn-ea"/>
-                  <a:sym typeface="+mn-lt"/>
-                </a:endParaRPr>
-              </a:p>
-            </p:txBody>
-          </p:sp>
-          <p:cxnSp>
-            <p:nvCxnSpPr>
-              <p:cNvPr id="10" name="直接连接符 9">
-                <a:extLst>
-                  <a:ext uri="{FF2B5EF4-FFF2-40B4-BE49-F238E27FC236}">
-                    <a16:creationId xmlns:a16="http://schemas.microsoft.com/office/drawing/2014/main" id="{DA1FB18E-FA01-4588-BEF9-FB96A98A84D4}"/>
-                  </a:ext>
-                </a:extLst>
-              </p:cNvPr>
-              <p:cNvCxnSpPr>
-                <a:cxnSpLocks/>
-              </p:cNvCxnSpPr>
-              <p:nvPr/>
-            </p:nvCxnSpPr>
-            <p:spPr>
-              <a:xfrm>
-                <a:off x="3696888" y="1780800"/>
-                <a:ext cx="0" cy="4003616"/>
-              </a:xfrm>
-              <a:prstGeom prst="line">
-                <a:avLst/>
-              </a:prstGeom>
-              <a:solidFill>
-                <a:srgbClr val="FFCC00"/>
-              </a:solidFill>
-              <a:ln w="3175" cap="flat" cmpd="sng" algn="ctr">
-                <a:solidFill>
-                  <a:schemeClr val="bg1">
-                    <a:lumMod val="75000"/>
-                  </a:schemeClr>
-                </a:solidFill>
-                <a:prstDash val="solid"/>
-                <a:round/>
-                <a:headEnd type="none" w="med" len="med"/>
-                <a:tailEnd type="none" w="med" len="med"/>
-              </a:ln>
-              <a:effectLst/>
-            </p:spPr>
-          </p:cxnSp>
-          <p:sp>
-            <p:nvSpPr>
-              <p:cNvPr id="11" name="išľïḋé">
-                <a:extLst>
-                  <a:ext uri="{FF2B5EF4-FFF2-40B4-BE49-F238E27FC236}">
-                    <a16:creationId xmlns:a16="http://schemas.microsoft.com/office/drawing/2014/main" id="{0DB1D0A1-2667-455C-9387-D7ABF0A00B8C}"/>
-                  </a:ext>
-                </a:extLst>
-              </p:cNvPr>
-              <p:cNvSpPr txBox="1"/>
-              <p:nvPr/>
-            </p:nvSpPr>
-            <p:spPr>
-              <a:xfrm>
-                <a:off x="1175743" y="1700808"/>
-                <a:ext cx="2521108" cy="523220"/>
-              </a:xfrm>
-              <a:prstGeom prst="rect">
-                <a:avLst/>
-              </a:prstGeom>
-              <a:solidFill>
-                <a:schemeClr val="bg1"/>
-              </a:solidFill>
-            </p:spPr>
-            <p:txBody>
-              <a:bodyPr wrap="square" rtlCol="0">
-                <a:spAutoFit/>
-              </a:bodyPr>
-              <a:lstStyle/>
-              <a:p>
-                <a:pPr algn="r"/>
-                <a:r>
-                  <a:rPr lang="tr-TR" sz="2800" b="1" dirty="0">
-                    <a:solidFill>
-                      <a:schemeClr val="accent1"/>
-                    </a:solidFill>
-                    <a:cs typeface="+mn-ea"/>
-                    <a:sym typeface="+mn-lt"/>
-                  </a:rPr>
-                  <a:t>CONTENTS</a:t>
-                </a:r>
-              </a:p>
-            </p:txBody>
-          </p:sp>
-        </p:grpSp>
-        <p:sp>
-          <p:nvSpPr>
-            <p:cNvPr id="8" name="poetry_91022">
-              <a:extLst>
-                <a:ext uri="{FF2B5EF4-FFF2-40B4-BE49-F238E27FC236}">
-                  <a16:creationId xmlns:a16="http://schemas.microsoft.com/office/drawing/2014/main" id="{ADAD6BE3-DC11-4582-9F68-50D831ADD001}"/>
-                </a:ext>
-              </a:extLst>
-            </p:cNvPr>
-            <p:cNvSpPr>
-              <a:spLocks noChangeAspect="1"/>
-            </p:cNvSpPr>
-            <p:nvPr/>
-          </p:nvSpPr>
-          <p:spPr bwMode="auto">
-            <a:xfrm>
-              <a:off x="2379533" y="4867348"/>
-              <a:ext cx="870506" cy="915667"/>
-            </a:xfrm>
-            <a:custGeom>
-              <a:avLst/>
-              <a:gdLst>
-                <a:gd name="T0" fmla="*/ 3353 w 5127"/>
-                <a:gd name="T1" fmla="*/ 1728 h 5401"/>
-                <a:gd name="T2" fmla="*/ 2183 w 5127"/>
-                <a:gd name="T3" fmla="*/ 1608 h 5401"/>
-                <a:gd name="T4" fmla="*/ 3353 w 5127"/>
-                <a:gd name="T5" fmla="*/ 1488 h 5401"/>
-                <a:gd name="T6" fmla="*/ 3103 w 5127"/>
-                <a:gd name="T7" fmla="*/ 2231 h 5401"/>
-                <a:gd name="T8" fmla="*/ 3103 w 5127"/>
-                <a:gd name="T9" fmla="*/ 1991 h 5401"/>
-                <a:gd name="T10" fmla="*/ 2432 w 5127"/>
-                <a:gd name="T11" fmla="*/ 2111 h 5401"/>
-                <a:gd name="T12" fmla="*/ 3103 w 5127"/>
-                <a:gd name="T13" fmla="*/ 2231 h 5401"/>
-                <a:gd name="T14" fmla="*/ 3353 w 5127"/>
-                <a:gd name="T15" fmla="*/ 2648 h 5401"/>
-                <a:gd name="T16" fmla="*/ 2183 w 5127"/>
-                <a:gd name="T17" fmla="*/ 2768 h 5401"/>
-                <a:gd name="T18" fmla="*/ 3353 w 5127"/>
-                <a:gd name="T19" fmla="*/ 2888 h 5401"/>
-                <a:gd name="T20" fmla="*/ 2552 w 5127"/>
-                <a:gd name="T21" fmla="*/ 3151 h 5401"/>
-                <a:gd name="T22" fmla="*/ 2552 w 5127"/>
-                <a:gd name="T23" fmla="*/ 3391 h 5401"/>
-                <a:gd name="T24" fmla="*/ 3223 w 5127"/>
-                <a:gd name="T25" fmla="*/ 3271 h 5401"/>
-                <a:gd name="T26" fmla="*/ 2552 w 5127"/>
-                <a:gd name="T27" fmla="*/ 3151 h 5401"/>
-                <a:gd name="T28" fmla="*/ 4448 w 5127"/>
-                <a:gd name="T29" fmla="*/ 1442 h 5401"/>
-                <a:gd name="T30" fmla="*/ 4688 w 5127"/>
-                <a:gd name="T31" fmla="*/ 1442 h 5401"/>
-                <a:gd name="T32" fmla="*/ 3988 w 5127"/>
-                <a:gd name="T33" fmla="*/ 0 h 5401"/>
-                <a:gd name="T34" fmla="*/ 0 w 5127"/>
-                <a:gd name="T35" fmla="*/ 604 h 5401"/>
-                <a:gd name="T36" fmla="*/ 120 w 5127"/>
-                <a:gd name="T37" fmla="*/ 1792 h 5401"/>
-                <a:gd name="T38" fmla="*/ 686 w 5127"/>
-                <a:gd name="T39" fmla="*/ 1672 h 5401"/>
-                <a:gd name="T40" fmla="*/ 240 w 5127"/>
-                <a:gd name="T41" fmla="*/ 1552 h 5401"/>
-                <a:gd name="T42" fmla="*/ 604 w 5127"/>
-                <a:gd name="T43" fmla="*/ 240 h 5401"/>
-                <a:gd name="T44" fmla="*/ 968 w 5127"/>
-                <a:gd name="T45" fmla="*/ 4179 h 5401"/>
-                <a:gd name="T46" fmla="*/ 3904 w 5127"/>
-                <a:gd name="T47" fmla="*/ 4879 h 5401"/>
-                <a:gd name="T48" fmla="*/ 3904 w 5127"/>
-                <a:gd name="T49" fmla="*/ 4639 h 5401"/>
-                <a:gd name="T50" fmla="*/ 1208 w 5127"/>
-                <a:gd name="T51" fmla="*/ 4179 h 5401"/>
-                <a:gd name="T52" fmla="*/ 1086 w 5127"/>
-                <a:gd name="T53" fmla="*/ 240 h 5401"/>
-                <a:gd name="T54" fmla="*/ 4448 w 5127"/>
-                <a:gd name="T55" fmla="*/ 700 h 5401"/>
-                <a:gd name="T56" fmla="*/ 4568 w 5127"/>
-                <a:gd name="T57" fmla="*/ 2000 h 5401"/>
-                <a:gd name="T58" fmla="*/ 4568 w 5127"/>
-                <a:gd name="T59" fmla="*/ 2240 h 5401"/>
-                <a:gd name="T60" fmla="*/ 4887 w 5127"/>
-                <a:gd name="T61" fmla="*/ 2340 h 5401"/>
-                <a:gd name="T62" fmla="*/ 5007 w 5127"/>
-                <a:gd name="T63" fmla="*/ 3838 h 5401"/>
-                <a:gd name="T64" fmla="*/ 5127 w 5127"/>
-                <a:gd name="T65" fmla="*/ 2340 h 5401"/>
-                <a:gd name="T66" fmla="*/ 4568 w 5127"/>
-                <a:gd name="T67" fmla="*/ 5139 h 5401"/>
-                <a:gd name="T68" fmla="*/ 4448 w 5127"/>
-                <a:gd name="T69" fmla="*/ 5281 h 5401"/>
-                <a:gd name="T70" fmla="*/ 4688 w 5127"/>
-                <a:gd name="T71" fmla="*/ 5281 h 5401"/>
-                <a:gd name="T72" fmla="*/ 4568 w 5127"/>
-                <a:gd name="T73" fmla="*/ 5139 h 5401"/>
-                <a:gd name="T74" fmla="*/ 4448 w 5127"/>
-                <a:gd name="T75" fmla="*/ 2559 h 5401"/>
-                <a:gd name="T76" fmla="*/ 4568 w 5127"/>
-                <a:gd name="T77" fmla="*/ 4974 h 5401"/>
-                <a:gd name="T78" fmla="*/ 4688 w 5127"/>
-                <a:gd name="T79" fmla="*/ 2559 h 5401"/>
-              </a:gdLst>
-              <a:ahLst/>
-              <a:cxnLst>
-                <a:cxn ang="0">
-                  <a:pos x="T0" y="T1"/>
-                </a:cxn>
-                <a:cxn ang="0">
-                  <a:pos x="T2" y="T3"/>
-                </a:cxn>
-                <a:cxn ang="0">
-                  <a:pos x="T4" y="T5"/>
-                </a:cxn>
-                <a:cxn ang="0">
-                  <a:pos x="T6" y="T7"/>
-                </a:cxn>
-                <a:cxn ang="0">
-                  <a:pos x="T8" y="T9"/>
-                </a:cxn>
-                <a:cxn ang="0">
-                  <a:pos x="T10" y="T11"/>
-                </a:cxn>
-                <a:cxn ang="0">
-                  <a:pos x="T12" y="T13"/>
-                </a:cxn>
-                <a:cxn ang="0">
-                  <a:pos x="T14" y="T15"/>
-                </a:cxn>
-                <a:cxn ang="0">
-                  <a:pos x="T16" y="T17"/>
-                </a:cxn>
-                <a:cxn ang="0">
-                  <a:pos x="T18" y="T19"/>
-                </a:cxn>
-                <a:cxn ang="0">
-                  <a:pos x="T20" y="T21"/>
-                </a:cxn>
-                <a:cxn ang="0">
-                  <a:pos x="T22" y="T23"/>
-                </a:cxn>
-                <a:cxn ang="0">
-                  <a:pos x="T24" y="T25"/>
-                </a:cxn>
-                <a:cxn ang="0">
-                  <a:pos x="T26" y="T27"/>
-                </a:cxn>
-                <a:cxn ang="0">
-                  <a:pos x="T28" y="T29"/>
-                </a:cxn>
-                <a:cxn ang="0">
-                  <a:pos x="T30" y="T31"/>
-                </a:cxn>
-                <a:cxn ang="0">
-                  <a:pos x="T32" y="T33"/>
-                </a:cxn>
-                <a:cxn ang="0">
-                  <a:pos x="T34" y="T35"/>
-                </a:cxn>
-                <a:cxn ang="0">
-                  <a:pos x="T36" y="T37"/>
-                </a:cxn>
-                <a:cxn ang="0">
-                  <a:pos x="T38" y="T39"/>
-                </a:cxn>
-                <a:cxn ang="0">
-                  <a:pos x="T40" y="T41"/>
-                </a:cxn>
-                <a:cxn ang="0">
-                  <a:pos x="T42" y="T43"/>
-                </a:cxn>
-                <a:cxn ang="0">
-                  <a:pos x="T44" y="T45"/>
-                </a:cxn>
-                <a:cxn ang="0">
-                  <a:pos x="T46" y="T47"/>
-                </a:cxn>
-                <a:cxn ang="0">
-                  <a:pos x="T48" y="T49"/>
-                </a:cxn>
-                <a:cxn ang="0">
-                  <a:pos x="T50" y="T51"/>
-                </a:cxn>
-                <a:cxn ang="0">
-                  <a:pos x="T52" y="T53"/>
-                </a:cxn>
-                <a:cxn ang="0">
-                  <a:pos x="T54" y="T55"/>
-                </a:cxn>
-                <a:cxn ang="0">
-                  <a:pos x="T56" y="T57"/>
-                </a:cxn>
-                <a:cxn ang="0">
-                  <a:pos x="T58" y="T59"/>
-                </a:cxn>
-                <a:cxn ang="0">
-                  <a:pos x="T60" y="T61"/>
-                </a:cxn>
-                <a:cxn ang="0">
-                  <a:pos x="T62" y="T63"/>
-                </a:cxn>
-                <a:cxn ang="0">
-                  <a:pos x="T64" y="T65"/>
-                </a:cxn>
-                <a:cxn ang="0">
-                  <a:pos x="T66" y="T67"/>
-                </a:cxn>
-                <a:cxn ang="0">
-                  <a:pos x="T68" y="T69"/>
-                </a:cxn>
-                <a:cxn ang="0">
-                  <a:pos x="T70" y="T71"/>
-                </a:cxn>
-                <a:cxn ang="0">
-                  <a:pos x="T72" y="T73"/>
-                </a:cxn>
-                <a:cxn ang="0">
-                  <a:pos x="T74" y="T75"/>
-                </a:cxn>
-                <a:cxn ang="0">
-                  <a:pos x="T76" y="T77"/>
-                </a:cxn>
-                <a:cxn ang="0">
-                  <a:pos x="T78" y="T79"/>
-                </a:cxn>
-              </a:cxnLst>
-              <a:rect l="0" t="0" r="r" b="b"/>
-              <a:pathLst>
-                <a:path w="5127" h="5401">
-                  <a:moveTo>
-                    <a:pt x="3473" y="1608"/>
-                  </a:moveTo>
-                  <a:cubicBezTo>
-                    <a:pt x="3473" y="1674"/>
-                    <a:pt x="3419" y="1728"/>
-                    <a:pt x="3353" y="1728"/>
-                  </a:cubicBezTo>
-                  <a:lnTo>
-                    <a:pt x="2303" y="1728"/>
-                  </a:lnTo>
-                  <a:cubicBezTo>
-                    <a:pt x="2236" y="1728"/>
-                    <a:pt x="2183" y="1674"/>
-                    <a:pt x="2183" y="1608"/>
-                  </a:cubicBezTo>
-                  <a:cubicBezTo>
-                    <a:pt x="2183" y="1542"/>
-                    <a:pt x="2236" y="1488"/>
-                    <a:pt x="2303" y="1488"/>
-                  </a:cubicBezTo>
-                  <a:lnTo>
-                    <a:pt x="3353" y="1488"/>
-                  </a:lnTo>
-                  <a:cubicBezTo>
-                    <a:pt x="3419" y="1488"/>
-                    <a:pt x="3473" y="1542"/>
-                    <a:pt x="3473" y="1608"/>
-                  </a:cubicBezTo>
-                  <a:close/>
-                  <a:moveTo>
-                    <a:pt x="3103" y="2231"/>
-                  </a:moveTo>
-                  <a:cubicBezTo>
-                    <a:pt x="3170" y="2231"/>
-                    <a:pt x="3223" y="2178"/>
-                    <a:pt x="3223" y="2111"/>
-                  </a:cubicBezTo>
-                  <a:cubicBezTo>
-                    <a:pt x="3223" y="2045"/>
-                    <a:pt x="3170" y="1991"/>
-                    <a:pt x="3103" y="1991"/>
-                  </a:cubicBezTo>
-                  <a:lnTo>
-                    <a:pt x="2552" y="1991"/>
-                  </a:lnTo>
-                  <a:cubicBezTo>
-                    <a:pt x="2486" y="1991"/>
-                    <a:pt x="2432" y="2045"/>
-                    <a:pt x="2432" y="2111"/>
-                  </a:cubicBezTo>
-                  <a:cubicBezTo>
-                    <a:pt x="2432" y="2178"/>
-                    <a:pt x="2486" y="2231"/>
-                    <a:pt x="2552" y="2231"/>
-                  </a:cubicBezTo>
-                  <a:lnTo>
-                    <a:pt x="3103" y="2231"/>
-                  </a:lnTo>
-                  <a:close/>
-                  <a:moveTo>
-                    <a:pt x="3473" y="2768"/>
-                  </a:moveTo>
-                  <a:cubicBezTo>
-                    <a:pt x="3473" y="2701"/>
-                    <a:pt x="3419" y="2648"/>
-                    <a:pt x="3353" y="2648"/>
-                  </a:cubicBezTo>
-                  <a:lnTo>
-                    <a:pt x="2303" y="2648"/>
-                  </a:lnTo>
-                  <a:cubicBezTo>
-                    <a:pt x="2236" y="2648"/>
-                    <a:pt x="2183" y="2701"/>
-                    <a:pt x="2183" y="2768"/>
-                  </a:cubicBezTo>
-                  <a:cubicBezTo>
-                    <a:pt x="2183" y="2834"/>
-                    <a:pt x="2236" y="2888"/>
-                    <a:pt x="2303" y="2888"/>
-                  </a:cubicBezTo>
-                  <a:lnTo>
-                    <a:pt x="3353" y="2888"/>
-                  </a:lnTo>
-                  <a:cubicBezTo>
-                    <a:pt x="3419" y="2888"/>
-                    <a:pt x="3473" y="2834"/>
-                    <a:pt x="3473" y="2768"/>
-                  </a:cubicBezTo>
-                  <a:close/>
-                  <a:moveTo>
-                    <a:pt x="2552" y="3151"/>
-                  </a:moveTo>
-                  <a:cubicBezTo>
-                    <a:pt x="2486" y="3151"/>
-                    <a:pt x="2432" y="3205"/>
-                    <a:pt x="2432" y="3271"/>
-                  </a:cubicBezTo>
-                  <a:cubicBezTo>
-                    <a:pt x="2432" y="3338"/>
-                    <a:pt x="2486" y="3391"/>
-                    <a:pt x="2552" y="3391"/>
-                  </a:cubicBezTo>
-                  <a:lnTo>
-                    <a:pt x="3103" y="3391"/>
-                  </a:lnTo>
-                  <a:cubicBezTo>
-                    <a:pt x="3170" y="3391"/>
-                    <a:pt x="3223" y="3338"/>
-                    <a:pt x="3223" y="3271"/>
-                  </a:cubicBezTo>
-                  <a:cubicBezTo>
-                    <a:pt x="3223" y="3205"/>
-                    <a:pt x="3170" y="3151"/>
-                    <a:pt x="3103" y="3151"/>
-                  </a:cubicBezTo>
-                  <a:lnTo>
-                    <a:pt x="2552" y="3151"/>
-                  </a:lnTo>
-                  <a:close/>
-                  <a:moveTo>
-                    <a:pt x="4448" y="700"/>
-                  </a:moveTo>
-                  <a:lnTo>
-                    <a:pt x="4448" y="1442"/>
-                  </a:lnTo>
-                  <a:cubicBezTo>
-                    <a:pt x="4448" y="1509"/>
-                    <a:pt x="4501" y="1562"/>
-                    <a:pt x="4568" y="1562"/>
-                  </a:cubicBezTo>
-                  <a:cubicBezTo>
-                    <a:pt x="4634" y="1562"/>
-                    <a:pt x="4688" y="1509"/>
-                    <a:pt x="4688" y="1442"/>
-                  </a:cubicBezTo>
-                  <a:lnTo>
-                    <a:pt x="4688" y="700"/>
-                  </a:lnTo>
-                  <a:cubicBezTo>
-                    <a:pt x="4688" y="314"/>
-                    <a:pt x="4374" y="0"/>
-                    <a:pt x="3988" y="0"/>
-                  </a:cubicBezTo>
-                  <a:lnTo>
-                    <a:pt x="604" y="0"/>
-                  </a:lnTo>
-                  <a:cubicBezTo>
-                    <a:pt x="271" y="0"/>
-                    <a:pt x="0" y="271"/>
-                    <a:pt x="0" y="604"/>
-                  </a:cubicBezTo>
-                  <a:lnTo>
-                    <a:pt x="0" y="1672"/>
-                  </a:lnTo>
-                  <a:cubicBezTo>
-                    <a:pt x="0" y="1738"/>
-                    <a:pt x="53" y="1792"/>
-                    <a:pt x="120" y="1792"/>
-                  </a:cubicBezTo>
-                  <a:lnTo>
-                    <a:pt x="566" y="1792"/>
-                  </a:lnTo>
-                  <a:cubicBezTo>
-                    <a:pt x="632" y="1792"/>
-                    <a:pt x="686" y="1738"/>
-                    <a:pt x="686" y="1672"/>
-                  </a:cubicBezTo>
-                  <a:cubicBezTo>
-                    <a:pt x="686" y="1606"/>
-                    <a:pt x="632" y="1552"/>
-                    <a:pt x="566" y="1552"/>
-                  </a:cubicBezTo>
-                  <a:lnTo>
-                    <a:pt x="240" y="1552"/>
-                  </a:lnTo>
-                  <a:lnTo>
-                    <a:pt x="240" y="604"/>
-                  </a:lnTo>
-                  <a:cubicBezTo>
-                    <a:pt x="240" y="403"/>
-                    <a:pt x="403" y="240"/>
-                    <a:pt x="604" y="240"/>
-                  </a:cubicBezTo>
-                  <a:cubicBezTo>
-                    <a:pt x="805" y="240"/>
-                    <a:pt x="968" y="403"/>
-                    <a:pt x="968" y="604"/>
-                  </a:cubicBezTo>
-                  <a:lnTo>
-                    <a:pt x="968" y="4179"/>
-                  </a:lnTo>
-                  <a:cubicBezTo>
-                    <a:pt x="968" y="4565"/>
-                    <a:pt x="1282" y="4879"/>
-                    <a:pt x="1668" y="4879"/>
-                  </a:cubicBezTo>
-                  <a:lnTo>
-                    <a:pt x="3904" y="4879"/>
-                  </a:lnTo>
-                  <a:cubicBezTo>
-                    <a:pt x="3970" y="4879"/>
-                    <a:pt x="4024" y="4825"/>
-                    <a:pt x="4024" y="4759"/>
-                  </a:cubicBezTo>
-                  <a:cubicBezTo>
-                    <a:pt x="4024" y="4693"/>
-                    <a:pt x="3970" y="4639"/>
-                    <a:pt x="3904" y="4639"/>
-                  </a:cubicBezTo>
-                  <a:lnTo>
-                    <a:pt x="1668" y="4639"/>
-                  </a:lnTo>
-                  <a:cubicBezTo>
-                    <a:pt x="1415" y="4639"/>
-                    <a:pt x="1208" y="4433"/>
-                    <a:pt x="1208" y="4179"/>
-                  </a:cubicBezTo>
-                  <a:lnTo>
-                    <a:pt x="1208" y="604"/>
-                  </a:lnTo>
-                  <a:cubicBezTo>
-                    <a:pt x="1208" y="468"/>
-                    <a:pt x="1163" y="341"/>
-                    <a:pt x="1086" y="240"/>
-                  </a:cubicBezTo>
-                  <a:lnTo>
-                    <a:pt x="3988" y="240"/>
-                  </a:lnTo>
-                  <a:cubicBezTo>
-                    <a:pt x="4241" y="240"/>
-                    <a:pt x="4448" y="446"/>
-                    <a:pt x="4448" y="700"/>
-                  </a:cubicBezTo>
-                  <a:close/>
-                  <a:moveTo>
-                    <a:pt x="4787" y="2000"/>
-                  </a:moveTo>
-                  <a:lnTo>
-                    <a:pt x="4568" y="2000"/>
-                  </a:lnTo>
-                  <a:cubicBezTo>
-                    <a:pt x="4501" y="2000"/>
-                    <a:pt x="4448" y="2054"/>
-                    <a:pt x="4448" y="2120"/>
-                  </a:cubicBezTo>
-                  <a:cubicBezTo>
-                    <a:pt x="4448" y="2187"/>
-                    <a:pt x="4501" y="2240"/>
-                    <a:pt x="4568" y="2240"/>
-                  </a:cubicBezTo>
-                  <a:lnTo>
-                    <a:pt x="4787" y="2240"/>
-                  </a:lnTo>
-                  <a:cubicBezTo>
-                    <a:pt x="4842" y="2240"/>
-                    <a:pt x="4887" y="2285"/>
-                    <a:pt x="4887" y="2340"/>
-                  </a:cubicBezTo>
-                  <a:lnTo>
-                    <a:pt x="4887" y="3718"/>
-                  </a:lnTo>
-                  <a:cubicBezTo>
-                    <a:pt x="4887" y="3785"/>
-                    <a:pt x="4941" y="3838"/>
-                    <a:pt x="5007" y="3838"/>
-                  </a:cubicBezTo>
-                  <a:cubicBezTo>
-                    <a:pt x="5073" y="3838"/>
-                    <a:pt x="5127" y="3785"/>
-                    <a:pt x="5127" y="3718"/>
-                  </a:cubicBezTo>
-                  <a:lnTo>
-                    <a:pt x="5127" y="2340"/>
-                  </a:lnTo>
-                  <a:cubicBezTo>
-                    <a:pt x="5127" y="2153"/>
-                    <a:pt x="4975" y="2000"/>
-                    <a:pt x="4787" y="2000"/>
-                  </a:cubicBezTo>
-                  <a:close/>
-                  <a:moveTo>
-                    <a:pt x="4568" y="5139"/>
-                  </a:moveTo>
-                  <a:cubicBezTo>
-                    <a:pt x="4501" y="5139"/>
-                    <a:pt x="4448" y="5193"/>
-                    <a:pt x="4448" y="5259"/>
-                  </a:cubicBezTo>
-                  <a:lnTo>
-                    <a:pt x="4448" y="5281"/>
-                  </a:lnTo>
-                  <a:cubicBezTo>
-                    <a:pt x="4448" y="5347"/>
-                    <a:pt x="4501" y="5401"/>
-                    <a:pt x="4568" y="5401"/>
-                  </a:cubicBezTo>
-                  <a:cubicBezTo>
-                    <a:pt x="4634" y="5401"/>
-                    <a:pt x="4688" y="5347"/>
-                    <a:pt x="4688" y="5281"/>
-                  </a:cubicBezTo>
-                  <a:lnTo>
-                    <a:pt x="4688" y="5259"/>
-                  </a:lnTo>
-                  <a:cubicBezTo>
-                    <a:pt x="4688" y="5193"/>
-                    <a:pt x="4634" y="5139"/>
-                    <a:pt x="4568" y="5139"/>
-                  </a:cubicBezTo>
-                  <a:close/>
-                  <a:moveTo>
-                    <a:pt x="4568" y="2439"/>
-                  </a:moveTo>
-                  <a:cubicBezTo>
-                    <a:pt x="4501" y="2439"/>
-                    <a:pt x="4448" y="2492"/>
-                    <a:pt x="4448" y="2559"/>
-                  </a:cubicBezTo>
-                  <a:lnTo>
-                    <a:pt x="4448" y="4854"/>
-                  </a:lnTo>
-                  <a:cubicBezTo>
-                    <a:pt x="4448" y="4920"/>
-                    <a:pt x="4501" y="4974"/>
-                    <a:pt x="4568" y="4974"/>
-                  </a:cubicBezTo>
-                  <a:cubicBezTo>
-                    <a:pt x="4634" y="4974"/>
-                    <a:pt x="4688" y="4920"/>
-                    <a:pt x="4688" y="4854"/>
-                  </a:cubicBezTo>
-                  <a:lnTo>
-                    <a:pt x="4688" y="2559"/>
-                  </a:lnTo>
-                  <a:cubicBezTo>
-                    <a:pt x="4688" y="2492"/>
-                    <a:pt x="4634" y="2439"/>
-                    <a:pt x="4568" y="2439"/>
-                  </a:cubicBezTo>
-                  <a:close/>
-                </a:path>
-              </a:pathLst>
-            </a:custGeom>
-            <a:solidFill>
-              <a:schemeClr val="bg1">
-                <a:lumMod val="85000"/>
-              </a:schemeClr>
-            </a:solidFill>
-            <a:ln>
-              <a:noFill/>
-            </a:ln>
-          </p:spPr>
-          <p:txBody>
-            <a:bodyPr/>
-            <a:lstStyle/>
-            <a:p>
-              <a:endParaRPr lang="zh-CN" altLang="en-US">
-                <a:cs typeface="+mn-ea"/>
-                <a:sym typeface="+mn-lt"/>
-              </a:endParaRPr>
-            </a:p>
-          </p:txBody>
-        </p:sp>
-      </p:grpSp>
-      <p:sp>
-        <p:nvSpPr>
-          <p:cNvPr id="5" name="矩形 4"/>
-          <p:cNvSpPr/>
-          <p:nvPr/>
-        </p:nvSpPr>
-        <p:spPr>
-          <a:xfrm>
-            <a:off x="3685002" y="2413338"/>
-            <a:ext cx="6096000" cy="2031325"/>
-          </a:xfrm>
-          <a:prstGeom prst="rect">
-            <a:avLst/>
-          </a:prstGeom>
-        </p:spPr>
-        <p:txBody>
-          <a:bodyPr>
-            <a:spAutoFit/>
-          </a:bodyPr>
-          <a:lstStyle/>
-          <a:p>
-            <a:r>
-              <a:rPr lang="en-US" altLang="zh-CN" dirty="0"/>
-              <a:t>1</a:t>
-            </a:r>
-            <a:r>
-              <a:rPr lang="zh-CN" altLang="en-US" dirty="0"/>
-              <a:t>、路由离开三维服务，重新进入会报错</a:t>
-            </a:r>
-            <a:r>
-              <a:rPr lang="zh-CN" altLang="en-US" dirty="0" smtClean="0"/>
-              <a:t>，</a:t>
-            </a:r>
-            <a:r>
-              <a:rPr lang="zh-CN" altLang="en-US" dirty="0" smtClean="0"/>
-              <a:t>不断切换</a:t>
-            </a:r>
-            <a:r>
-              <a:rPr lang="zh-CN" altLang="en-US" dirty="0" smtClean="0"/>
-              <a:t>内存会不断</a:t>
-            </a:r>
-            <a:r>
-              <a:rPr lang="zh-CN" altLang="en-US" dirty="0"/>
-              <a:t>上升直至崩溃</a:t>
-            </a:r>
-            <a:endParaRPr lang="en-US" altLang="zh-CN" dirty="0"/>
-          </a:p>
-          <a:p>
-            <a:r>
-              <a:rPr lang="zh-CN" altLang="en-US" dirty="0" smtClean="0"/>
-              <a:t>解决</a:t>
-            </a:r>
-            <a:r>
-              <a:rPr lang="zh-CN" altLang="en-US" dirty="0"/>
-              <a:t>方法：</a:t>
-            </a:r>
-            <a:r>
-              <a:rPr lang="en-US" altLang="zh-CN" dirty="0" err="1"/>
-              <a:t>unityInstance.Quit</a:t>
-            </a:r>
-            <a:r>
-              <a:rPr lang="en-US" altLang="zh-CN" dirty="0"/>
-              <a:t>(callback)</a:t>
-            </a:r>
-            <a:r>
-              <a:rPr lang="zh-CN" altLang="en-US" dirty="0"/>
-              <a:t>，已经在容器组件中调用，业务组件无需任何处理。</a:t>
-            </a:r>
-            <a:endParaRPr lang="en-US" altLang="zh-CN" dirty="0"/>
-          </a:p>
-          <a:p>
-            <a:r>
-              <a:rPr lang="en-US" altLang="zh-CN" dirty="0"/>
-              <a:t>2</a:t>
-            </a:r>
-            <a:r>
-              <a:rPr lang="zh-CN" altLang="en-US" dirty="0"/>
-              <a:t>、三维容器的弹性布局问题，只提供了固定大小布局</a:t>
-            </a:r>
-            <a:endParaRPr lang="en-US" altLang="zh-CN" dirty="0"/>
-          </a:p>
-          <a:p>
-            <a:r>
-              <a:rPr lang="zh-CN" altLang="en-US" dirty="0"/>
-              <a:t>解决方法：容器组件监听宽高动态改变</a:t>
-            </a:r>
-            <a:r>
-              <a:rPr lang="en-US" altLang="zh-CN" dirty="0"/>
-              <a:t>canvas</a:t>
-            </a:r>
-            <a:r>
-              <a:rPr lang="zh-CN" altLang="en-US" dirty="0"/>
-              <a:t>标签的宽和高，外部监听窗口变化实时改变宽高就</a:t>
-            </a:r>
-            <a:r>
-              <a:rPr lang="zh-CN" altLang="en-US" dirty="0" smtClean="0"/>
-              <a:t>行。</a:t>
-            </a:r>
-            <a:endParaRPr lang="zh-CN" altLang="en-US" dirty="0"/>
-          </a:p>
-        </p:txBody>
-      </p:sp>
-    </p:spTree>
-    <p:extLst>
-      <p:ext uri="{BB962C8B-B14F-4D97-AF65-F5344CB8AC3E}">
-        <p14:creationId xmlns:p14="http://schemas.microsoft.com/office/powerpoint/2010/main" val="2341500656"/>
-      </p:ext>
-    </p:extLst>
-  </p:cSld>
-  <p:clrMapOvr>
-    <a:masterClrMapping/>
-  </p:clrMapOvr>
-  <mc:AlternateContent xmlns:mc="http://schemas.openxmlformats.org/markup-compatibility/2006" xmlns:p14="http://schemas.microsoft.com/office/powerpoint/2010/main">
-    <mc:Choice Requires="p14">
-      <p:transition spd="med" p14:dur="700">
-        <p:fade/>
-      </p:transition>
-    </mc:Choice>
-    <mc:Fallback xmlns="">
-      <p:transition spd="med">
-        <p:fade/>
-      </p:transition>
-    </mc:Fallback>
-  </mc:AlternateContent>
-  <p:timing>
-    <p:tnLst>
-      <p:par>
-        <p:cTn id="1" dur="indefinite" restart="never" nodeType="tmRoot"/>
-      </p:par>
-    </p:tnLst>
-  </p:timing>
 </p:sld>
 </file>
 
@@ -14270,6 +13497,1100 @@
 </file>
 
 <file path=ppt/slides/slide20.xml><?xml version="1.0" encoding="utf-8"?>
+<p:sld xmlns:a="http://schemas.openxmlformats.org/drawingml/2006/main" xmlns:r="http://schemas.openxmlformats.org/officeDocument/2006/relationships" xmlns:p="http://schemas.openxmlformats.org/presentationml/2006/main">
+  <p:cSld>
+    <p:spTree>
+      <p:nvGrpSpPr>
+        <p:cNvPr id="1" name=""/>
+        <p:cNvGrpSpPr/>
+        <p:nvPr/>
+      </p:nvGrpSpPr>
+      <p:grpSpPr>
+        <a:xfrm>
+          <a:off x="0" y="0"/>
+          <a:ext cx="0" cy="0"/>
+          <a:chOff x="0" y="0"/>
+          <a:chExt cx="0" cy="0"/>
+        </a:xfrm>
+      </p:grpSpPr>
+      <p:sp>
+        <p:nvSpPr>
+          <p:cNvPr id="3" name="标题 2"/>
+          <p:cNvSpPr>
+            <a:spLocks noGrp="1"/>
+          </p:cNvSpPr>
+          <p:nvPr>
+            <p:ph type="title"/>
+          </p:nvPr>
+        </p:nvSpPr>
+        <p:spPr/>
+        <p:txBody>
+          <a:bodyPr/>
+          <a:lstStyle/>
+          <a:p>
+            <a:r>
+              <a:rPr lang="zh-CN" altLang="en-US" dirty="0" smtClean="0"/>
+              <a:t>问题和解决</a:t>
+            </a:r>
+            <a:endParaRPr lang="zh-CN" altLang="en-US" dirty="0"/>
+          </a:p>
+        </p:txBody>
+      </p:sp>
+      <p:pic>
+        <p:nvPicPr>
+          <p:cNvPr id="103" name="图片 102"/>
+          <p:cNvPicPr>
+            <a:picLocks noChangeAspect="1"/>
+          </p:cNvPicPr>
+          <p:nvPr/>
+        </p:nvPicPr>
+        <p:blipFill>
+          <a:blip r:embed="rId4" cstate="print">
+            <a:extLst>
+              <a:ext uri="{28A0092B-C50C-407E-A947-70E740481C1C}">
+                <a14:useLocalDpi xmlns:a14="http://schemas.microsoft.com/office/drawing/2010/main" val="0"/>
+              </a:ext>
+            </a:extLst>
+          </a:blip>
+          <a:stretch>
+            <a:fillRect/>
+          </a:stretch>
+        </p:blipFill>
+        <p:spPr>
+          <a:xfrm>
+            <a:off x="9456374" y="337205"/>
+            <a:ext cx="2422630" cy="342895"/>
+          </a:xfrm>
+          <a:prstGeom prst="rect">
+            <a:avLst/>
+          </a:prstGeom>
+        </p:spPr>
+      </p:pic>
+      <p:grpSp>
+        <p:nvGrpSpPr>
+          <p:cNvPr id="6" name="组合 5">
+            <a:extLst>
+              <a:ext uri="{FF2B5EF4-FFF2-40B4-BE49-F238E27FC236}">
+                <a16:creationId xmlns:a16="http://schemas.microsoft.com/office/drawing/2014/main" id="{C0498D3A-B738-48EC-A39C-94C58B88932B}"/>
+              </a:ext>
+            </a:extLst>
+          </p:cNvPr>
+          <p:cNvGrpSpPr/>
+          <p:nvPr/>
+        </p:nvGrpSpPr>
+        <p:grpSpPr>
+          <a:xfrm>
+            <a:off x="757282" y="1700808"/>
+            <a:ext cx="10763205" cy="4083608"/>
+            <a:chOff x="757282" y="1700808"/>
+            <a:chExt cx="10763205" cy="4083608"/>
+          </a:xfrm>
+        </p:grpSpPr>
+        <p:grpSp>
+          <p:nvGrpSpPr>
+            <p:cNvPr id="7" name="2b751056-6b97-492c-b763-340acee7e99d" descr="本素材由iSlide™ 提供&#10;iSlide™尊重知识产权并注重保护用户享有的各项权利。郑重提醒您：&#10;iSlide™插件中提供的任何信息内容的所有权、知识产权归其原始权利人或权利受让人所有，您免费/购买获得的是信息内容的使用权，并受下述条款的约束；&#10;1. 您仅可以个人非商业用途使用该等信息内容，不可将信息内容的全部或部分用于出售，或以出租、出借、转让、分销、发布等其他任何方式供他人使用；&#10;2. 禁止在接入互联网或移动互联网的任何网站、平台、应用或程序上以任何方式为他人提供iSlide™插件资源内容的下载。&#10;The resource is supplied by iSlide™.&#10;iSlide™ respects all intellectual property rights and protects all the rights its users acquired.Solemnly remind you:&#10;The ownership and intellectual property of the resources supplied in iSlide Add-in belongs to its owner or the assignee of this ownership.you only acquired the usage of the resources supplied in iSlide Add-in, as well as respected the following restrain terms:&#10;1.You are only allowed to use such resource for personal and non-commercial aim, not allowed to use such resource or part of it for the sale; or rent, lend, transfer to others; or distribution or release it in any way.&#10;2.You are not permitted to provide the resource of iSlide Add-in in any website, platform, application access to the Internet or mobile Internet." title="iSlide™ 版权声明  COPYRIGHT NOTICE">
+              <a:extLst>
+                <a:ext uri="{FF2B5EF4-FFF2-40B4-BE49-F238E27FC236}">
+                  <a16:creationId xmlns:a16="http://schemas.microsoft.com/office/drawing/2014/main" id="{A759C196-DA28-4241-ABB5-975367026FE9}"/>
+                </a:ext>
+              </a:extLst>
+            </p:cNvPr>
+            <p:cNvGrpSpPr>
+              <a:grpSpLocks noChangeAspect="1"/>
+            </p:cNvGrpSpPr>
+            <p:nvPr>
+              <p:custDataLst>
+                <p:tags r:id="rId1"/>
+              </p:custDataLst>
+            </p:nvPr>
+          </p:nvGrpSpPr>
+          <p:grpSpPr>
+            <a:xfrm>
+              <a:off x="757282" y="1700808"/>
+              <a:ext cx="10763205" cy="4083608"/>
+              <a:chOff x="1175743" y="1700808"/>
+              <a:chExt cx="10344744" cy="4083608"/>
+            </a:xfrm>
+          </p:grpSpPr>
+          <p:sp>
+            <p:nvSpPr>
+              <p:cNvPr id="9" name="iṡľïḑè">
+                <a:extLst>
+                  <a:ext uri="{FF2B5EF4-FFF2-40B4-BE49-F238E27FC236}">
+                    <a16:creationId xmlns:a16="http://schemas.microsoft.com/office/drawing/2014/main" id="{48F70259-7598-4270-874A-6F50772D10F6}"/>
+                  </a:ext>
+                </a:extLst>
+              </p:cNvPr>
+              <p:cNvSpPr txBox="1"/>
+              <p:nvPr/>
+            </p:nvSpPr>
+            <p:spPr bwMode="auto">
+              <a:xfrm>
+                <a:off x="3822192" y="1780800"/>
+                <a:ext cx="7698295" cy="4003616"/>
+              </a:xfrm>
+              <a:prstGeom prst="rect">
+                <a:avLst/>
+              </a:prstGeom>
+              <a:noFill/>
+            </p:spPr>
+            <p:txBody>
+              <a:bodyPr wrap="square" tIns="0" anchor="t">
+                <a:noAutofit/>
+              </a:bodyPr>
+              <a:lstStyle>
+                <a:defPPr>
+                  <a:defRPr lang="zh-CN"/>
+                </a:defPPr>
+                <a:lvl1pPr>
+                  <a:defRPr sz="1600" b="1">
+                    <a:latin typeface="Arial" panose="020B0604020202020204" pitchFamily="34" charset="0"/>
+                    <a:ea typeface="微软雅黑" panose="020B0503020204020204" pitchFamily="34" charset="-122"/>
+                    <a:cs typeface="+mn-ea"/>
+                  </a:defRPr>
+                </a:lvl1pPr>
+                <a:lvl2pPr marL="742950" indent="-285750">
+                  <a:defRPr sz="3200" b="1">
+                    <a:solidFill>
+                      <a:srgbClr val="4D4D4D"/>
+                    </a:solidFill>
+                    <a:latin typeface="Arial" panose="020B0604020202020204" pitchFamily="34" charset="0"/>
+                    <a:ea typeface="黑体" panose="02010609060101010101" pitchFamily="49" charset="-122"/>
+                  </a:defRPr>
+                </a:lvl2pPr>
+                <a:lvl3pPr marL="1143000" indent="-228600">
+                  <a:defRPr sz="3200" b="1">
+                    <a:solidFill>
+                      <a:srgbClr val="4D4D4D"/>
+                    </a:solidFill>
+                    <a:latin typeface="Arial" panose="020B0604020202020204" pitchFamily="34" charset="0"/>
+                    <a:ea typeface="黑体" panose="02010609060101010101" pitchFamily="49" charset="-122"/>
+                  </a:defRPr>
+                </a:lvl3pPr>
+                <a:lvl4pPr marL="1600200" indent="-228600">
+                  <a:defRPr sz="3200" b="1">
+                    <a:solidFill>
+                      <a:srgbClr val="4D4D4D"/>
+                    </a:solidFill>
+                    <a:latin typeface="Arial" panose="020B0604020202020204" pitchFamily="34" charset="0"/>
+                    <a:ea typeface="黑体" panose="02010609060101010101" pitchFamily="49" charset="-122"/>
+                  </a:defRPr>
+                </a:lvl4pPr>
+                <a:lvl5pPr marL="2057400" indent="-228600">
+                  <a:defRPr sz="3200" b="1">
+                    <a:solidFill>
+                      <a:srgbClr val="4D4D4D"/>
+                    </a:solidFill>
+                    <a:latin typeface="Arial" panose="020B0604020202020204" pitchFamily="34" charset="0"/>
+                    <a:ea typeface="黑体" panose="02010609060101010101" pitchFamily="49" charset="-122"/>
+                  </a:defRPr>
+                </a:lvl5pPr>
+                <a:lvl6pPr marL="2514600" indent="-228600" eaLnBrk="0" fontAlgn="base" hangingPunct="0">
+                  <a:spcBef>
+                    <a:spcPct val="0"/>
+                  </a:spcBef>
+                  <a:spcAft>
+                    <a:spcPct val="0"/>
+                  </a:spcAft>
+                  <a:defRPr sz="3200" b="1">
+                    <a:solidFill>
+                      <a:srgbClr val="4D4D4D"/>
+                    </a:solidFill>
+                    <a:latin typeface="Arial" panose="020B0604020202020204" pitchFamily="34" charset="0"/>
+                    <a:ea typeface="黑体" panose="02010609060101010101" pitchFamily="49" charset="-122"/>
+                  </a:defRPr>
+                </a:lvl6pPr>
+                <a:lvl7pPr marL="2971800" indent="-228600" eaLnBrk="0" fontAlgn="base" hangingPunct="0">
+                  <a:spcBef>
+                    <a:spcPct val="0"/>
+                  </a:spcBef>
+                  <a:spcAft>
+                    <a:spcPct val="0"/>
+                  </a:spcAft>
+                  <a:defRPr sz="3200" b="1">
+                    <a:solidFill>
+                      <a:srgbClr val="4D4D4D"/>
+                    </a:solidFill>
+                    <a:latin typeface="Arial" panose="020B0604020202020204" pitchFamily="34" charset="0"/>
+                    <a:ea typeface="黑体" panose="02010609060101010101" pitchFamily="49" charset="-122"/>
+                  </a:defRPr>
+                </a:lvl7pPr>
+                <a:lvl8pPr marL="3429000" indent="-228600" eaLnBrk="0" fontAlgn="base" hangingPunct="0">
+                  <a:spcBef>
+                    <a:spcPct val="0"/>
+                  </a:spcBef>
+                  <a:spcAft>
+                    <a:spcPct val="0"/>
+                  </a:spcAft>
+                  <a:defRPr sz="3200" b="1">
+                    <a:solidFill>
+                      <a:srgbClr val="4D4D4D"/>
+                    </a:solidFill>
+                    <a:latin typeface="Arial" panose="020B0604020202020204" pitchFamily="34" charset="0"/>
+                    <a:ea typeface="黑体" panose="02010609060101010101" pitchFamily="49" charset="-122"/>
+                  </a:defRPr>
+                </a:lvl8pPr>
+                <a:lvl9pPr marL="3886200" indent="-228600" eaLnBrk="0" fontAlgn="base" hangingPunct="0">
+                  <a:spcBef>
+                    <a:spcPct val="0"/>
+                  </a:spcBef>
+                  <a:spcAft>
+                    <a:spcPct val="0"/>
+                  </a:spcAft>
+                  <a:defRPr sz="3200" b="1">
+                    <a:solidFill>
+                      <a:srgbClr val="4D4D4D"/>
+                    </a:solidFill>
+                    <a:latin typeface="Arial" panose="020B0604020202020204" pitchFamily="34" charset="0"/>
+                    <a:ea typeface="黑体" panose="02010609060101010101" pitchFamily="49" charset="-122"/>
+                  </a:defRPr>
+                </a:lvl9pPr>
+              </a:lstStyle>
+              <a:p>
+                <a:pPr>
+                  <a:lnSpc>
+                    <a:spcPct val="150000"/>
+                  </a:lnSpc>
+                </a:pPr>
+                <a:endParaRPr lang="en-US" altLang="zh-CN" b="0" dirty="0" smtClean="0">
+                  <a:latin typeface="+mn-lt"/>
+                  <a:ea typeface="+mn-ea"/>
+                  <a:sym typeface="+mn-lt"/>
+                </a:endParaRPr>
+              </a:p>
+              <a:p>
+                <a:pPr marL="342900" indent="-342900">
+                  <a:lnSpc>
+                    <a:spcPct val="150000"/>
+                  </a:lnSpc>
+                  <a:buFont typeface="+mj-lt"/>
+                  <a:buAutoNum type="arabicPeriod"/>
+                </a:pPr>
+                <a:endParaRPr lang="en-US" altLang="zh-CN" b="0" dirty="0">
+                  <a:latin typeface="+mn-lt"/>
+                  <a:ea typeface="+mn-ea"/>
+                  <a:sym typeface="+mn-lt"/>
+                </a:endParaRPr>
+              </a:p>
+              <a:p>
+                <a:pPr>
+                  <a:lnSpc>
+                    <a:spcPct val="150000"/>
+                  </a:lnSpc>
+                </a:pPr>
+                <a:endParaRPr lang="en-US" altLang="zh-CN" b="0" dirty="0">
+                  <a:latin typeface="+mn-lt"/>
+                  <a:ea typeface="+mn-ea"/>
+                  <a:sym typeface="+mn-lt"/>
+                </a:endParaRPr>
+              </a:p>
+            </p:txBody>
+          </p:sp>
+          <p:cxnSp>
+            <p:nvCxnSpPr>
+              <p:cNvPr id="10" name="直接连接符 9">
+                <a:extLst>
+                  <a:ext uri="{FF2B5EF4-FFF2-40B4-BE49-F238E27FC236}">
+                    <a16:creationId xmlns:a16="http://schemas.microsoft.com/office/drawing/2014/main" id="{DA1FB18E-FA01-4588-BEF9-FB96A98A84D4}"/>
+                  </a:ext>
+                </a:extLst>
+              </p:cNvPr>
+              <p:cNvCxnSpPr>
+                <a:cxnSpLocks/>
+              </p:cNvCxnSpPr>
+              <p:nvPr/>
+            </p:nvCxnSpPr>
+            <p:spPr>
+              <a:xfrm>
+                <a:off x="3696888" y="1780800"/>
+                <a:ext cx="0" cy="4003616"/>
+              </a:xfrm>
+              <a:prstGeom prst="line">
+                <a:avLst/>
+              </a:prstGeom>
+              <a:solidFill>
+                <a:srgbClr val="FFCC00"/>
+              </a:solidFill>
+              <a:ln w="3175" cap="flat" cmpd="sng" algn="ctr">
+                <a:solidFill>
+                  <a:schemeClr val="bg1">
+                    <a:lumMod val="75000"/>
+                  </a:schemeClr>
+                </a:solidFill>
+                <a:prstDash val="solid"/>
+                <a:round/>
+                <a:headEnd type="none" w="med" len="med"/>
+                <a:tailEnd type="none" w="med" len="med"/>
+              </a:ln>
+              <a:effectLst/>
+            </p:spPr>
+          </p:cxnSp>
+          <p:sp>
+            <p:nvSpPr>
+              <p:cNvPr id="11" name="išľïḋé">
+                <a:extLst>
+                  <a:ext uri="{FF2B5EF4-FFF2-40B4-BE49-F238E27FC236}">
+                    <a16:creationId xmlns:a16="http://schemas.microsoft.com/office/drawing/2014/main" id="{0DB1D0A1-2667-455C-9387-D7ABF0A00B8C}"/>
+                  </a:ext>
+                </a:extLst>
+              </p:cNvPr>
+              <p:cNvSpPr txBox="1"/>
+              <p:nvPr/>
+            </p:nvSpPr>
+            <p:spPr>
+              <a:xfrm>
+                <a:off x="1175743" y="1700808"/>
+                <a:ext cx="2521108" cy="523220"/>
+              </a:xfrm>
+              <a:prstGeom prst="rect">
+                <a:avLst/>
+              </a:prstGeom>
+              <a:solidFill>
+                <a:schemeClr val="bg1"/>
+              </a:solidFill>
+            </p:spPr>
+            <p:txBody>
+              <a:bodyPr wrap="square" rtlCol="0">
+                <a:spAutoFit/>
+              </a:bodyPr>
+              <a:lstStyle/>
+              <a:p>
+                <a:pPr algn="r"/>
+                <a:r>
+                  <a:rPr lang="tr-TR" sz="2800" b="1" dirty="0">
+                    <a:solidFill>
+                      <a:schemeClr val="accent1"/>
+                    </a:solidFill>
+                    <a:cs typeface="+mn-ea"/>
+                    <a:sym typeface="+mn-lt"/>
+                  </a:rPr>
+                  <a:t>CONTENTS</a:t>
+                </a:r>
+              </a:p>
+            </p:txBody>
+          </p:sp>
+        </p:grpSp>
+        <p:sp>
+          <p:nvSpPr>
+            <p:cNvPr id="8" name="poetry_91022">
+              <a:extLst>
+                <a:ext uri="{FF2B5EF4-FFF2-40B4-BE49-F238E27FC236}">
+                  <a16:creationId xmlns:a16="http://schemas.microsoft.com/office/drawing/2014/main" id="{ADAD6BE3-DC11-4582-9F68-50D831ADD001}"/>
+                </a:ext>
+              </a:extLst>
+            </p:cNvPr>
+            <p:cNvSpPr>
+              <a:spLocks noChangeAspect="1"/>
+            </p:cNvSpPr>
+            <p:nvPr/>
+          </p:nvSpPr>
+          <p:spPr bwMode="auto">
+            <a:xfrm>
+              <a:off x="2379533" y="4867348"/>
+              <a:ext cx="870506" cy="915667"/>
+            </a:xfrm>
+            <a:custGeom>
+              <a:avLst/>
+              <a:gdLst>
+                <a:gd name="T0" fmla="*/ 3353 w 5127"/>
+                <a:gd name="T1" fmla="*/ 1728 h 5401"/>
+                <a:gd name="T2" fmla="*/ 2183 w 5127"/>
+                <a:gd name="T3" fmla="*/ 1608 h 5401"/>
+                <a:gd name="T4" fmla="*/ 3353 w 5127"/>
+                <a:gd name="T5" fmla="*/ 1488 h 5401"/>
+                <a:gd name="T6" fmla="*/ 3103 w 5127"/>
+                <a:gd name="T7" fmla="*/ 2231 h 5401"/>
+                <a:gd name="T8" fmla="*/ 3103 w 5127"/>
+                <a:gd name="T9" fmla="*/ 1991 h 5401"/>
+                <a:gd name="T10" fmla="*/ 2432 w 5127"/>
+                <a:gd name="T11" fmla="*/ 2111 h 5401"/>
+                <a:gd name="T12" fmla="*/ 3103 w 5127"/>
+                <a:gd name="T13" fmla="*/ 2231 h 5401"/>
+                <a:gd name="T14" fmla="*/ 3353 w 5127"/>
+                <a:gd name="T15" fmla="*/ 2648 h 5401"/>
+                <a:gd name="T16" fmla="*/ 2183 w 5127"/>
+                <a:gd name="T17" fmla="*/ 2768 h 5401"/>
+                <a:gd name="T18" fmla="*/ 3353 w 5127"/>
+                <a:gd name="T19" fmla="*/ 2888 h 5401"/>
+                <a:gd name="T20" fmla="*/ 2552 w 5127"/>
+                <a:gd name="T21" fmla="*/ 3151 h 5401"/>
+                <a:gd name="T22" fmla="*/ 2552 w 5127"/>
+                <a:gd name="T23" fmla="*/ 3391 h 5401"/>
+                <a:gd name="T24" fmla="*/ 3223 w 5127"/>
+                <a:gd name="T25" fmla="*/ 3271 h 5401"/>
+                <a:gd name="T26" fmla="*/ 2552 w 5127"/>
+                <a:gd name="T27" fmla="*/ 3151 h 5401"/>
+                <a:gd name="T28" fmla="*/ 4448 w 5127"/>
+                <a:gd name="T29" fmla="*/ 1442 h 5401"/>
+                <a:gd name="T30" fmla="*/ 4688 w 5127"/>
+                <a:gd name="T31" fmla="*/ 1442 h 5401"/>
+                <a:gd name="T32" fmla="*/ 3988 w 5127"/>
+                <a:gd name="T33" fmla="*/ 0 h 5401"/>
+                <a:gd name="T34" fmla="*/ 0 w 5127"/>
+                <a:gd name="T35" fmla="*/ 604 h 5401"/>
+                <a:gd name="T36" fmla="*/ 120 w 5127"/>
+                <a:gd name="T37" fmla="*/ 1792 h 5401"/>
+                <a:gd name="T38" fmla="*/ 686 w 5127"/>
+                <a:gd name="T39" fmla="*/ 1672 h 5401"/>
+                <a:gd name="T40" fmla="*/ 240 w 5127"/>
+                <a:gd name="T41" fmla="*/ 1552 h 5401"/>
+                <a:gd name="T42" fmla="*/ 604 w 5127"/>
+                <a:gd name="T43" fmla="*/ 240 h 5401"/>
+                <a:gd name="T44" fmla="*/ 968 w 5127"/>
+                <a:gd name="T45" fmla="*/ 4179 h 5401"/>
+                <a:gd name="T46" fmla="*/ 3904 w 5127"/>
+                <a:gd name="T47" fmla="*/ 4879 h 5401"/>
+                <a:gd name="T48" fmla="*/ 3904 w 5127"/>
+                <a:gd name="T49" fmla="*/ 4639 h 5401"/>
+                <a:gd name="T50" fmla="*/ 1208 w 5127"/>
+                <a:gd name="T51" fmla="*/ 4179 h 5401"/>
+                <a:gd name="T52" fmla="*/ 1086 w 5127"/>
+                <a:gd name="T53" fmla="*/ 240 h 5401"/>
+                <a:gd name="T54" fmla="*/ 4448 w 5127"/>
+                <a:gd name="T55" fmla="*/ 700 h 5401"/>
+                <a:gd name="T56" fmla="*/ 4568 w 5127"/>
+                <a:gd name="T57" fmla="*/ 2000 h 5401"/>
+                <a:gd name="T58" fmla="*/ 4568 w 5127"/>
+                <a:gd name="T59" fmla="*/ 2240 h 5401"/>
+                <a:gd name="T60" fmla="*/ 4887 w 5127"/>
+                <a:gd name="T61" fmla="*/ 2340 h 5401"/>
+                <a:gd name="T62" fmla="*/ 5007 w 5127"/>
+                <a:gd name="T63" fmla="*/ 3838 h 5401"/>
+                <a:gd name="T64" fmla="*/ 5127 w 5127"/>
+                <a:gd name="T65" fmla="*/ 2340 h 5401"/>
+                <a:gd name="T66" fmla="*/ 4568 w 5127"/>
+                <a:gd name="T67" fmla="*/ 5139 h 5401"/>
+                <a:gd name="T68" fmla="*/ 4448 w 5127"/>
+                <a:gd name="T69" fmla="*/ 5281 h 5401"/>
+                <a:gd name="T70" fmla="*/ 4688 w 5127"/>
+                <a:gd name="T71" fmla="*/ 5281 h 5401"/>
+                <a:gd name="T72" fmla="*/ 4568 w 5127"/>
+                <a:gd name="T73" fmla="*/ 5139 h 5401"/>
+                <a:gd name="T74" fmla="*/ 4448 w 5127"/>
+                <a:gd name="T75" fmla="*/ 2559 h 5401"/>
+                <a:gd name="T76" fmla="*/ 4568 w 5127"/>
+                <a:gd name="T77" fmla="*/ 4974 h 5401"/>
+                <a:gd name="T78" fmla="*/ 4688 w 5127"/>
+                <a:gd name="T79" fmla="*/ 2559 h 5401"/>
+              </a:gdLst>
+              <a:ahLst/>
+              <a:cxnLst>
+                <a:cxn ang="0">
+                  <a:pos x="T0" y="T1"/>
+                </a:cxn>
+                <a:cxn ang="0">
+                  <a:pos x="T2" y="T3"/>
+                </a:cxn>
+                <a:cxn ang="0">
+                  <a:pos x="T4" y="T5"/>
+                </a:cxn>
+                <a:cxn ang="0">
+                  <a:pos x="T6" y="T7"/>
+                </a:cxn>
+                <a:cxn ang="0">
+                  <a:pos x="T8" y="T9"/>
+                </a:cxn>
+                <a:cxn ang="0">
+                  <a:pos x="T10" y="T11"/>
+                </a:cxn>
+                <a:cxn ang="0">
+                  <a:pos x="T12" y="T13"/>
+                </a:cxn>
+                <a:cxn ang="0">
+                  <a:pos x="T14" y="T15"/>
+                </a:cxn>
+                <a:cxn ang="0">
+                  <a:pos x="T16" y="T17"/>
+                </a:cxn>
+                <a:cxn ang="0">
+                  <a:pos x="T18" y="T19"/>
+                </a:cxn>
+                <a:cxn ang="0">
+                  <a:pos x="T20" y="T21"/>
+                </a:cxn>
+                <a:cxn ang="0">
+                  <a:pos x="T22" y="T23"/>
+                </a:cxn>
+                <a:cxn ang="0">
+                  <a:pos x="T24" y="T25"/>
+                </a:cxn>
+                <a:cxn ang="0">
+                  <a:pos x="T26" y="T27"/>
+                </a:cxn>
+                <a:cxn ang="0">
+                  <a:pos x="T28" y="T29"/>
+                </a:cxn>
+                <a:cxn ang="0">
+                  <a:pos x="T30" y="T31"/>
+                </a:cxn>
+                <a:cxn ang="0">
+                  <a:pos x="T32" y="T33"/>
+                </a:cxn>
+                <a:cxn ang="0">
+                  <a:pos x="T34" y="T35"/>
+                </a:cxn>
+                <a:cxn ang="0">
+                  <a:pos x="T36" y="T37"/>
+                </a:cxn>
+                <a:cxn ang="0">
+                  <a:pos x="T38" y="T39"/>
+                </a:cxn>
+                <a:cxn ang="0">
+                  <a:pos x="T40" y="T41"/>
+                </a:cxn>
+                <a:cxn ang="0">
+                  <a:pos x="T42" y="T43"/>
+                </a:cxn>
+                <a:cxn ang="0">
+                  <a:pos x="T44" y="T45"/>
+                </a:cxn>
+                <a:cxn ang="0">
+                  <a:pos x="T46" y="T47"/>
+                </a:cxn>
+                <a:cxn ang="0">
+                  <a:pos x="T48" y="T49"/>
+                </a:cxn>
+                <a:cxn ang="0">
+                  <a:pos x="T50" y="T51"/>
+                </a:cxn>
+                <a:cxn ang="0">
+                  <a:pos x="T52" y="T53"/>
+                </a:cxn>
+                <a:cxn ang="0">
+                  <a:pos x="T54" y="T55"/>
+                </a:cxn>
+                <a:cxn ang="0">
+                  <a:pos x="T56" y="T57"/>
+                </a:cxn>
+                <a:cxn ang="0">
+                  <a:pos x="T58" y="T59"/>
+                </a:cxn>
+                <a:cxn ang="0">
+                  <a:pos x="T60" y="T61"/>
+                </a:cxn>
+                <a:cxn ang="0">
+                  <a:pos x="T62" y="T63"/>
+                </a:cxn>
+                <a:cxn ang="0">
+                  <a:pos x="T64" y="T65"/>
+                </a:cxn>
+                <a:cxn ang="0">
+                  <a:pos x="T66" y="T67"/>
+                </a:cxn>
+                <a:cxn ang="0">
+                  <a:pos x="T68" y="T69"/>
+                </a:cxn>
+                <a:cxn ang="0">
+                  <a:pos x="T70" y="T71"/>
+                </a:cxn>
+                <a:cxn ang="0">
+                  <a:pos x="T72" y="T73"/>
+                </a:cxn>
+                <a:cxn ang="0">
+                  <a:pos x="T74" y="T75"/>
+                </a:cxn>
+                <a:cxn ang="0">
+                  <a:pos x="T76" y="T77"/>
+                </a:cxn>
+                <a:cxn ang="0">
+                  <a:pos x="T78" y="T79"/>
+                </a:cxn>
+              </a:cxnLst>
+              <a:rect l="0" t="0" r="r" b="b"/>
+              <a:pathLst>
+                <a:path w="5127" h="5401">
+                  <a:moveTo>
+                    <a:pt x="3473" y="1608"/>
+                  </a:moveTo>
+                  <a:cubicBezTo>
+                    <a:pt x="3473" y="1674"/>
+                    <a:pt x="3419" y="1728"/>
+                    <a:pt x="3353" y="1728"/>
+                  </a:cubicBezTo>
+                  <a:lnTo>
+                    <a:pt x="2303" y="1728"/>
+                  </a:lnTo>
+                  <a:cubicBezTo>
+                    <a:pt x="2236" y="1728"/>
+                    <a:pt x="2183" y="1674"/>
+                    <a:pt x="2183" y="1608"/>
+                  </a:cubicBezTo>
+                  <a:cubicBezTo>
+                    <a:pt x="2183" y="1542"/>
+                    <a:pt x="2236" y="1488"/>
+                    <a:pt x="2303" y="1488"/>
+                  </a:cubicBezTo>
+                  <a:lnTo>
+                    <a:pt x="3353" y="1488"/>
+                  </a:lnTo>
+                  <a:cubicBezTo>
+                    <a:pt x="3419" y="1488"/>
+                    <a:pt x="3473" y="1542"/>
+                    <a:pt x="3473" y="1608"/>
+                  </a:cubicBezTo>
+                  <a:close/>
+                  <a:moveTo>
+                    <a:pt x="3103" y="2231"/>
+                  </a:moveTo>
+                  <a:cubicBezTo>
+                    <a:pt x="3170" y="2231"/>
+                    <a:pt x="3223" y="2178"/>
+                    <a:pt x="3223" y="2111"/>
+                  </a:cubicBezTo>
+                  <a:cubicBezTo>
+                    <a:pt x="3223" y="2045"/>
+                    <a:pt x="3170" y="1991"/>
+                    <a:pt x="3103" y="1991"/>
+                  </a:cubicBezTo>
+                  <a:lnTo>
+                    <a:pt x="2552" y="1991"/>
+                  </a:lnTo>
+                  <a:cubicBezTo>
+                    <a:pt x="2486" y="1991"/>
+                    <a:pt x="2432" y="2045"/>
+                    <a:pt x="2432" y="2111"/>
+                  </a:cubicBezTo>
+                  <a:cubicBezTo>
+                    <a:pt x="2432" y="2178"/>
+                    <a:pt x="2486" y="2231"/>
+                    <a:pt x="2552" y="2231"/>
+                  </a:cubicBezTo>
+                  <a:lnTo>
+                    <a:pt x="3103" y="2231"/>
+                  </a:lnTo>
+                  <a:close/>
+                  <a:moveTo>
+                    <a:pt x="3473" y="2768"/>
+                  </a:moveTo>
+                  <a:cubicBezTo>
+                    <a:pt x="3473" y="2701"/>
+                    <a:pt x="3419" y="2648"/>
+                    <a:pt x="3353" y="2648"/>
+                  </a:cubicBezTo>
+                  <a:lnTo>
+                    <a:pt x="2303" y="2648"/>
+                  </a:lnTo>
+                  <a:cubicBezTo>
+                    <a:pt x="2236" y="2648"/>
+                    <a:pt x="2183" y="2701"/>
+                    <a:pt x="2183" y="2768"/>
+                  </a:cubicBezTo>
+                  <a:cubicBezTo>
+                    <a:pt x="2183" y="2834"/>
+                    <a:pt x="2236" y="2888"/>
+                    <a:pt x="2303" y="2888"/>
+                  </a:cubicBezTo>
+                  <a:lnTo>
+                    <a:pt x="3353" y="2888"/>
+                  </a:lnTo>
+                  <a:cubicBezTo>
+                    <a:pt x="3419" y="2888"/>
+                    <a:pt x="3473" y="2834"/>
+                    <a:pt x="3473" y="2768"/>
+                  </a:cubicBezTo>
+                  <a:close/>
+                  <a:moveTo>
+                    <a:pt x="2552" y="3151"/>
+                  </a:moveTo>
+                  <a:cubicBezTo>
+                    <a:pt x="2486" y="3151"/>
+                    <a:pt x="2432" y="3205"/>
+                    <a:pt x="2432" y="3271"/>
+                  </a:cubicBezTo>
+                  <a:cubicBezTo>
+                    <a:pt x="2432" y="3338"/>
+                    <a:pt x="2486" y="3391"/>
+                    <a:pt x="2552" y="3391"/>
+                  </a:cubicBezTo>
+                  <a:lnTo>
+                    <a:pt x="3103" y="3391"/>
+                  </a:lnTo>
+                  <a:cubicBezTo>
+                    <a:pt x="3170" y="3391"/>
+                    <a:pt x="3223" y="3338"/>
+                    <a:pt x="3223" y="3271"/>
+                  </a:cubicBezTo>
+                  <a:cubicBezTo>
+                    <a:pt x="3223" y="3205"/>
+                    <a:pt x="3170" y="3151"/>
+                    <a:pt x="3103" y="3151"/>
+                  </a:cubicBezTo>
+                  <a:lnTo>
+                    <a:pt x="2552" y="3151"/>
+                  </a:lnTo>
+                  <a:close/>
+                  <a:moveTo>
+                    <a:pt x="4448" y="700"/>
+                  </a:moveTo>
+                  <a:lnTo>
+                    <a:pt x="4448" y="1442"/>
+                  </a:lnTo>
+                  <a:cubicBezTo>
+                    <a:pt x="4448" y="1509"/>
+                    <a:pt x="4501" y="1562"/>
+                    <a:pt x="4568" y="1562"/>
+                  </a:cubicBezTo>
+                  <a:cubicBezTo>
+                    <a:pt x="4634" y="1562"/>
+                    <a:pt x="4688" y="1509"/>
+                    <a:pt x="4688" y="1442"/>
+                  </a:cubicBezTo>
+                  <a:lnTo>
+                    <a:pt x="4688" y="700"/>
+                  </a:lnTo>
+                  <a:cubicBezTo>
+                    <a:pt x="4688" y="314"/>
+                    <a:pt x="4374" y="0"/>
+                    <a:pt x="3988" y="0"/>
+                  </a:cubicBezTo>
+                  <a:lnTo>
+                    <a:pt x="604" y="0"/>
+                  </a:lnTo>
+                  <a:cubicBezTo>
+                    <a:pt x="271" y="0"/>
+                    <a:pt x="0" y="271"/>
+                    <a:pt x="0" y="604"/>
+                  </a:cubicBezTo>
+                  <a:lnTo>
+                    <a:pt x="0" y="1672"/>
+                  </a:lnTo>
+                  <a:cubicBezTo>
+                    <a:pt x="0" y="1738"/>
+                    <a:pt x="53" y="1792"/>
+                    <a:pt x="120" y="1792"/>
+                  </a:cubicBezTo>
+                  <a:lnTo>
+                    <a:pt x="566" y="1792"/>
+                  </a:lnTo>
+                  <a:cubicBezTo>
+                    <a:pt x="632" y="1792"/>
+                    <a:pt x="686" y="1738"/>
+                    <a:pt x="686" y="1672"/>
+                  </a:cubicBezTo>
+                  <a:cubicBezTo>
+                    <a:pt x="686" y="1606"/>
+                    <a:pt x="632" y="1552"/>
+                    <a:pt x="566" y="1552"/>
+                  </a:cubicBezTo>
+                  <a:lnTo>
+                    <a:pt x="240" y="1552"/>
+                  </a:lnTo>
+                  <a:lnTo>
+                    <a:pt x="240" y="604"/>
+                  </a:lnTo>
+                  <a:cubicBezTo>
+                    <a:pt x="240" y="403"/>
+                    <a:pt x="403" y="240"/>
+                    <a:pt x="604" y="240"/>
+                  </a:cubicBezTo>
+                  <a:cubicBezTo>
+                    <a:pt x="805" y="240"/>
+                    <a:pt x="968" y="403"/>
+                    <a:pt x="968" y="604"/>
+                  </a:cubicBezTo>
+                  <a:lnTo>
+                    <a:pt x="968" y="4179"/>
+                  </a:lnTo>
+                  <a:cubicBezTo>
+                    <a:pt x="968" y="4565"/>
+                    <a:pt x="1282" y="4879"/>
+                    <a:pt x="1668" y="4879"/>
+                  </a:cubicBezTo>
+                  <a:lnTo>
+                    <a:pt x="3904" y="4879"/>
+                  </a:lnTo>
+                  <a:cubicBezTo>
+                    <a:pt x="3970" y="4879"/>
+                    <a:pt x="4024" y="4825"/>
+                    <a:pt x="4024" y="4759"/>
+                  </a:cubicBezTo>
+                  <a:cubicBezTo>
+                    <a:pt x="4024" y="4693"/>
+                    <a:pt x="3970" y="4639"/>
+                    <a:pt x="3904" y="4639"/>
+                  </a:cubicBezTo>
+                  <a:lnTo>
+                    <a:pt x="1668" y="4639"/>
+                  </a:lnTo>
+                  <a:cubicBezTo>
+                    <a:pt x="1415" y="4639"/>
+                    <a:pt x="1208" y="4433"/>
+                    <a:pt x="1208" y="4179"/>
+                  </a:cubicBezTo>
+                  <a:lnTo>
+                    <a:pt x="1208" y="604"/>
+                  </a:lnTo>
+                  <a:cubicBezTo>
+                    <a:pt x="1208" y="468"/>
+                    <a:pt x="1163" y="341"/>
+                    <a:pt x="1086" y="240"/>
+                  </a:cubicBezTo>
+                  <a:lnTo>
+                    <a:pt x="3988" y="240"/>
+                  </a:lnTo>
+                  <a:cubicBezTo>
+                    <a:pt x="4241" y="240"/>
+                    <a:pt x="4448" y="446"/>
+                    <a:pt x="4448" y="700"/>
+                  </a:cubicBezTo>
+                  <a:close/>
+                  <a:moveTo>
+                    <a:pt x="4787" y="2000"/>
+                  </a:moveTo>
+                  <a:lnTo>
+                    <a:pt x="4568" y="2000"/>
+                  </a:lnTo>
+                  <a:cubicBezTo>
+                    <a:pt x="4501" y="2000"/>
+                    <a:pt x="4448" y="2054"/>
+                    <a:pt x="4448" y="2120"/>
+                  </a:cubicBezTo>
+                  <a:cubicBezTo>
+                    <a:pt x="4448" y="2187"/>
+                    <a:pt x="4501" y="2240"/>
+                    <a:pt x="4568" y="2240"/>
+                  </a:cubicBezTo>
+                  <a:lnTo>
+                    <a:pt x="4787" y="2240"/>
+                  </a:lnTo>
+                  <a:cubicBezTo>
+                    <a:pt x="4842" y="2240"/>
+                    <a:pt x="4887" y="2285"/>
+                    <a:pt x="4887" y="2340"/>
+                  </a:cubicBezTo>
+                  <a:lnTo>
+                    <a:pt x="4887" y="3718"/>
+                  </a:lnTo>
+                  <a:cubicBezTo>
+                    <a:pt x="4887" y="3785"/>
+                    <a:pt x="4941" y="3838"/>
+                    <a:pt x="5007" y="3838"/>
+                  </a:cubicBezTo>
+                  <a:cubicBezTo>
+                    <a:pt x="5073" y="3838"/>
+                    <a:pt x="5127" y="3785"/>
+                    <a:pt x="5127" y="3718"/>
+                  </a:cubicBezTo>
+                  <a:lnTo>
+                    <a:pt x="5127" y="2340"/>
+                  </a:lnTo>
+                  <a:cubicBezTo>
+                    <a:pt x="5127" y="2153"/>
+                    <a:pt x="4975" y="2000"/>
+                    <a:pt x="4787" y="2000"/>
+                  </a:cubicBezTo>
+                  <a:close/>
+                  <a:moveTo>
+                    <a:pt x="4568" y="5139"/>
+                  </a:moveTo>
+                  <a:cubicBezTo>
+                    <a:pt x="4501" y="5139"/>
+                    <a:pt x="4448" y="5193"/>
+                    <a:pt x="4448" y="5259"/>
+                  </a:cubicBezTo>
+                  <a:lnTo>
+                    <a:pt x="4448" y="5281"/>
+                  </a:lnTo>
+                  <a:cubicBezTo>
+                    <a:pt x="4448" y="5347"/>
+                    <a:pt x="4501" y="5401"/>
+                    <a:pt x="4568" y="5401"/>
+                  </a:cubicBezTo>
+                  <a:cubicBezTo>
+                    <a:pt x="4634" y="5401"/>
+                    <a:pt x="4688" y="5347"/>
+                    <a:pt x="4688" y="5281"/>
+                  </a:cubicBezTo>
+                  <a:lnTo>
+                    <a:pt x="4688" y="5259"/>
+                  </a:lnTo>
+                  <a:cubicBezTo>
+                    <a:pt x="4688" y="5193"/>
+                    <a:pt x="4634" y="5139"/>
+                    <a:pt x="4568" y="5139"/>
+                  </a:cubicBezTo>
+                  <a:close/>
+                  <a:moveTo>
+                    <a:pt x="4568" y="2439"/>
+                  </a:moveTo>
+                  <a:cubicBezTo>
+                    <a:pt x="4501" y="2439"/>
+                    <a:pt x="4448" y="2492"/>
+                    <a:pt x="4448" y="2559"/>
+                  </a:cubicBezTo>
+                  <a:lnTo>
+                    <a:pt x="4448" y="4854"/>
+                  </a:lnTo>
+                  <a:cubicBezTo>
+                    <a:pt x="4448" y="4920"/>
+                    <a:pt x="4501" y="4974"/>
+                    <a:pt x="4568" y="4974"/>
+                  </a:cubicBezTo>
+                  <a:cubicBezTo>
+                    <a:pt x="4634" y="4974"/>
+                    <a:pt x="4688" y="4920"/>
+                    <a:pt x="4688" y="4854"/>
+                  </a:cubicBezTo>
+                  <a:lnTo>
+                    <a:pt x="4688" y="2559"/>
+                  </a:lnTo>
+                  <a:cubicBezTo>
+                    <a:pt x="4688" y="2492"/>
+                    <a:pt x="4634" y="2439"/>
+                    <a:pt x="4568" y="2439"/>
+                  </a:cubicBezTo>
+                  <a:close/>
+                </a:path>
+              </a:pathLst>
+            </a:custGeom>
+            <a:solidFill>
+              <a:schemeClr val="bg1">
+                <a:lumMod val="85000"/>
+              </a:schemeClr>
+            </a:solidFill>
+            <a:ln>
+              <a:noFill/>
+            </a:ln>
+          </p:spPr>
+          <p:txBody>
+            <a:bodyPr/>
+            <a:lstStyle/>
+            <a:p>
+              <a:endParaRPr lang="zh-CN" altLang="en-US">
+                <a:cs typeface="+mn-ea"/>
+                <a:sym typeface="+mn-lt"/>
+              </a:endParaRPr>
+            </a:p>
+          </p:txBody>
+        </p:sp>
+      </p:grpSp>
+      <p:sp>
+        <p:nvSpPr>
+          <p:cNvPr id="5" name="矩形 4"/>
+          <p:cNvSpPr/>
+          <p:nvPr/>
+        </p:nvSpPr>
+        <p:spPr>
+          <a:xfrm>
+            <a:off x="3685002" y="2413338"/>
+            <a:ext cx="6096000" cy="2031325"/>
+          </a:xfrm>
+          <a:prstGeom prst="rect">
+            <a:avLst/>
+          </a:prstGeom>
+        </p:spPr>
+        <p:txBody>
+          <a:bodyPr>
+            <a:spAutoFit/>
+          </a:bodyPr>
+          <a:lstStyle/>
+          <a:p>
+            <a:r>
+              <a:rPr lang="en-US" altLang="zh-CN" dirty="0"/>
+              <a:t>1</a:t>
+            </a:r>
+            <a:r>
+              <a:rPr lang="zh-CN" altLang="en-US" dirty="0"/>
+              <a:t>、路由离开三维服务，重新进入会报错</a:t>
+            </a:r>
+            <a:r>
+              <a:rPr lang="zh-CN" altLang="en-US" dirty="0" smtClean="0"/>
+              <a:t>，不断切换内存会不断</a:t>
+            </a:r>
+            <a:r>
+              <a:rPr lang="zh-CN" altLang="en-US" dirty="0"/>
+              <a:t>上升直至崩溃</a:t>
+            </a:r>
+            <a:endParaRPr lang="en-US" altLang="zh-CN" dirty="0"/>
+          </a:p>
+          <a:p>
+            <a:r>
+              <a:rPr lang="zh-CN" altLang="en-US" dirty="0" smtClean="0"/>
+              <a:t>解决</a:t>
+            </a:r>
+            <a:r>
+              <a:rPr lang="zh-CN" altLang="en-US" dirty="0"/>
+              <a:t>方法：</a:t>
+            </a:r>
+            <a:r>
+              <a:rPr lang="en-US" altLang="zh-CN" dirty="0" err="1"/>
+              <a:t>unityInstance.Quit</a:t>
+            </a:r>
+            <a:r>
+              <a:rPr lang="en-US" altLang="zh-CN" dirty="0"/>
+              <a:t>(callback)</a:t>
+            </a:r>
+            <a:r>
+              <a:rPr lang="zh-CN" altLang="en-US" dirty="0"/>
+              <a:t>，已经在容器组件中调用，业务组件无需任何处理。</a:t>
+            </a:r>
+            <a:endParaRPr lang="en-US" altLang="zh-CN" dirty="0"/>
+          </a:p>
+          <a:p>
+            <a:r>
+              <a:rPr lang="en-US" altLang="zh-CN" dirty="0"/>
+              <a:t>2</a:t>
+            </a:r>
+            <a:r>
+              <a:rPr lang="zh-CN" altLang="en-US" dirty="0"/>
+              <a:t>、三维容器的弹性布局问题，只提供了固定大小布局</a:t>
+            </a:r>
+            <a:endParaRPr lang="en-US" altLang="zh-CN" dirty="0"/>
+          </a:p>
+          <a:p>
+            <a:r>
+              <a:rPr lang="zh-CN" altLang="en-US" dirty="0"/>
+              <a:t>解决方法：容器组件监听宽高动态改变</a:t>
+            </a:r>
+            <a:r>
+              <a:rPr lang="en-US" altLang="zh-CN" dirty="0"/>
+              <a:t>canvas</a:t>
+            </a:r>
+            <a:r>
+              <a:rPr lang="zh-CN" altLang="en-US" dirty="0"/>
+              <a:t>标签的宽和高，外部监听窗口变化实时改变宽高就</a:t>
+            </a:r>
+            <a:r>
+              <a:rPr lang="zh-CN" altLang="en-US" dirty="0" smtClean="0"/>
+              <a:t>行。</a:t>
+            </a:r>
+            <a:endParaRPr lang="zh-CN" altLang="en-US" dirty="0"/>
+          </a:p>
+        </p:txBody>
+      </p:sp>
+    </p:spTree>
+    <p:extLst>
+      <p:ext uri="{BB962C8B-B14F-4D97-AF65-F5344CB8AC3E}">
+        <p14:creationId xmlns:p14="http://schemas.microsoft.com/office/powerpoint/2010/main" val="2341500656"/>
+      </p:ext>
+    </p:extLst>
+  </p:cSld>
+  <p:clrMapOvr>
+    <a:masterClrMapping/>
+  </p:clrMapOvr>
+  <mc:AlternateContent xmlns:mc="http://schemas.openxmlformats.org/markup-compatibility/2006" xmlns:p14="http://schemas.microsoft.com/office/powerpoint/2010/main">
+    <mc:Choice Requires="p14">
+      <p:transition spd="med" p14:dur="700">
+        <p:fade/>
+      </p:transition>
+    </mc:Choice>
+    <mc:Fallback xmlns="">
+      <p:transition spd="med">
+        <p:fade/>
+      </p:transition>
+    </mc:Fallback>
+  </mc:AlternateContent>
+  <p:timing>
+    <p:tnLst>
+      <p:par>
+        <p:cTn id="1" dur="indefinite" restart="never" nodeType="tmRoot"/>
+      </p:par>
+    </p:tnLst>
+  </p:timing>
+</p:sld>
+</file>
+
+<file path=ppt/slides/slide21.xml><?xml version="1.0" encoding="utf-8"?>
 <p:sld xmlns:a="http://schemas.openxmlformats.org/drawingml/2006/main" xmlns:r="http://schemas.openxmlformats.org/officeDocument/2006/relationships" xmlns:p="http://schemas.openxmlformats.org/presentationml/2006/main">
   <p:cSld>
     <p:spTree>
@@ -17225,11 +17546,7 @@
                 <a:p>
                   <a:r>
                     <a:rPr lang="zh-CN" altLang="en-US" sz="1400" b="1" dirty="0" smtClean="0"/>
-                    <a:t>控件</a:t>
-                  </a:r>
-                  <a:r>
-                    <a:rPr lang="zh-CN" altLang="en-US" sz="1400" b="1" dirty="0" smtClean="0"/>
-                    <a:t>的完善</a:t>
+                    <a:t>控件的完善</a:t>
                   </a:r>
                   <a:endParaRPr lang="id-ID" sz="1400" b="1" dirty="0"/>
                 </a:p>
@@ -17361,11 +17678,7 @@
                   </a:pPr>
                   <a:r>
                     <a:rPr lang="zh-CN" altLang="en-US" sz="1100" dirty="0" smtClean="0"/>
-                    <a:t>提供更多</a:t>
-                  </a:r>
-                  <a:r>
-                    <a:rPr lang="zh-CN" altLang="en-US" sz="1100" dirty="0" smtClean="0"/>
-                    <a:t>的可视化控件</a:t>
+                    <a:t>提供更多的可视化控件</a:t>
                   </a:r>
                   <a:endParaRPr lang="en-US" altLang="zh-CN" sz="1100" dirty="0" smtClean="0"/>
                 </a:p>
@@ -17958,7 +18271,7 @@
 </p:sld>
 </file>
 
-<file path=ppt/slides/slide21.xml><?xml version="1.0" encoding="utf-8"?>
+<file path=ppt/slides/slide22.xml><?xml version="1.0" encoding="utf-8"?>
 <p:sld xmlns:a="http://schemas.openxmlformats.org/drawingml/2006/main" xmlns:r="http://schemas.openxmlformats.org/officeDocument/2006/relationships" xmlns:p="http://schemas.openxmlformats.org/presentationml/2006/main">
   <p:cSld>
     <p:spTree>
@@ -18108,7 +18421,7 @@
 </p:sld>
 </file>
 
-<file path=ppt/slides/slide22.xml><?xml version="1.0" encoding="utf-8"?>
+<file path=ppt/slides/slide23.xml><?xml version="1.0" encoding="utf-8"?>
 <p:sld xmlns:a="http://schemas.openxmlformats.org/drawingml/2006/main" xmlns:r="http://schemas.openxmlformats.org/officeDocument/2006/relationships" xmlns:p="http://schemas.openxmlformats.org/presentationml/2006/main">
   <p:cSld>
     <p:spTree>
@@ -21495,6 +21808,355 @@
       </p:grpSpPr>
       <p:sp>
         <p:nvSpPr>
+          <p:cNvPr id="3" name="标题 2"/>
+          <p:cNvSpPr>
+            <a:spLocks noGrp="1"/>
+          </p:cNvSpPr>
+          <p:nvPr>
+            <p:ph type="title"/>
+          </p:nvPr>
+        </p:nvSpPr>
+        <p:spPr/>
+        <p:txBody>
+          <a:bodyPr/>
+          <a:lstStyle/>
+          <a:p>
+            <a:r>
+              <a:rPr lang="zh-CN" altLang="en-US" dirty="0"/>
+              <a:t>优点</a:t>
+            </a:r>
+            <a:endParaRPr lang="zh-CN" altLang="en-US" dirty="0"/>
+          </a:p>
+        </p:txBody>
+      </p:sp>
+      <p:pic>
+        <p:nvPicPr>
+          <p:cNvPr id="103" name="图片 102"/>
+          <p:cNvPicPr>
+            <a:picLocks noChangeAspect="1"/>
+          </p:cNvPicPr>
+          <p:nvPr/>
+        </p:nvPicPr>
+        <p:blipFill>
+          <a:blip r:embed="rId3" cstate="print">
+            <a:extLst>
+              <a:ext uri="{28A0092B-C50C-407E-A947-70E740481C1C}">
+                <a14:useLocalDpi xmlns:a14="http://schemas.microsoft.com/office/drawing/2010/main" val="0"/>
+              </a:ext>
+            </a:extLst>
+          </a:blip>
+          <a:stretch>
+            <a:fillRect/>
+          </a:stretch>
+        </p:blipFill>
+        <p:spPr>
+          <a:xfrm>
+            <a:off x="9456374" y="337205"/>
+            <a:ext cx="2422630" cy="342895"/>
+          </a:xfrm>
+          <a:prstGeom prst="rect">
+            <a:avLst/>
+          </a:prstGeom>
+        </p:spPr>
+      </p:pic>
+      <p:sp>
+        <p:nvSpPr>
+          <p:cNvPr id="5" name="TextBox 96"/>
+          <p:cNvSpPr txBox="1"/>
+          <p:nvPr/>
+        </p:nvSpPr>
+        <p:spPr>
+          <a:xfrm>
+            <a:off x="1035259" y="1408050"/>
+            <a:ext cx="9463776" cy="4662762"/>
+          </a:xfrm>
+          <a:prstGeom prst="rect">
+            <a:avLst/>
+          </a:prstGeom>
+          <a:noFill/>
+        </p:spPr>
+        <p:txBody>
+          <a:bodyPr wrap="square" lIns="91387" tIns="45694" rIns="91387" bIns="45694" rtlCol="0">
+            <a:spAutoFit/>
+          </a:bodyPr>
+          <a:lstStyle/>
+          <a:p>
+            <a:pPr marL="285586" indent="-285586" defTabSz="913874">
+              <a:lnSpc>
+                <a:spcPct val="150000"/>
+              </a:lnSpc>
+              <a:buClr>
+                <a:srgbClr val="FF0000"/>
+              </a:buClr>
+              <a:buFont typeface="Wingdings" panose="05000000000000000000" pitchFamily="2" charset="2"/>
+              <a:buChar char="n"/>
+            </a:pPr>
+            <a:r>
+              <a:rPr lang="zh-CN" altLang="en-US" dirty="0" smtClean="0"/>
+              <a:t>运行环境：</a:t>
+            </a:r>
+            <a:endParaRPr lang="en-US" altLang="zh-CN" dirty="0"/>
+          </a:p>
+          <a:p>
+            <a:pPr lvl="1" defTabSz="913874">
+              <a:lnSpc>
+                <a:spcPct val="150000"/>
+              </a:lnSpc>
+              <a:buClr>
+                <a:srgbClr val="FF0000"/>
+              </a:buClr>
+            </a:pPr>
+            <a:r>
+              <a:rPr lang="zh-CN" altLang="en-US" dirty="0" smtClean="0"/>
+              <a:t>运行</a:t>
+            </a:r>
+            <a:r>
+              <a:rPr lang="zh-CN" altLang="en-US" dirty="0"/>
+              <a:t>环境基于</a:t>
+            </a:r>
+            <a:r>
+              <a:rPr lang="en-US" altLang="zh-CN" dirty="0" err="1"/>
+              <a:t>WebAssembly</a:t>
+            </a:r>
+            <a:r>
+              <a:rPr lang="zh-CN" altLang="en-US" dirty="0"/>
+              <a:t>，相比</a:t>
+            </a:r>
+            <a:r>
+              <a:rPr lang="en-US" altLang="zh-CN" dirty="0"/>
+              <a:t>JS</a:t>
+            </a:r>
+            <a:r>
+              <a:rPr lang="zh-CN" altLang="en-US" dirty="0"/>
+              <a:t>性能高、体积</a:t>
+            </a:r>
+            <a:r>
+              <a:rPr lang="zh-CN" altLang="en-US" dirty="0" smtClean="0"/>
+              <a:t>小</a:t>
+            </a:r>
+            <a:r>
+              <a:rPr lang="zh-CN" altLang="en-US" dirty="0"/>
+              <a:t>。</a:t>
+            </a:r>
+            <a:endParaRPr lang="en-US" altLang="zh-CN" dirty="0"/>
+          </a:p>
+          <a:p>
+            <a:pPr marL="285586" indent="-285586" defTabSz="913874">
+              <a:lnSpc>
+                <a:spcPct val="150000"/>
+              </a:lnSpc>
+              <a:buClr>
+                <a:srgbClr val="FF0000"/>
+              </a:buClr>
+              <a:buFont typeface="Wingdings" panose="05000000000000000000" pitchFamily="2" charset="2"/>
+              <a:buChar char="n"/>
+            </a:pPr>
+            <a:r>
+              <a:rPr lang="zh-CN" altLang="en-US" dirty="0" smtClean="0">
+                <a:solidFill>
+                  <a:prstClr val="black"/>
+                </a:solidFill>
+              </a:rPr>
+              <a:t>视</a:t>
+            </a:r>
+            <a:r>
+              <a:rPr lang="zh-CN" altLang="en-US" dirty="0">
+                <a:solidFill>
+                  <a:prstClr val="black"/>
+                </a:solidFill>
+              </a:rPr>
+              <a:t>效配置和数据驱动：将展示视效和数据进行分离，提供场景、图层以及标注、动画、图形渲染等视效配置界面，可实现不需要写任何三维相关代码，以数据驱动视效配置，生成完整的三维可视化场景</a:t>
+            </a:r>
+            <a:r>
+              <a:rPr lang="zh-CN" altLang="en-US" dirty="0" smtClean="0">
+                <a:solidFill>
+                  <a:prstClr val="black"/>
+                </a:solidFill>
+              </a:rPr>
+              <a:t>。</a:t>
+            </a:r>
+            <a:endParaRPr lang="en-US" altLang="zh-CN" dirty="0" smtClean="0">
+              <a:solidFill>
+                <a:prstClr val="black"/>
+              </a:solidFill>
+            </a:endParaRPr>
+          </a:p>
+          <a:p>
+            <a:pPr marL="285586" indent="-285586" defTabSz="913874">
+              <a:lnSpc>
+                <a:spcPct val="150000"/>
+              </a:lnSpc>
+              <a:buClr>
+                <a:srgbClr val="FF0000"/>
+              </a:buClr>
+              <a:buFont typeface="Wingdings" panose="05000000000000000000" pitchFamily="2" charset="2"/>
+              <a:buChar char="n"/>
+            </a:pPr>
+            <a:r>
+              <a:rPr lang="zh-CN" altLang="en-US" dirty="0" smtClean="0">
+                <a:solidFill>
+                  <a:prstClr val="black"/>
+                </a:solidFill>
+              </a:rPr>
+              <a:t>通俗易懂：</a:t>
+            </a:r>
+            <a:r>
+              <a:rPr lang="zh-CN" altLang="en-US" dirty="0"/>
+              <a:t>将复杂难懂的底层能力（如点线面处理、坐标系转换、贴图、着色器、灯光）变成简易易懂的</a:t>
+            </a:r>
+            <a:r>
+              <a:rPr lang="en-US" altLang="zh-CN" dirty="0"/>
+              <a:t>JS</a:t>
+            </a:r>
+            <a:r>
+              <a:rPr lang="zh-CN" altLang="en-US" dirty="0"/>
+              <a:t>脚本方法和参数</a:t>
+            </a:r>
+            <a:r>
+              <a:rPr lang="zh-CN" altLang="en-US" dirty="0" smtClean="0"/>
+              <a:t>设置。</a:t>
+            </a:r>
+            <a:endParaRPr lang="en-US" altLang="zh-CN" dirty="0">
+              <a:solidFill>
+                <a:prstClr val="black"/>
+              </a:solidFill>
+            </a:endParaRPr>
+          </a:p>
+          <a:p>
+            <a:pPr marL="285586" indent="-285586" defTabSz="913874">
+              <a:lnSpc>
+                <a:spcPct val="150000"/>
+              </a:lnSpc>
+              <a:buClr>
+                <a:srgbClr val="FF0000"/>
+              </a:buClr>
+              <a:buFont typeface="Wingdings" panose="05000000000000000000" pitchFamily="2" charset="2"/>
+              <a:buChar char="n"/>
+            </a:pPr>
+            <a:r>
+              <a:rPr lang="zh-CN" altLang="en-US" dirty="0"/>
+              <a:t>服务集成：引擎提供服务集成能力，各个应用组件申请相对独立的工作空间，引擎对各应用组件的三维相关进行集中管理</a:t>
+            </a:r>
+            <a:r>
+              <a:rPr lang="zh-CN" altLang="en-US" dirty="0" smtClean="0"/>
+              <a:t>。</a:t>
+            </a:r>
+            <a:endParaRPr lang="en-US" altLang="zh-CN" dirty="0" smtClean="0"/>
+          </a:p>
+          <a:p>
+            <a:pPr marL="285586" indent="-285586" defTabSz="913874">
+              <a:lnSpc>
+                <a:spcPct val="150000"/>
+              </a:lnSpc>
+              <a:buClr>
+                <a:srgbClr val="FF0000"/>
+              </a:buClr>
+              <a:buFont typeface="Wingdings" panose="05000000000000000000" pitchFamily="2" charset="2"/>
+              <a:buChar char="n"/>
+            </a:pPr>
+            <a:r>
+              <a:rPr lang="zh-CN" altLang="en-US" dirty="0" smtClean="0">
+                <a:solidFill>
+                  <a:prstClr val="black"/>
+                </a:solidFill>
+              </a:rPr>
+              <a:t>扩展：</a:t>
+            </a:r>
+            <a:r>
+              <a:rPr lang="zh-CN" altLang="en-US" dirty="0"/>
+              <a:t>提供多元化的数据可视化控件，实现基本地图</a:t>
+            </a:r>
+            <a:r>
+              <a:rPr lang="en-US" altLang="zh-CN" dirty="0"/>
+              <a:t>+</a:t>
+            </a:r>
+            <a:r>
+              <a:rPr lang="zh-CN" altLang="en-US" dirty="0"/>
+              <a:t>数据可视化控件</a:t>
+            </a:r>
+            <a:r>
+              <a:rPr lang="en-US" altLang="zh-CN" dirty="0"/>
+              <a:t>+</a:t>
+            </a:r>
+            <a:r>
+              <a:rPr lang="zh-CN" altLang="en-US" dirty="0"/>
+              <a:t>面板可视化控件</a:t>
+            </a:r>
+            <a:r>
+              <a:rPr lang="en-US" altLang="zh-CN" dirty="0"/>
+              <a:t>+</a:t>
+            </a:r>
+            <a:r>
+              <a:rPr lang="zh-CN" altLang="en-US" dirty="0"/>
+              <a:t>全局滤镜控件</a:t>
+            </a:r>
+            <a:r>
+              <a:rPr lang="en-US" altLang="zh-CN" dirty="0"/>
+              <a:t>+</a:t>
+            </a:r>
+            <a:r>
+              <a:rPr lang="zh-CN" altLang="en-US" dirty="0"/>
+              <a:t>镜头动画控件相结合，满足多种业务</a:t>
+            </a:r>
+            <a:r>
+              <a:rPr lang="zh-CN" altLang="en-US" dirty="0" smtClean="0"/>
+              <a:t>需求。</a:t>
+            </a:r>
+            <a:endParaRPr lang="zh-CN" altLang="en-US" dirty="0"/>
+          </a:p>
+        </p:txBody>
+      </p:sp>
+    </p:spTree>
+    <p:extLst>
+      <p:ext uri="{BB962C8B-B14F-4D97-AF65-F5344CB8AC3E}">
+        <p14:creationId xmlns:p14="http://schemas.microsoft.com/office/powerpoint/2010/main" val="4139907456"/>
+      </p:ext>
+    </p:extLst>
+  </p:cSld>
+  <p:clrMapOvr>
+    <a:masterClrMapping/>
+  </p:clrMapOvr>
+  <mc:AlternateContent xmlns:mc="http://schemas.openxmlformats.org/markup-compatibility/2006" xmlns:p14="http://schemas.microsoft.com/office/powerpoint/2010/main">
+    <mc:Choice Requires="p14">
+      <p:transition spd="med" p14:dur="700">
+        <p:fade/>
+      </p:transition>
+    </mc:Choice>
+    <mc:Fallback xmlns="">
+      <p:transition spd="med">
+        <p:fade/>
+      </p:transition>
+    </mc:Fallback>
+  </mc:AlternateContent>
+  <p:timing>
+    <p:tnLst>
+      <p:par>
+        <p:cTn id="1" dur="indefinite" restart="never" nodeType="tmRoot"/>
+      </p:par>
+    </p:tnLst>
+  </p:timing>
+</p:sld>
+</file>
+
+<file path=ppt/slides/slide8.xml><?xml version="1.0" encoding="utf-8"?>
+<p:sld xmlns:a="http://schemas.openxmlformats.org/drawingml/2006/main" xmlns:r="http://schemas.openxmlformats.org/officeDocument/2006/relationships" xmlns:p="http://schemas.openxmlformats.org/presentationml/2006/main">
+  <p:cSld>
+    <p:spTree>
+      <p:nvGrpSpPr>
+        <p:cNvPr id="1" name=""/>
+        <p:cNvGrpSpPr/>
+        <p:nvPr/>
+      </p:nvGrpSpPr>
+      <p:grpSpPr>
+        <a:xfrm>
+          <a:off x="0" y="0"/>
+          <a:ext cx="0" cy="0"/>
+          <a:chOff x="0" y="0"/>
+          <a:chExt cx="0" cy="0"/>
+        </a:xfrm>
+      </p:grpSpPr>
+      <p:sp>
+        <p:nvSpPr>
           <p:cNvPr id="9" name="流程图: 延期 8"/>
           <p:cNvSpPr/>
           <p:nvPr/>
@@ -22389,7 +23051,7 @@
 </p:sld>
 </file>
 
-<file path=ppt/slides/slide8.xml><?xml version="1.0" encoding="utf-8"?>
+<file path=ppt/slides/slide9.xml><?xml version="1.0" encoding="utf-8"?>
 <p:sld xmlns:a="http://schemas.openxmlformats.org/drawingml/2006/main" xmlns:r="http://schemas.openxmlformats.org/officeDocument/2006/relationships" xmlns:p="http://schemas.openxmlformats.org/presentationml/2006/main">
   <p:cSld>
     <p:spTree>
@@ -22602,242 +23264,6 @@
     <p:extLst>
       <p:ext uri="{BB962C8B-B14F-4D97-AF65-F5344CB8AC3E}">
         <p14:creationId xmlns:p14="http://schemas.microsoft.com/office/powerpoint/2010/main" val="3182804327"/>
-      </p:ext>
-    </p:extLst>
-  </p:cSld>
-  <p:clrMapOvr>
-    <a:masterClrMapping/>
-  </p:clrMapOvr>
-  <mc:AlternateContent xmlns:mc="http://schemas.openxmlformats.org/markup-compatibility/2006" xmlns:p14="http://schemas.microsoft.com/office/powerpoint/2010/main">
-    <mc:Choice Requires="p14">
-      <p:transition spd="med" p14:dur="700">
-        <p:fade/>
-      </p:transition>
-    </mc:Choice>
-    <mc:Fallback xmlns="">
-      <p:transition spd="med">
-        <p:fade/>
-      </p:transition>
-    </mc:Fallback>
-  </mc:AlternateContent>
-  <p:timing>
-    <p:tnLst>
-      <p:par>
-        <p:cTn id="1" dur="indefinite" restart="never" nodeType="tmRoot"/>
-      </p:par>
-    </p:tnLst>
-  </p:timing>
-</p:sld>
-</file>
-
-<file path=ppt/slides/slide9.xml><?xml version="1.0" encoding="utf-8"?>
-<p:sld xmlns:a="http://schemas.openxmlformats.org/drawingml/2006/main" xmlns:r="http://schemas.openxmlformats.org/officeDocument/2006/relationships" xmlns:p="http://schemas.openxmlformats.org/presentationml/2006/main">
-  <p:cSld>
-    <p:spTree>
-      <p:nvGrpSpPr>
-        <p:cNvPr id="1" name=""/>
-        <p:cNvGrpSpPr/>
-        <p:nvPr/>
-      </p:nvGrpSpPr>
-      <p:grpSpPr>
-        <a:xfrm>
-          <a:off x="0" y="0"/>
-          <a:ext cx="0" cy="0"/>
-          <a:chOff x="0" y="0"/>
-          <a:chExt cx="0" cy="0"/>
-        </a:xfrm>
-      </p:grpSpPr>
-      <p:sp>
-        <p:nvSpPr>
-          <p:cNvPr id="3" name="标题 2"/>
-          <p:cNvSpPr>
-            <a:spLocks noGrp="1"/>
-          </p:cNvSpPr>
-          <p:nvPr>
-            <p:ph type="title"/>
-          </p:nvPr>
-        </p:nvSpPr>
-        <p:spPr/>
-        <p:txBody>
-          <a:bodyPr/>
-          <a:lstStyle/>
-          <a:p>
-            <a:r>
-              <a:rPr lang="zh-CN" altLang="en-US" dirty="0"/>
-              <a:t>地图结构</a:t>
-            </a:r>
-          </a:p>
-        </p:txBody>
-      </p:sp>
-      <p:pic>
-        <p:nvPicPr>
-          <p:cNvPr id="103" name="图片 102"/>
-          <p:cNvPicPr>
-            <a:picLocks noChangeAspect="1"/>
-          </p:cNvPicPr>
-          <p:nvPr/>
-        </p:nvPicPr>
-        <p:blipFill>
-          <a:blip r:embed="rId3" cstate="print">
-            <a:extLst>
-              <a:ext uri="{28A0092B-C50C-407E-A947-70E740481C1C}">
-                <a14:useLocalDpi xmlns:a14="http://schemas.microsoft.com/office/drawing/2010/main" val="0"/>
-              </a:ext>
-            </a:extLst>
-          </a:blip>
-          <a:stretch>
-            <a:fillRect/>
-          </a:stretch>
-        </p:blipFill>
-        <p:spPr>
-          <a:xfrm>
-            <a:off x="9456374" y="337205"/>
-            <a:ext cx="2422630" cy="342895"/>
-          </a:xfrm>
-          <a:prstGeom prst="rect">
-            <a:avLst/>
-          </a:prstGeom>
-        </p:spPr>
-      </p:pic>
-      <p:sp>
-        <p:nvSpPr>
-          <p:cNvPr id="6" name="TextBox 96"/>
-          <p:cNvSpPr txBox="1"/>
-          <p:nvPr/>
-        </p:nvSpPr>
-        <p:spPr>
-          <a:xfrm>
-            <a:off x="1402672" y="1872269"/>
-            <a:ext cx="9463776" cy="3732892"/>
-          </a:xfrm>
-          <a:prstGeom prst="rect">
-            <a:avLst/>
-          </a:prstGeom>
-          <a:noFill/>
-        </p:spPr>
-        <p:txBody>
-          <a:bodyPr wrap="square" lIns="91387" tIns="45694" rIns="91387" bIns="45694" rtlCol="0">
-            <a:spAutoFit/>
-          </a:bodyPr>
-          <a:lstStyle/>
-          <a:p>
-            <a:pPr marL="285586" indent="-285586" defTabSz="913874">
-              <a:lnSpc>
-                <a:spcPct val="150000"/>
-              </a:lnSpc>
-              <a:buClr>
-                <a:srgbClr val="FF0000"/>
-              </a:buClr>
-              <a:buFont typeface="Wingdings" panose="05000000000000000000" pitchFamily="2" charset="2"/>
-              <a:buChar char="n"/>
-            </a:pPr>
-            <a:r>
-              <a:rPr lang="zh-CN" altLang="en-US" sz="2000" dirty="0" smtClean="0"/>
-              <a:t>专题地图</a:t>
-            </a:r>
-            <a:endParaRPr lang="en-US" altLang="zh-CN" sz="2000" dirty="0" smtClean="0"/>
-          </a:p>
-          <a:p>
-            <a:pPr marL="285586" indent="-285586" defTabSz="913874">
-              <a:lnSpc>
-                <a:spcPct val="150000"/>
-              </a:lnSpc>
-              <a:buClr>
-                <a:srgbClr val="FF0000"/>
-              </a:buClr>
-              <a:buFont typeface="Wingdings" panose="05000000000000000000" pitchFamily="2" charset="2"/>
-              <a:buChar char="n"/>
-            </a:pPr>
-            <a:r>
-              <a:rPr lang="zh-CN" altLang="en-US" sz="2000" dirty="0" smtClean="0">
-                <a:solidFill>
-                  <a:prstClr val="black"/>
-                </a:solidFill>
-              </a:rPr>
-              <a:t>图层，包括场景图层和要素图层，</a:t>
-            </a:r>
-            <a:r>
-              <a:rPr lang="zh-CN" altLang="zh-CN" sz="2000" dirty="0"/>
-              <a:t>场景图层指基础三维</a:t>
-            </a:r>
-            <a:r>
-              <a:rPr lang="en-US" altLang="zh-CN" sz="2000" dirty="0"/>
-              <a:t>BIM</a:t>
-            </a:r>
-            <a:r>
-              <a:rPr lang="zh-CN" altLang="zh-CN" sz="2000" dirty="0"/>
-              <a:t>数据的分类，要素图层是设备、数据对象的</a:t>
-            </a:r>
-            <a:r>
-              <a:rPr lang="zh-CN" altLang="zh-CN" sz="2000" dirty="0" smtClean="0"/>
-              <a:t>分类</a:t>
-            </a:r>
-            <a:endParaRPr lang="en-US" altLang="zh-CN" sz="2000" dirty="0" smtClean="0">
-              <a:solidFill>
-                <a:prstClr val="black"/>
-              </a:solidFill>
-            </a:endParaRPr>
-          </a:p>
-          <a:p>
-            <a:pPr marL="285586" indent="-285586" defTabSz="913874">
-              <a:lnSpc>
-                <a:spcPct val="150000"/>
-              </a:lnSpc>
-              <a:buClr>
-                <a:srgbClr val="FF0000"/>
-              </a:buClr>
-              <a:buFont typeface="Wingdings" panose="05000000000000000000" pitchFamily="2" charset="2"/>
-              <a:buChar char="n"/>
-            </a:pPr>
-            <a:r>
-              <a:rPr lang="zh-CN" altLang="en-US" sz="2000" dirty="0" smtClean="0">
-                <a:solidFill>
-                  <a:prstClr val="black"/>
-                </a:solidFill>
-              </a:rPr>
-              <a:t>样式组合是样式的集合</a:t>
-            </a:r>
-            <a:endParaRPr lang="en-US" altLang="zh-CN" sz="2000" dirty="0" smtClean="0">
-              <a:solidFill>
-                <a:prstClr val="black"/>
-              </a:solidFill>
-            </a:endParaRPr>
-          </a:p>
-          <a:p>
-            <a:pPr marL="285586" indent="-285586" defTabSz="913874">
-              <a:lnSpc>
-                <a:spcPct val="150000"/>
-              </a:lnSpc>
-              <a:buClr>
-                <a:srgbClr val="FF0000"/>
-              </a:buClr>
-              <a:buFont typeface="Wingdings" panose="05000000000000000000" pitchFamily="2" charset="2"/>
-              <a:buChar char="n"/>
-            </a:pPr>
-            <a:r>
-              <a:rPr lang="zh-CN" altLang="en-US" sz="2000" dirty="0" smtClean="0">
-                <a:solidFill>
-                  <a:prstClr val="black"/>
-                </a:solidFill>
-              </a:rPr>
-              <a:t>样式，</a:t>
-            </a:r>
-            <a:r>
-              <a:rPr lang="zh-CN" altLang="zh-CN" sz="2000" dirty="0"/>
-              <a:t>描述图层要素对象的表现形式，支持的样式有：三维模型、图标、二维标注、三维标注、图标闪烁动画、图标自旋转动画、图标帧动画、模型颜色渐变动画、模型自旋转动画、模型材质特效、模型高光特效、模型半透明特效、模型全息特效、模型自发光特效</a:t>
-            </a:r>
-            <a:endParaRPr lang="zh-CN" altLang="zh-CN" sz="2000" dirty="0" smtClean="0">
-              <a:solidFill>
-                <a:prstClr val="black"/>
-              </a:solidFill>
-            </a:endParaRPr>
-          </a:p>
-        </p:txBody>
-      </p:sp>
-    </p:spTree>
-    <p:extLst>
-      <p:ext uri="{BB962C8B-B14F-4D97-AF65-F5344CB8AC3E}">
-        <p14:creationId xmlns:p14="http://schemas.microsoft.com/office/powerpoint/2010/main" val="2755263444"/>
       </p:ext>
     </p:extLst>
   </p:cSld>
